--- a/课件/题集刷题导航/第10章-内部排序/第10章-内部排序.pptx
+++ b/课件/题集刷题导航/第10章-内部排序/第10章-内部排序.pptx
@@ -1,25 +1,25 @@
 
 <file path=ppt/presentation.xml><?xml version="1.0" encoding="utf-8"?>
-<p:presentation xmlns:a="http://schemas.openxmlformats.org/drawingml/2006/main" xmlns:r="http://schemas.openxmlformats.org/officeDocument/2006/relationships" xmlns:p="http://schemas.openxmlformats.org/presentationml/2006/main" saveSubsetFonts="1" autoCompressPictures="0">
+<p:presentation xmlns:a="http://schemas.openxmlformats.org/drawingml/2006/main" xmlns:r="http://schemas.openxmlformats.org/officeDocument/2006/relationships" xmlns:p="http://schemas.openxmlformats.org/presentationml/2006/main" autoCompressPictures="0">
   <p:sldMasterIdLst>
     <p:sldMasterId id="2147483648" r:id="rId1"/>
   </p:sldMasterIdLst>
+  <p:notesMasterIdLst>
+    <p:notesMasterId r:id="rId4"/>
+  </p:notesMasterIdLst>
   <p:sldIdLst>
-    <p:sldId id="256" r:id="rId2"/>
-    <p:sldId id="257" r:id="rId3"/>
-    <p:sldId id="258" r:id="rId4"/>
-    <p:sldId id="259" r:id="rId5"/>
-    <p:sldId id="260" r:id="rId6"/>
-    <p:sldId id="261" r:id="rId7"/>
-    <p:sldId id="262" r:id="rId8"/>
-    <p:sldId id="263" r:id="rId9"/>
-    <p:sldId id="264" r:id="rId10"/>
+    <p:sldId id="256" r:id="rId3"/>
+    <p:sldId id="257" r:id="rId5"/>
+    <p:sldId id="258" r:id="rId6"/>
+    <p:sldId id="259" r:id="rId7"/>
+    <p:sldId id="260" r:id="rId8"/>
+    <p:sldId id="261" r:id="rId9"/>
+    <p:sldId id="263" r:id="rId10"/>
+    <p:sldId id="262" r:id="rId11"/>
+    <p:sldId id="264" r:id="rId12"/>
   </p:sldIdLst>
-  <p:notesMasterIdLst>
-    <p:notesMasterId r:id="rId11"/>
-  </p:notesMasterIdLst>
-  <p:sldSz cx="12191695" cy="6858000"/>
-  <p:notesSz cx="6858000" cy="12191695"/>
+  <p:sldSz cx="12191365" cy="6858000"/>
+  <p:notesSz cx="6858000" cy="12191365"/>
   <p:defaultTextStyle>
     <a:lvl1pPr marL="0" algn="l" defTabSz="914400" rtl="0" eaLnBrk="1" latinLnBrk="0" hangingPunct="1">
       <a:defRPr sz="1800" kern="1200">
@@ -197,7 +197,6 @@
           <a:p>
             <a:fld id="{5282F153-3F37-0F45-9E97-73ACFA13230C}" type="datetimeFigureOut">
               <a:rPr lang="en-US"/>
-              <a:t>7/23/19</a:t>
             </a:fld>
             <a:endParaRPr lang="en-US"/>
           </a:p>
@@ -264,6 +263,7 @@
               <a:rPr lang="en-US"/>
               <a:t>Click to edit Master text styles</a:t>
             </a:r>
+            <a:endParaRPr lang="en-US"/>
           </a:p>
           <a:p>
             <a:pPr lvl="1"/>
@@ -271,6 +271,7 @@
               <a:rPr lang="en-US"/>
               <a:t>Second level</a:t>
             </a:r>
+            <a:endParaRPr lang="en-US"/>
           </a:p>
           <a:p>
             <a:pPr lvl="2"/>
@@ -278,6 +279,7 @@
               <a:rPr lang="en-US"/>
               <a:t>Third level</a:t>
             </a:r>
+            <a:endParaRPr lang="en-US"/>
           </a:p>
           <a:p>
             <a:pPr lvl="3"/>
@@ -285,6 +287,7 @@
               <a:rPr lang="en-US"/>
               <a:t>Fourth level</a:t>
             </a:r>
+            <a:endParaRPr lang="en-US"/>
           </a:p>
           <a:p>
             <a:pPr lvl="4"/>
@@ -292,6 +295,7 @@
               <a:rPr lang="en-US"/>
               <a:t>Fifth level</a:t>
             </a:r>
+            <a:endParaRPr lang="en-US"/>
           </a:p>
         </p:txBody>
       </p:sp>
@@ -355,18 +359,12 @@
           <a:p>
             <a:fld id="{CE5E9CC1-C706-0F49-92D6-E571CC5EEA8F}" type="slidenum">
               <a:rPr lang="en-US"/>
-              <a:t>‹#›</a:t>
             </a:fld>
             <a:endParaRPr lang="en-US"/>
           </a:p>
         </p:txBody>
       </p:sp>
     </p:spTree>
-    <p:extLst>
-      <p:ext uri="{BB962C8B-B14F-4D97-AF65-F5344CB8AC3E}">
-        <p14:creationId xmlns:p14="http://schemas.microsoft.com/office/powerpoint/2010/main" val="1024086991"/>
-      </p:ext>
-    </p:extLst>
   </p:cSld>
   <p:clrMap bg1="lt1" tx1="dk1" bg2="lt2" tx2="dk2" accent1="accent1" accent2="accent2" accent3="accent3" accent4="accent4" accent5="accent5" accent6="accent6" hlink="hlink" folHlink="folHlink"/>
   <p:notesStyle>
@@ -508,10 +506,6 @@
           <a:bodyPr/>
           <a:lstStyle/>
           <a:p>
-            <a:r>
-              <a:rPr lang="en-US" dirty="0"/>
-              <a:t/>
-            </a:r>
             <a:endParaRPr lang="en-US" dirty="0"/>
           </a:p>
         </p:txBody>
@@ -533,18 +527,12 @@
           <a:p>
             <a:fld id="{F7021451-1387-4CA6-816F-3879F97B5CBC}" type="slidenum">
               <a:rPr lang="en-US"/>
-              <a:t>1</a:t>
             </a:fld>
             <a:endParaRPr lang="en-US"/>
           </a:p>
         </p:txBody>
       </p:sp>
     </p:spTree>
-    <p:extLst>
-      <p:ext uri="{BB962C8B-B14F-4D97-AF65-F5344CB8AC3E}">
-        <p14:creationId xmlns:p14="http://schemas.microsoft.com/office/powerpoint/2010/main" val="1024086991"/>
-      </p:ext>
-    </p:extLst>
   </p:cSld>
   <p:clrMapOvr>
     <a:masterClrMapping/>
@@ -596,10 +584,6 @@
           <a:bodyPr/>
           <a:lstStyle/>
           <a:p>
-            <a:r>
-              <a:rPr lang="en-US" dirty="0"/>
-              <a:t/>
-            </a:r>
             <a:endParaRPr lang="en-US" dirty="0"/>
           </a:p>
         </p:txBody>
@@ -621,18 +605,12 @@
           <a:p>
             <a:fld id="{F7021451-1387-4CA6-816F-3879F97B5CBC}" type="slidenum">
               <a:rPr lang="en-US"/>
-              <a:t>2</a:t>
             </a:fld>
             <a:endParaRPr lang="en-US"/>
           </a:p>
         </p:txBody>
       </p:sp>
     </p:spTree>
-    <p:extLst>
-      <p:ext uri="{BB962C8B-B14F-4D97-AF65-F5344CB8AC3E}">
-        <p14:creationId xmlns:p14="http://schemas.microsoft.com/office/powerpoint/2010/main" val="1024086991"/>
-      </p:ext>
-    </p:extLst>
   </p:cSld>
   <p:clrMapOvr>
     <a:masterClrMapping/>
@@ -684,10 +662,6 @@
           <a:bodyPr/>
           <a:lstStyle/>
           <a:p>
-            <a:r>
-              <a:rPr lang="en-US" dirty="0"/>
-              <a:t/>
-            </a:r>
             <a:endParaRPr lang="en-US" dirty="0"/>
           </a:p>
         </p:txBody>
@@ -709,18 +683,12 @@
           <a:p>
             <a:fld id="{F7021451-1387-4CA6-816F-3879F97B5CBC}" type="slidenum">
               <a:rPr lang="en-US"/>
-              <a:t>3</a:t>
             </a:fld>
             <a:endParaRPr lang="en-US"/>
           </a:p>
         </p:txBody>
       </p:sp>
     </p:spTree>
-    <p:extLst>
-      <p:ext uri="{BB962C8B-B14F-4D97-AF65-F5344CB8AC3E}">
-        <p14:creationId xmlns:p14="http://schemas.microsoft.com/office/powerpoint/2010/main" val="1024086991"/>
-      </p:ext>
-    </p:extLst>
   </p:cSld>
   <p:clrMapOvr>
     <a:masterClrMapping/>
@@ -772,10 +740,6 @@
           <a:bodyPr/>
           <a:lstStyle/>
           <a:p>
-            <a:r>
-              <a:rPr lang="en-US" dirty="0"/>
-              <a:t/>
-            </a:r>
             <a:endParaRPr lang="en-US" dirty="0"/>
           </a:p>
         </p:txBody>
@@ -797,18 +761,12 @@
           <a:p>
             <a:fld id="{F7021451-1387-4CA6-816F-3879F97B5CBC}" type="slidenum">
               <a:rPr lang="en-US"/>
-              <a:t>4</a:t>
             </a:fld>
             <a:endParaRPr lang="en-US"/>
           </a:p>
         </p:txBody>
       </p:sp>
     </p:spTree>
-    <p:extLst>
-      <p:ext uri="{BB962C8B-B14F-4D97-AF65-F5344CB8AC3E}">
-        <p14:creationId xmlns:p14="http://schemas.microsoft.com/office/powerpoint/2010/main" val="1024086991"/>
-      </p:ext>
-    </p:extLst>
   </p:cSld>
   <p:clrMapOvr>
     <a:masterClrMapping/>
@@ -860,10 +818,6 @@
           <a:bodyPr/>
           <a:lstStyle/>
           <a:p>
-            <a:r>
-              <a:rPr lang="en-US" dirty="0"/>
-              <a:t/>
-            </a:r>
             <a:endParaRPr lang="en-US" dirty="0"/>
           </a:p>
         </p:txBody>
@@ -885,18 +839,12 @@
           <a:p>
             <a:fld id="{F7021451-1387-4CA6-816F-3879F97B5CBC}" type="slidenum">
               <a:rPr lang="en-US"/>
-              <a:t>5</a:t>
             </a:fld>
             <a:endParaRPr lang="en-US"/>
           </a:p>
         </p:txBody>
       </p:sp>
     </p:spTree>
-    <p:extLst>
-      <p:ext uri="{BB962C8B-B14F-4D97-AF65-F5344CB8AC3E}">
-        <p14:creationId xmlns:p14="http://schemas.microsoft.com/office/powerpoint/2010/main" val="1024086991"/>
-      </p:ext>
-    </p:extLst>
   </p:cSld>
   <p:clrMapOvr>
     <a:masterClrMapping/>
@@ -948,10 +896,6 @@
           <a:bodyPr/>
           <a:lstStyle/>
           <a:p>
-            <a:r>
-              <a:rPr lang="en-US" dirty="0"/>
-              <a:t/>
-            </a:r>
             <a:endParaRPr lang="en-US" dirty="0"/>
           </a:p>
         </p:txBody>
@@ -973,18 +917,12 @@
           <a:p>
             <a:fld id="{F7021451-1387-4CA6-816F-3879F97B5CBC}" type="slidenum">
               <a:rPr lang="en-US"/>
-              <a:t>6</a:t>
             </a:fld>
             <a:endParaRPr lang="en-US"/>
           </a:p>
         </p:txBody>
       </p:sp>
     </p:spTree>
-    <p:extLst>
-      <p:ext uri="{BB962C8B-B14F-4D97-AF65-F5344CB8AC3E}">
-        <p14:creationId xmlns:p14="http://schemas.microsoft.com/office/powerpoint/2010/main" val="1024086991"/>
-      </p:ext>
-    </p:extLst>
   </p:cSld>
   <p:clrMapOvr>
     <a:masterClrMapping/>
@@ -1036,10 +974,6 @@
           <a:bodyPr/>
           <a:lstStyle/>
           <a:p>
-            <a:r>
-              <a:rPr lang="en-US" dirty="0"/>
-              <a:t/>
-            </a:r>
             <a:endParaRPr lang="en-US" dirty="0"/>
           </a:p>
         </p:txBody>
@@ -1061,18 +995,12 @@
           <a:p>
             <a:fld id="{F7021451-1387-4CA6-816F-3879F97B5CBC}" type="slidenum">
               <a:rPr lang="en-US"/>
-              <a:t>7</a:t>
             </a:fld>
             <a:endParaRPr lang="en-US"/>
           </a:p>
         </p:txBody>
       </p:sp>
     </p:spTree>
-    <p:extLst>
-      <p:ext uri="{BB962C8B-B14F-4D97-AF65-F5344CB8AC3E}">
-        <p14:creationId xmlns:p14="http://schemas.microsoft.com/office/powerpoint/2010/main" val="1024086991"/>
-      </p:ext>
-    </p:extLst>
   </p:cSld>
   <p:clrMapOvr>
     <a:masterClrMapping/>
@@ -1124,10 +1052,6 @@
           <a:bodyPr/>
           <a:lstStyle/>
           <a:p>
-            <a:r>
-              <a:rPr lang="en-US" dirty="0"/>
-              <a:t/>
-            </a:r>
             <a:endParaRPr lang="en-US" dirty="0"/>
           </a:p>
         </p:txBody>
@@ -1149,18 +1073,12 @@
           <a:p>
             <a:fld id="{F7021451-1387-4CA6-816F-3879F97B5CBC}" type="slidenum">
               <a:rPr lang="en-US"/>
-              <a:t>8</a:t>
             </a:fld>
             <a:endParaRPr lang="en-US"/>
           </a:p>
         </p:txBody>
       </p:sp>
     </p:spTree>
-    <p:extLst>
-      <p:ext uri="{BB962C8B-B14F-4D97-AF65-F5344CB8AC3E}">
-        <p14:creationId xmlns:p14="http://schemas.microsoft.com/office/powerpoint/2010/main" val="1024086991"/>
-      </p:ext>
-    </p:extLst>
   </p:cSld>
   <p:clrMapOvr>
     <a:masterClrMapping/>
@@ -1212,10 +1130,6 @@
           <a:bodyPr/>
           <a:lstStyle/>
           <a:p>
-            <a:r>
-              <a:rPr lang="en-US" dirty="0"/>
-              <a:t/>
-            </a:r>
             <a:endParaRPr lang="en-US" dirty="0"/>
           </a:p>
         </p:txBody>
@@ -1237,18 +1151,12 @@
           <a:p>
             <a:fld id="{F7021451-1387-4CA6-816F-3879F97B5CBC}" type="slidenum">
               <a:rPr lang="en-US"/>
-              <a:t>9</a:t>
             </a:fld>
             <a:endParaRPr lang="en-US"/>
           </a:p>
         </p:txBody>
       </p:sp>
     </p:spTree>
-    <p:extLst>
-      <p:ext uri="{BB962C8B-B14F-4D97-AF65-F5344CB8AC3E}">
-        <p14:creationId xmlns:p14="http://schemas.microsoft.com/office/powerpoint/2010/main" val="1024086991"/>
-      </p:ext>
-    </p:extLst>
   </p:cSld>
   <p:clrMapOvr>
     <a:masterClrMapping/>
@@ -1289,6 +1197,11 @@
 <file path=ppt/slideMasters/slideMaster1.xml><?xml version="1.0" encoding="utf-8"?>
 <p:sldMaster xmlns:a="http://schemas.openxmlformats.org/drawingml/2006/main" xmlns:r="http://schemas.openxmlformats.org/officeDocument/2006/relationships" xmlns:p="http://schemas.openxmlformats.org/presentationml/2006/main">
   <p:cSld>
+    <p:bg>
+      <p:bgRef idx="1001">
+        <a:schemeClr val="bg1"/>
+      </p:bgRef>
+    </p:bg>
     <p:spTree>
       <p:nvGrpSpPr>
         <p:cNvPr id="1" name=""/>
@@ -1332,7 +1245,7 @@
         <a:spcBef>
           <a:spcPct val="20000"/>
         </a:spcBef>
-        <a:buFont typeface="Arial" pitchFamily="34" charset="0"/>
+        <a:buFont typeface="Arial" panose="020B0604020202020204" pitchFamily="34" charset="0"/>
         <a:buChar char="•"/>
         <a:defRPr sz="3200" kern="1200">
           <a:solidFill>
@@ -1347,7 +1260,7 @@
         <a:spcBef>
           <a:spcPct val="20000"/>
         </a:spcBef>
-        <a:buFont typeface="Arial" pitchFamily="34" charset="0"/>
+        <a:buFont typeface="Arial" panose="020B0604020202020204" pitchFamily="34" charset="0"/>
         <a:buChar char="–"/>
         <a:defRPr sz="2800" kern="1200">
           <a:solidFill>
@@ -1362,7 +1275,7 @@
         <a:spcBef>
           <a:spcPct val="20000"/>
         </a:spcBef>
-        <a:buFont typeface="Arial" pitchFamily="34" charset="0"/>
+        <a:buFont typeface="Arial" panose="020B0604020202020204" pitchFamily="34" charset="0"/>
         <a:buChar char="•"/>
         <a:defRPr sz="2400" kern="1200">
           <a:solidFill>
@@ -1377,7 +1290,7 @@
         <a:spcBef>
           <a:spcPct val="20000"/>
         </a:spcBef>
-        <a:buFont typeface="Arial" pitchFamily="34" charset="0"/>
+        <a:buFont typeface="Arial" panose="020B0604020202020204" pitchFamily="34" charset="0"/>
         <a:buChar char="–"/>
         <a:defRPr sz="2000" kern="1200">
           <a:solidFill>
@@ -1392,7 +1305,7 @@
         <a:spcBef>
           <a:spcPct val="20000"/>
         </a:spcBef>
-        <a:buFont typeface="Arial" pitchFamily="34" charset="0"/>
+        <a:buFont typeface="Arial" panose="020B0604020202020204" pitchFamily="34" charset="0"/>
         <a:buChar char="»"/>
         <a:defRPr sz="2000" kern="1200">
           <a:solidFill>
@@ -1407,7 +1320,7 @@
         <a:spcBef>
           <a:spcPct val="20000"/>
         </a:spcBef>
-        <a:buFont typeface="Arial" pitchFamily="34" charset="0"/>
+        <a:buFont typeface="Arial" panose="020B0604020202020204" pitchFamily="34" charset="0"/>
         <a:buChar char="•"/>
         <a:defRPr sz="2000" kern="1200">
           <a:solidFill>
@@ -1422,7 +1335,7 @@
         <a:spcBef>
           <a:spcPct val="20000"/>
         </a:spcBef>
-        <a:buFont typeface="Arial" pitchFamily="34" charset="0"/>
+        <a:buFont typeface="Arial" panose="020B0604020202020204" pitchFamily="34" charset="0"/>
         <a:buChar char="•"/>
         <a:defRPr sz="2000" kern="1200">
           <a:solidFill>
@@ -1437,7 +1350,7 @@
         <a:spcBef>
           <a:spcPct val="20000"/>
         </a:spcBef>
-        <a:buFont typeface="Arial" pitchFamily="34" charset="0"/>
+        <a:buFont typeface="Arial" panose="020B0604020202020204" pitchFamily="34" charset="0"/>
         <a:buChar char="•"/>
         <a:defRPr sz="2000" kern="1200">
           <a:solidFill>
@@ -1452,7 +1365,7 @@
         <a:spcBef>
           <a:spcPct val="20000"/>
         </a:spcBef>
-        <a:buFont typeface="Arial" pitchFamily="34" charset="0"/>
+        <a:buFont typeface="Arial" panose="020B0604020202020204" pitchFamily="34" charset="0"/>
         <a:buChar char="•"/>
         <a:defRPr sz="2000" kern="1200">
           <a:solidFill>
@@ -1565,7 +1478,7 @@
 
 <file path=ppt/slides/slide1.xml><?xml version="1.0" encoding="utf-8"?>
 <p:sld xmlns:a="http://schemas.openxmlformats.org/drawingml/2006/main" xmlns:r="http://schemas.openxmlformats.org/officeDocument/2006/relationships" xmlns:p="http://schemas.openxmlformats.org/presentationml/2006/main">
-  <p:cSld name="Slide 1">
+  <p:cSld>
     <p:bg>
       <p:bgPr>
         <a:blipFill dpi="0" rotWithShape="1">
@@ -1609,13 +1522,12 @@
             <a:avLst/>
           </a:prstGeom>
           <a:noFill/>
-          <a:ln/>
         </p:spPr>
         <p:txBody>
           <a:bodyPr wrap="square" rtlCol="0" anchor="ctr"/>
           <a:lstStyle/>
           <a:p>
-            <a:pPr algn="r" indent="0" marL="0">
+            <a:pPr marL="0" indent="0" algn="r">
               <a:buNone/>
             </a:pPr>
             <a:r>
@@ -1623,9 +1535,9 @@
                 <a:solidFill>
                   <a:srgbClr val="8A9099"/>
                 </a:solidFill>
-                <a:latin typeface="微软雅黑" pitchFamily="34" charset="0"/>
-                <a:ea typeface="微软雅黑" pitchFamily="34" charset="-122"/>
-                <a:cs typeface="微软雅黑" pitchFamily="34" charset="-120"/>
+                <a:latin typeface="微软雅黑" panose="020B0503020204020204" pitchFamily="34" charset="-122"/>
+                <a:ea typeface="微软雅黑" panose="020B0503020204020204" pitchFamily="34" charset="-122"/>
+                <a:cs typeface="微软雅黑" panose="020B0503020204020204" pitchFamily="34" charset="-120"/>
               </a:rPr>
               <a:t>1 / 9</a:t>
             </a:r>
@@ -1648,13 +1560,12 @@
             <a:avLst/>
           </a:prstGeom>
           <a:noFill/>
-          <a:ln/>
         </p:spPr>
         <p:txBody>
           <a:bodyPr wrap="square" rtlCol="0" anchor="ctr"/>
           <a:lstStyle/>
           <a:p>
-            <a:pPr algn="ctr" indent="0" marL="0">
+            <a:pPr marL="0" indent="0" algn="ctr">
               <a:buNone/>
             </a:pPr>
             <a:r>
@@ -1662,9 +1573,9 @@
                 <a:solidFill>
                   <a:srgbClr val="1F4E9C"/>
                 </a:solidFill>
-                <a:latin typeface="微软雅黑" pitchFamily="34" charset="0"/>
-                <a:ea typeface="微软雅黑" pitchFamily="34" charset="-122"/>
-                <a:cs typeface="微软雅黑" pitchFamily="34" charset="-120"/>
+                <a:latin typeface="微软雅黑" panose="020B0503020204020204" pitchFamily="34" charset="-122"/>
+                <a:ea typeface="微软雅黑" panose="020B0503020204020204" pitchFamily="34" charset="-122"/>
+                <a:cs typeface="微软雅黑" panose="020B0503020204020204" pitchFamily="34" charset="-120"/>
               </a:rPr>
               <a:t>重邮考研802 数据结构</a:t>
             </a:r>
@@ -1687,13 +1598,12 @@
             <a:avLst/>
           </a:prstGeom>
           <a:noFill/>
-          <a:ln/>
         </p:spPr>
         <p:txBody>
           <a:bodyPr wrap="square" rtlCol="0" anchor="ctr"/>
           <a:lstStyle/>
           <a:p>
-            <a:pPr algn="ctr" indent="0" marL="0">
+            <a:pPr marL="0" indent="0" algn="ctr">
               <a:buNone/>
             </a:pPr>
             <a:r>
@@ -1701,9 +1611,9 @@
                 <a:solidFill>
                   <a:srgbClr val="1F2329"/>
                 </a:solidFill>
-                <a:latin typeface="微软雅黑" pitchFamily="34" charset="0"/>
-                <a:ea typeface="微软雅黑" pitchFamily="34" charset="-122"/>
-                <a:cs typeface="微软雅黑" pitchFamily="34" charset="-120"/>
+                <a:latin typeface="微软雅黑" panose="020B0503020204020204" pitchFamily="34" charset="-122"/>
+                <a:ea typeface="微软雅黑" panose="020B0503020204020204" pitchFamily="34" charset="-122"/>
+                <a:cs typeface="微软雅黑" panose="020B0503020204020204" pitchFamily="34" charset="-120"/>
               </a:rPr>
               <a:t>习题集题目勾画 · 第10章 内部排序</a:t>
             </a:r>
@@ -1726,13 +1636,12 @@
             <a:avLst/>
           </a:prstGeom>
           <a:noFill/>
-          <a:ln/>
         </p:spPr>
         <p:txBody>
           <a:bodyPr wrap="square" rtlCol="0" anchor="ctr"/>
           <a:lstStyle/>
           <a:p>
-            <a:pPr algn="ctr" indent="0" marL="0">
+            <a:pPr marL="0" indent="0" algn="ctr">
               <a:buNone/>
             </a:pPr>
             <a:r>
@@ -1740,9 +1649,9 @@
                 <a:solidFill>
                   <a:srgbClr val="1F2329"/>
                 </a:solidFill>
-                <a:latin typeface="微软雅黑" pitchFamily="34" charset="0"/>
-                <a:ea typeface="微软雅黑" pitchFamily="34" charset="-122"/>
-                <a:cs typeface="微软雅黑" pitchFamily="34" charset="-120"/>
+                <a:latin typeface="微软雅黑" panose="020B0503020204020204" pitchFamily="34" charset="-122"/>
+                <a:ea typeface="微软雅黑" panose="020B0503020204020204" pitchFamily="34" charset="-122"/>
+                <a:cs typeface="微软雅黑" panose="020B0503020204020204" pitchFamily="34" charset="-120"/>
               </a:rPr>
               <a:t>严蔚敏《数据结构题集（第2版）》</a:t>
             </a:r>
@@ -1765,13 +1674,12 @@
             <a:avLst/>
           </a:prstGeom>
           <a:noFill/>
-          <a:ln/>
         </p:spPr>
         <p:txBody>
           <a:bodyPr wrap="square" rtlCol="0" anchor="ctr"/>
           <a:lstStyle/>
           <a:p>
-            <a:pPr algn="ctr" indent="0" marL="0">
+            <a:pPr marL="0" indent="0" algn="ctr">
               <a:buNone/>
             </a:pPr>
             <a:r>
@@ -1779,9 +1687,9 @@
                 <a:solidFill>
                   <a:srgbClr val="8A9099"/>
                 </a:solidFill>
-                <a:latin typeface="微软雅黑" pitchFamily="34" charset="0"/>
-                <a:ea typeface="微软雅黑" pitchFamily="34" charset="-122"/>
-                <a:cs typeface="微软雅黑" pitchFamily="34" charset="-120"/>
+                <a:latin typeface="微软雅黑" panose="020B0503020204020204" pitchFamily="34" charset="-122"/>
+                <a:ea typeface="微软雅黑" panose="020B0503020204020204" pitchFamily="34" charset="-122"/>
+                <a:cs typeface="微软雅黑" panose="020B0503020204020204" pitchFamily="34" charset="-120"/>
               </a:rPr>
               <a:t>依据：802考情与2020—2026真题 · 主讲：牙膏学长</a:t>
             </a:r>
@@ -1799,7 +1707,7 @@
 
 <file path=ppt/slides/slide2.xml><?xml version="1.0" encoding="utf-8"?>
 <p:sld xmlns:a="http://schemas.openxmlformats.org/drawingml/2006/main" xmlns:r="http://schemas.openxmlformats.org/officeDocument/2006/relationships" xmlns:p="http://schemas.openxmlformats.org/presentationml/2006/main">
-  <p:cSld name="Slide 2">
+  <p:cSld>
     <p:bg>
       <p:bgPr>
         <a:blipFill dpi="0" rotWithShape="1">
@@ -1843,13 +1751,12 @@
             <a:avLst/>
           </a:prstGeom>
           <a:noFill/>
-          <a:ln/>
         </p:spPr>
         <p:txBody>
           <a:bodyPr wrap="square" rtlCol="0" anchor="ctr"/>
           <a:lstStyle/>
           <a:p>
-            <a:pPr algn="r" indent="0" marL="0">
+            <a:pPr marL="0" indent="0" algn="r">
               <a:buNone/>
             </a:pPr>
             <a:r>
@@ -1857,9 +1764,9 @@
                 <a:solidFill>
                   <a:srgbClr val="8A9099"/>
                 </a:solidFill>
-                <a:latin typeface="微软雅黑" pitchFamily="34" charset="0"/>
-                <a:ea typeface="微软雅黑" pitchFamily="34" charset="-122"/>
-                <a:cs typeface="微软雅黑" pitchFamily="34" charset="-120"/>
+                <a:latin typeface="微软雅黑" panose="020B0503020204020204" pitchFamily="34" charset="-122"/>
+                <a:ea typeface="微软雅黑" panose="020B0503020204020204" pitchFamily="34" charset="-122"/>
+                <a:cs typeface="微软雅黑" panose="020B0503020204020204" pitchFamily="34" charset="-120"/>
               </a:rPr>
               <a:t>2 / 9</a:t>
             </a:r>
@@ -1882,13 +1789,12 @@
             <a:avLst/>
           </a:prstGeom>
           <a:noFill/>
-          <a:ln/>
         </p:spPr>
         <p:txBody>
           <a:bodyPr wrap="square" rtlCol="0" anchor="ctr"/>
           <a:lstStyle/>
           <a:p>
-            <a:pPr algn="l" indent="0" marL="0">
+            <a:pPr marL="0" indent="0" algn="l">
               <a:buNone/>
             </a:pPr>
             <a:r>
@@ -1896,9 +1802,9 @@
                 <a:solidFill>
                   <a:srgbClr val="1F4E9C"/>
                 </a:solidFill>
-                <a:latin typeface="微软雅黑" pitchFamily="34" charset="0"/>
-                <a:ea typeface="微软雅黑" pitchFamily="34" charset="-122"/>
-                <a:cs typeface="微软雅黑" pitchFamily="34" charset="-120"/>
+                <a:latin typeface="微软雅黑" panose="020B0503020204020204" pitchFamily="34" charset="-122"/>
+                <a:ea typeface="微软雅黑" panose="020B0503020204020204" pitchFamily="34" charset="-122"/>
+                <a:cs typeface="微软雅黑" panose="020B0503020204020204" pitchFamily="34" charset="-120"/>
               </a:rPr>
               <a:t>本章勾画总览</a:t>
             </a:r>
@@ -1921,13 +1827,12 @@
             <a:avLst/>
           </a:prstGeom>
           <a:noFill/>
-          <a:ln/>
         </p:spPr>
         <p:txBody>
           <a:bodyPr wrap="square" rtlCol="0" anchor="ctr"/>
           <a:lstStyle/>
           <a:p>
-            <a:pPr algn="l" indent="0" marL="0">
+            <a:pPr marL="0" indent="0" algn="l">
               <a:buNone/>
             </a:pPr>
             <a:r>
@@ -1935,9 +1840,9 @@
                 <a:solidFill>
                   <a:srgbClr val="1F2329"/>
                 </a:solidFill>
-                <a:latin typeface="微软雅黑" pitchFamily="34" charset="0"/>
-                <a:ea typeface="微软雅黑" pitchFamily="34" charset="-122"/>
-                <a:cs typeface="微软雅黑" pitchFamily="34" charset="-120"/>
+                <a:latin typeface="微软雅黑" panose="020B0503020204020204" pitchFamily="34" charset="-122"/>
+                <a:ea typeface="微软雅黑" panose="020B0503020204020204" pitchFamily="34" charset="-122"/>
+                <a:cs typeface="微软雅黑" panose="020B0503020204020204" pitchFamily="34" charset="-120"/>
               </a:rPr>
               <a:t>第10章三档题量与用法</a:t>
             </a:r>
@@ -1947,21 +1852,15 @@
       </p:sp>
       <p:graphicFrame>
         <p:nvGraphicFramePr>
-          <p:cNvPr id="3" name="Table 0"/>
+          <p:cNvPr id="5" name="Table 0"/>
           <p:cNvGraphicFramePr>
             <a:graphicFrameLocks noGrp="1"/>
           </p:cNvGraphicFramePr>
-          <p:nvPr>
-            <p:extLst>
-              <p:ext uri="{D42A27DB-BD31-4B8C-83A1-F6EECF244321}">
-                <p14:modId xmlns:p14="http://schemas.microsoft.com/office/powerpoint/2010/main" val="1579011935"/>
-              </p:ext>
-            </p:extLst>
-          </p:nvPr>
+          <p:nvPr/>
         </p:nvGraphicFramePr>
         <p:xfrm>
           <a:off x="822960" y="2395728"/>
-          <a:ext cx="10545775" cy="914400"/>
+          <a:ext cx="10545776" cy="1682496"/>
         </p:xfrm>
         <a:graphic>
           <a:graphicData uri="http://schemas.openxmlformats.org/drawingml/2006/table">
@@ -1979,7 +1878,7 @@
                     <a:bodyPr/>
                     <a:lstStyle/>
                     <a:p>
-                      <a:pPr algn="ctr" indent="0" marL="0">
+                      <a:pPr marL="0" indent="0" algn="ctr">
                         <a:buNone/>
                       </a:pPr>
                       <a:r>
@@ -1987,20 +1886,20 @@
                           <a:solidFill>
                             <a:srgbClr val="1F4E9C"/>
                           </a:solidFill>
-                          <a:latin typeface="微软雅黑" pitchFamily="34" charset="0"/>
-                          <a:ea typeface="微软雅黑" pitchFamily="34" charset="-122"/>
-                          <a:cs typeface="微软雅黑" pitchFamily="34" charset="-120"/>
+                          <a:latin typeface="微软雅黑" panose="020B0503020204020204" pitchFamily="34" charset="-122"/>
+                          <a:ea typeface="微软雅黑" panose="020B0503020204020204" pitchFamily="34" charset="-122"/>
+                          <a:cs typeface="微软雅黑" panose="020B0503020204020204" pitchFamily="34" charset="-120"/>
                         </a:rPr>
                         <a:t>方向</a:t>
                       </a:r>
                       <a:endParaRPr lang="en-US" sz="1500" dirty="0">
-                        <a:latin typeface="微软雅黑" charset="0"/>
-                        <a:ea typeface="微软雅黑" charset="0"/>
-                        <a:cs typeface="微软雅黑" charset="0"/>
+                        <a:latin typeface="微软雅黑" panose="020B0503020204020204" pitchFamily="34" charset="-122"/>
+                        <a:ea typeface="微软雅黑" panose="020B0503020204020204" pitchFamily="34" charset="-122"/>
+                        <a:cs typeface="微软雅黑" panose="020B0503020204020204" pitchFamily="34" charset="-122"/>
                       </a:endParaRPr>
                     </a:p>
                   </a:txBody>
-                  <a:tcPr marL="91440" marR="91440" marT="45720" marB="45720" anchor="ctr">
+                  <a:tcPr anchor="ctr">
                     <a:lnL w="9525" cap="flat" cmpd="sng" algn="ctr">
                       <a:solidFill>
                         <a:srgbClr val="D8DBE0"/>
@@ -2047,7 +1946,7 @@
                     <a:bodyPr/>
                     <a:lstStyle/>
                     <a:p>
-                      <a:pPr algn="ctr" indent="0" marL="0">
+                      <a:pPr marL="0" indent="0" algn="ctr">
                         <a:buNone/>
                       </a:pPr>
                       <a:r>
@@ -2055,20 +1954,20 @@
                           <a:solidFill>
                             <a:srgbClr val="1F4E9C"/>
                           </a:solidFill>
-                          <a:latin typeface="微软雅黑" pitchFamily="34" charset="0"/>
-                          <a:ea typeface="微软雅黑" pitchFamily="34" charset="-122"/>
-                          <a:cs typeface="微软雅黑" pitchFamily="34" charset="-120"/>
+                          <a:latin typeface="微软雅黑" panose="020B0503020204020204" pitchFamily="34" charset="-122"/>
+                          <a:ea typeface="微软雅黑" panose="020B0503020204020204" pitchFamily="34" charset="-122"/>
+                          <a:cs typeface="微软雅黑" panose="020B0503020204020204" pitchFamily="34" charset="-120"/>
                         </a:rPr>
                         <a:t>题数</a:t>
                       </a:r>
                       <a:endParaRPr lang="en-US" sz="1500" dirty="0">
-                        <a:latin typeface="微软雅黑" charset="0"/>
-                        <a:ea typeface="微软雅黑" charset="0"/>
-                        <a:cs typeface="微软雅黑" charset="0"/>
+                        <a:latin typeface="微软雅黑" panose="020B0503020204020204" pitchFamily="34" charset="-122"/>
+                        <a:ea typeface="微软雅黑" panose="020B0503020204020204" pitchFamily="34" charset="-122"/>
+                        <a:cs typeface="微软雅黑" panose="020B0503020204020204" pitchFamily="34" charset="-122"/>
                       </a:endParaRPr>
                     </a:p>
                   </a:txBody>
-                  <a:tcPr marL="91440" marR="91440" marT="45720" marB="45720" anchor="ctr">
+                  <a:tcPr anchor="ctr">
                     <a:lnL w="9525" cap="flat" cmpd="sng" algn="ctr">
                       <a:solidFill>
                         <a:srgbClr val="D8DBE0"/>
@@ -2115,7 +2014,7 @@
                     <a:bodyPr/>
                     <a:lstStyle/>
                     <a:p>
-                      <a:pPr algn="ctr" indent="0" marL="0">
+                      <a:pPr marL="0" indent="0" algn="ctr">
                         <a:buNone/>
                       </a:pPr>
                       <a:r>
@@ -2123,20 +2022,20 @@
                           <a:solidFill>
                             <a:srgbClr val="1F4E9C"/>
                           </a:solidFill>
-                          <a:latin typeface="微软雅黑" pitchFamily="34" charset="0"/>
-                          <a:ea typeface="微软雅黑" pitchFamily="34" charset="-122"/>
-                          <a:cs typeface="微软雅黑" pitchFamily="34" charset="-120"/>
+                          <a:latin typeface="微软雅黑" panose="020B0503020204020204" pitchFamily="34" charset="-122"/>
+                          <a:ea typeface="微软雅黑" panose="020B0503020204020204" pitchFamily="34" charset="-122"/>
+                          <a:cs typeface="微软雅黑" panose="020B0503020204020204" pitchFamily="34" charset="-120"/>
                         </a:rPr>
                         <a:t>占比</a:t>
                       </a:r>
                       <a:endParaRPr lang="en-US" sz="1500" dirty="0">
-                        <a:latin typeface="微软雅黑" charset="0"/>
-                        <a:ea typeface="微软雅黑" charset="0"/>
-                        <a:cs typeface="微软雅黑" charset="0"/>
+                        <a:latin typeface="微软雅黑" panose="020B0503020204020204" pitchFamily="34" charset="-122"/>
+                        <a:ea typeface="微软雅黑" panose="020B0503020204020204" pitchFamily="34" charset="-122"/>
+                        <a:cs typeface="微软雅黑" panose="020B0503020204020204" pitchFamily="34" charset="-122"/>
                       </a:endParaRPr>
                     </a:p>
                   </a:txBody>
-                  <a:tcPr marL="91440" marR="91440" marT="45720" marB="45720" anchor="ctr">
+                  <a:tcPr anchor="ctr">
                     <a:lnL w="9525" cap="flat" cmpd="sng" algn="ctr">
                       <a:solidFill>
                         <a:srgbClr val="D8DBE0"/>
@@ -2183,7 +2082,7 @@
                     <a:bodyPr/>
                     <a:lstStyle/>
                     <a:p>
-                      <a:pPr algn="ctr" indent="0" marL="0">
+                      <a:pPr marL="0" indent="0" algn="ctr">
                         <a:buNone/>
                       </a:pPr>
                       <a:r>
@@ -2191,20 +2090,20 @@
                           <a:solidFill>
                             <a:srgbClr val="1F4E9C"/>
                           </a:solidFill>
-                          <a:latin typeface="微软雅黑" pitchFamily="34" charset="0"/>
-                          <a:ea typeface="微软雅黑" pitchFamily="34" charset="-122"/>
-                          <a:cs typeface="微软雅黑" pitchFamily="34" charset="-120"/>
+                          <a:latin typeface="微软雅黑" panose="020B0503020204020204" pitchFamily="34" charset="-122"/>
+                          <a:ea typeface="微软雅黑" panose="020B0503020204020204" pitchFamily="34" charset="-122"/>
+                          <a:cs typeface="微软雅黑" panose="020B0503020204020204" pitchFamily="34" charset="-120"/>
                         </a:rPr>
                         <a:t>定位</a:t>
                       </a:r>
                       <a:endParaRPr lang="en-US" sz="1500" dirty="0">
-                        <a:latin typeface="微软雅黑" charset="0"/>
-                        <a:ea typeface="微软雅黑" charset="0"/>
-                        <a:cs typeface="微软雅黑" charset="0"/>
+                        <a:latin typeface="微软雅黑" panose="020B0503020204020204" pitchFamily="34" charset="-122"/>
+                        <a:ea typeface="微软雅黑" panose="020B0503020204020204" pitchFamily="34" charset="-122"/>
+                        <a:cs typeface="微软雅黑" panose="020B0503020204020204" pitchFamily="34" charset="-122"/>
                       </a:endParaRPr>
                     </a:p>
                   </a:txBody>
-                  <a:tcPr marL="91440" marR="91440" marT="45720" marB="45720" anchor="ctr">
+                  <a:tcPr anchor="ctr">
                     <a:lnL w="9525" cap="flat" cmpd="sng" algn="ctr">
                       <a:solidFill>
                         <a:srgbClr val="D8DBE0"/>
@@ -2253,7 +2152,7 @@
                     <a:bodyPr/>
                     <a:lstStyle/>
                     <a:p>
-                      <a:pPr algn="ctr" indent="0" marL="0">
+                      <a:pPr marL="0" indent="0" algn="ctr">
                         <a:buNone/>
                       </a:pPr>
                       <a:r>
@@ -2261,20 +2160,20 @@
                           <a:solidFill>
                             <a:srgbClr val="1F2329"/>
                           </a:solidFill>
-                          <a:latin typeface="微软雅黑" pitchFamily="34" charset="0"/>
-                          <a:ea typeface="微软雅黑" pitchFamily="34" charset="-122"/>
-                          <a:cs typeface="微软雅黑" pitchFamily="34" charset="-120"/>
+                          <a:latin typeface="微软雅黑" panose="020B0503020204020204" pitchFamily="34" charset="-122"/>
+                          <a:ea typeface="微软雅黑" panose="020B0503020204020204" pitchFamily="34" charset="-122"/>
+                          <a:cs typeface="微软雅黑" panose="020B0503020204020204" pitchFamily="34" charset="-120"/>
                         </a:rPr>
                         <a:t>有价值必做</a:t>
                       </a:r>
                       <a:endParaRPr lang="en-US" sz="1500" dirty="0">
-                        <a:latin typeface="微软雅黑" charset="0"/>
-                        <a:ea typeface="微软雅黑" charset="0"/>
-                        <a:cs typeface="微软雅黑" charset="0"/>
+                        <a:latin typeface="微软雅黑" panose="020B0503020204020204" pitchFamily="34" charset="-122"/>
+                        <a:ea typeface="微软雅黑" panose="020B0503020204020204" pitchFamily="34" charset="-122"/>
+                        <a:cs typeface="微软雅黑" panose="020B0503020204020204" pitchFamily="34" charset="-122"/>
                       </a:endParaRPr>
                     </a:p>
                   </a:txBody>
-                  <a:tcPr marL="91440" marR="91440" marT="45720" marB="45720" anchor="ctr">
+                  <a:tcPr anchor="ctr">
                     <a:lnL w="9525" cap="flat" cmpd="sng" algn="ctr">
                       <a:solidFill>
                         <a:srgbClr val="D8DBE0"/>
@@ -2321,7 +2220,7 @@
                     <a:bodyPr/>
                     <a:lstStyle/>
                     <a:p>
-                      <a:pPr algn="ctr" indent="0" marL="0">
+                      <a:pPr marL="0" indent="0" algn="ctr">
                         <a:buNone/>
                       </a:pPr>
                       <a:r>
@@ -2329,20 +2228,20 @@
                           <a:solidFill>
                             <a:srgbClr val="1F2329"/>
                           </a:solidFill>
-                          <a:latin typeface="微软雅黑" pitchFamily="34" charset="0"/>
-                          <a:ea typeface="微软雅黑" pitchFamily="34" charset="-122"/>
-                          <a:cs typeface="微软雅黑" pitchFamily="34" charset="-120"/>
+                          <a:latin typeface="微软雅黑" panose="020B0503020204020204" pitchFamily="34" charset="-122"/>
+                          <a:ea typeface="微软雅黑" panose="020B0503020204020204" pitchFamily="34" charset="-122"/>
+                          <a:cs typeface="微软雅黑" panose="020B0503020204020204" pitchFamily="34" charset="-120"/>
                         </a:rPr>
                         <a:t>24</a:t>
                       </a:r>
                       <a:endParaRPr lang="en-US" sz="1500" dirty="0">
-                        <a:latin typeface="微软雅黑" charset="0"/>
-                        <a:ea typeface="微软雅黑" charset="0"/>
-                        <a:cs typeface="微软雅黑" charset="0"/>
+                        <a:latin typeface="微软雅黑" panose="020B0503020204020204" pitchFamily="34" charset="-122"/>
+                        <a:ea typeface="微软雅黑" panose="020B0503020204020204" pitchFamily="34" charset="-122"/>
+                        <a:cs typeface="微软雅黑" panose="020B0503020204020204" pitchFamily="34" charset="-122"/>
                       </a:endParaRPr>
                     </a:p>
                   </a:txBody>
-                  <a:tcPr marL="91440" marR="91440" marT="45720" marB="45720" anchor="ctr">
+                  <a:tcPr anchor="ctr">
                     <a:lnL w="9525" cap="flat" cmpd="sng" algn="ctr">
                       <a:solidFill>
                         <a:srgbClr val="D8DBE0"/>
@@ -2389,7 +2288,7 @@
                     <a:bodyPr/>
                     <a:lstStyle/>
                     <a:p>
-                      <a:pPr algn="ctr" indent="0" marL="0">
+                      <a:pPr marL="0" indent="0" algn="ctr">
                         <a:buNone/>
                       </a:pPr>
                       <a:r>
@@ -2397,20 +2296,20 @@
                           <a:solidFill>
                             <a:srgbClr val="1F2329"/>
                           </a:solidFill>
-                          <a:latin typeface="微软雅黑" pitchFamily="34" charset="0"/>
-                          <a:ea typeface="微软雅黑" pitchFamily="34" charset="-122"/>
-                          <a:cs typeface="微软雅黑" pitchFamily="34" charset="-120"/>
+                          <a:latin typeface="微软雅黑" panose="020B0503020204020204" pitchFamily="34" charset="-122"/>
+                          <a:ea typeface="微软雅黑" panose="020B0503020204020204" pitchFamily="34" charset="-122"/>
+                          <a:cs typeface="微软雅黑" panose="020B0503020204020204" pitchFamily="34" charset="-120"/>
                         </a:rPr>
                         <a:t>25%</a:t>
                       </a:r>
                       <a:endParaRPr lang="en-US" sz="1500" dirty="0">
-                        <a:latin typeface="微软雅黑" charset="0"/>
-                        <a:ea typeface="微软雅黑" charset="0"/>
-                        <a:cs typeface="微软雅黑" charset="0"/>
+                        <a:latin typeface="微软雅黑" panose="020B0503020204020204" pitchFamily="34" charset="-122"/>
+                        <a:ea typeface="微软雅黑" panose="020B0503020204020204" pitchFamily="34" charset="-122"/>
+                        <a:cs typeface="微软雅黑" panose="020B0503020204020204" pitchFamily="34" charset="-122"/>
                       </a:endParaRPr>
                     </a:p>
                   </a:txBody>
-                  <a:tcPr marL="91440" marR="91440" marT="45720" marB="45720" anchor="ctr">
+                  <a:tcPr anchor="ctr">
                     <a:lnL w="9525" cap="flat" cmpd="sng" algn="ctr">
                       <a:solidFill>
                         <a:srgbClr val="D8DBE0"/>
@@ -2457,7 +2356,7 @@
                     <a:bodyPr/>
                     <a:lstStyle/>
                     <a:p>
-                      <a:pPr algn="ctr" indent="0" marL="0">
+                      <a:pPr marL="0" indent="0" algn="ctr">
                         <a:buNone/>
                       </a:pPr>
                       <a:r>
@@ -2465,20 +2364,20 @@
                           <a:solidFill>
                             <a:srgbClr val="1F2329"/>
                           </a:solidFill>
-                          <a:latin typeface="微软雅黑" pitchFamily="34" charset="0"/>
-                          <a:ea typeface="微软雅黑" pitchFamily="34" charset="-122"/>
-                          <a:cs typeface="微软雅黑" pitchFamily="34" charset="-120"/>
+                          <a:latin typeface="微软雅黑" panose="020B0503020204020204" pitchFamily="34" charset="-122"/>
+                          <a:ea typeface="微软雅黑" panose="020B0503020204020204" pitchFamily="34" charset="-122"/>
+                          <a:cs typeface="微软雅黑" panose="020B0503020204020204" pitchFamily="34" charset="-120"/>
                         </a:rPr>
                         <a:t>对应真题题型，逐题精做</a:t>
                       </a:r>
                       <a:endParaRPr lang="en-US" sz="1500" dirty="0">
-                        <a:latin typeface="微软雅黑" charset="0"/>
-                        <a:ea typeface="微软雅黑" charset="0"/>
-                        <a:cs typeface="微软雅黑" charset="0"/>
+                        <a:latin typeface="微软雅黑" panose="020B0503020204020204" pitchFamily="34" charset="-122"/>
+                        <a:ea typeface="微软雅黑" panose="020B0503020204020204" pitchFamily="34" charset="-122"/>
+                        <a:cs typeface="微软雅黑" panose="020B0503020204020204" pitchFamily="34" charset="-122"/>
                       </a:endParaRPr>
                     </a:p>
                   </a:txBody>
-                  <a:tcPr marL="91440" marR="91440" marT="45720" marB="45720" anchor="ctr">
+                  <a:tcPr anchor="ctr">
                     <a:lnL w="9525" cap="flat" cmpd="sng" algn="ctr">
                       <a:solidFill>
                         <a:srgbClr val="D8DBE0"/>
@@ -2527,7 +2426,7 @@
                     <a:bodyPr/>
                     <a:lstStyle/>
                     <a:p>
-                      <a:pPr algn="ctr" indent="0" marL="0">
+                      <a:pPr marL="0" indent="0" algn="ctr">
                         <a:buNone/>
                       </a:pPr>
                       <a:r>
@@ -2535,20 +2434,20 @@
                           <a:solidFill>
                             <a:srgbClr val="1F2329"/>
                           </a:solidFill>
-                          <a:latin typeface="微软雅黑" pitchFamily="34" charset="0"/>
-                          <a:ea typeface="微软雅黑" pitchFamily="34" charset="-122"/>
-                          <a:cs typeface="微软雅黑" pitchFamily="34" charset="-120"/>
+                          <a:latin typeface="微软雅黑" panose="020B0503020204020204" pitchFamily="34" charset="-122"/>
+                          <a:ea typeface="微软雅黑" panose="020B0503020204020204" pitchFamily="34" charset="-122"/>
+                          <a:cs typeface="微软雅黑" panose="020B0503020204020204" pitchFamily="34" charset="-120"/>
                         </a:rPr>
                         <a:t>可做可不做</a:t>
                       </a:r>
                       <a:endParaRPr lang="en-US" sz="1500" dirty="0">
-                        <a:latin typeface="微软雅黑" charset="0"/>
-                        <a:ea typeface="微软雅黑" charset="0"/>
-                        <a:cs typeface="微软雅黑" charset="0"/>
+                        <a:latin typeface="微软雅黑" panose="020B0503020204020204" pitchFamily="34" charset="-122"/>
+                        <a:ea typeface="微软雅黑" panose="020B0503020204020204" pitchFamily="34" charset="-122"/>
+                        <a:cs typeface="微软雅黑" panose="020B0503020204020204" pitchFamily="34" charset="-122"/>
                       </a:endParaRPr>
                     </a:p>
                   </a:txBody>
-                  <a:tcPr marL="91440" marR="91440" marT="45720" marB="45720" anchor="ctr">
+                  <a:tcPr anchor="ctr">
                     <a:lnL w="9525" cap="flat" cmpd="sng" algn="ctr">
                       <a:solidFill>
                         <a:srgbClr val="D8DBE0"/>
@@ -2595,7 +2494,7 @@
                     <a:bodyPr/>
                     <a:lstStyle/>
                     <a:p>
-                      <a:pPr algn="ctr" indent="0" marL="0">
+                      <a:pPr marL="0" indent="0" algn="ctr">
                         <a:buNone/>
                       </a:pPr>
                       <a:r>
@@ -2603,20 +2502,20 @@
                           <a:solidFill>
                             <a:srgbClr val="1F2329"/>
                           </a:solidFill>
-                          <a:latin typeface="微软雅黑" pitchFamily="34" charset="0"/>
-                          <a:ea typeface="微软雅黑" pitchFamily="34" charset="-122"/>
-                          <a:cs typeface="微软雅黑" pitchFamily="34" charset="-120"/>
+                          <a:latin typeface="微软雅黑" panose="020B0503020204020204" pitchFamily="34" charset="-122"/>
+                          <a:ea typeface="微软雅黑" panose="020B0503020204020204" pitchFamily="34" charset="-122"/>
+                          <a:cs typeface="微软雅黑" panose="020B0503020204020204" pitchFamily="34" charset="-120"/>
                         </a:rPr>
                         <a:t>67</a:t>
                       </a:r>
                       <a:endParaRPr lang="en-US" sz="1500" dirty="0">
-                        <a:latin typeface="微软雅黑" charset="0"/>
-                        <a:ea typeface="微软雅黑" charset="0"/>
-                        <a:cs typeface="微软雅黑" charset="0"/>
+                        <a:latin typeface="微软雅黑" panose="020B0503020204020204" pitchFamily="34" charset="-122"/>
+                        <a:ea typeface="微软雅黑" panose="020B0503020204020204" pitchFamily="34" charset="-122"/>
+                        <a:cs typeface="微软雅黑" panose="020B0503020204020204" pitchFamily="34" charset="-122"/>
                       </a:endParaRPr>
                     </a:p>
                   </a:txBody>
-                  <a:tcPr marL="91440" marR="91440" marT="45720" marB="45720" anchor="ctr">
+                  <a:tcPr anchor="ctr">
                     <a:lnL w="9525" cap="flat" cmpd="sng" algn="ctr">
                       <a:solidFill>
                         <a:srgbClr val="D8DBE0"/>
@@ -2663,7 +2562,7 @@
                     <a:bodyPr/>
                     <a:lstStyle/>
                     <a:p>
-                      <a:pPr algn="ctr" indent="0" marL="0">
+                      <a:pPr marL="0" indent="0" algn="ctr">
                         <a:buNone/>
                       </a:pPr>
                       <a:r>
@@ -2671,20 +2570,20 @@
                           <a:solidFill>
                             <a:srgbClr val="1F2329"/>
                           </a:solidFill>
-                          <a:latin typeface="微软雅黑" pitchFamily="34" charset="0"/>
-                          <a:ea typeface="微软雅黑" pitchFamily="34" charset="-122"/>
-                          <a:cs typeface="微软雅黑" pitchFamily="34" charset="-120"/>
+                          <a:latin typeface="微软雅黑" panose="020B0503020204020204" pitchFamily="34" charset="-122"/>
+                          <a:ea typeface="微软雅黑" panose="020B0503020204020204" pitchFamily="34" charset="-122"/>
+                          <a:cs typeface="微软雅黑" panose="020B0503020204020204" pitchFamily="34" charset="-120"/>
                         </a:rPr>
                         <a:t>71%</a:t>
                       </a:r>
                       <a:endParaRPr lang="en-US" sz="1500" dirty="0">
-                        <a:latin typeface="微软雅黑" charset="0"/>
-                        <a:ea typeface="微软雅黑" charset="0"/>
-                        <a:cs typeface="微软雅黑" charset="0"/>
+                        <a:latin typeface="微软雅黑" panose="020B0503020204020204" pitchFamily="34" charset="-122"/>
+                        <a:ea typeface="微软雅黑" panose="020B0503020204020204" pitchFamily="34" charset="-122"/>
+                        <a:cs typeface="微软雅黑" panose="020B0503020204020204" pitchFamily="34" charset="-122"/>
                       </a:endParaRPr>
                     </a:p>
                   </a:txBody>
-                  <a:tcPr marL="91440" marR="91440" marT="45720" marB="45720" anchor="ctr">
+                  <a:tcPr anchor="ctr">
                     <a:lnL w="9525" cap="flat" cmpd="sng" algn="ctr">
                       <a:solidFill>
                         <a:srgbClr val="D8DBE0"/>
@@ -2731,7 +2630,7 @@
                     <a:bodyPr/>
                     <a:lstStyle/>
                     <a:p>
-                      <a:pPr algn="ctr" indent="0" marL="0">
+                      <a:pPr marL="0" indent="0" algn="ctr">
                         <a:buNone/>
                       </a:pPr>
                       <a:r>
@@ -2739,20 +2638,20 @@
                           <a:solidFill>
                             <a:srgbClr val="1F2329"/>
                           </a:solidFill>
-                          <a:latin typeface="微软雅黑" pitchFamily="34" charset="0"/>
-                          <a:ea typeface="微软雅黑" pitchFamily="34" charset="-122"/>
-                          <a:cs typeface="微软雅黑" pitchFamily="34" charset="-120"/>
+                          <a:latin typeface="微软雅黑" panose="020B0503020204020204" pitchFamily="34" charset="-122"/>
+                          <a:ea typeface="微软雅黑" panose="020B0503020204020204" pitchFamily="34" charset="-122"/>
+                          <a:cs typeface="微软雅黑" panose="020B0503020204020204" pitchFamily="34" charset="-120"/>
                         </a:rPr>
                         <a:t>在纲内、考频低，限时巩固</a:t>
                       </a:r>
                       <a:endParaRPr lang="en-US" sz="1500" dirty="0">
-                        <a:latin typeface="微软雅黑" charset="0"/>
-                        <a:ea typeface="微软雅黑" charset="0"/>
-                        <a:cs typeface="微软雅黑" charset="0"/>
+                        <a:latin typeface="微软雅黑" panose="020B0503020204020204" pitchFamily="34" charset="-122"/>
+                        <a:ea typeface="微软雅黑" panose="020B0503020204020204" pitchFamily="34" charset="-122"/>
+                        <a:cs typeface="微软雅黑" panose="020B0503020204020204" pitchFamily="34" charset="-122"/>
                       </a:endParaRPr>
                     </a:p>
                   </a:txBody>
-                  <a:tcPr marL="91440" marR="91440" marT="45720" marB="45720" anchor="ctr">
+                  <a:tcPr anchor="ctr">
                     <a:lnL w="9525" cap="flat" cmpd="sng" algn="ctr">
                       <a:solidFill>
                         <a:srgbClr val="D8DBE0"/>
@@ -2801,7 +2700,7 @@
                     <a:bodyPr/>
                     <a:lstStyle/>
                     <a:p>
-                      <a:pPr algn="ctr" indent="0" marL="0">
+                      <a:pPr marL="0" indent="0" algn="ctr">
                         <a:buNone/>
                       </a:pPr>
                       <a:r>
@@ -2809,20 +2708,20 @@
                           <a:solidFill>
                             <a:srgbClr val="1F2329"/>
                           </a:solidFill>
-                          <a:latin typeface="微软雅黑" pitchFamily="34" charset="0"/>
-                          <a:ea typeface="微软雅黑" pitchFamily="34" charset="-122"/>
-                          <a:cs typeface="微软雅黑" pitchFamily="34" charset="-120"/>
+                          <a:latin typeface="微软雅黑" panose="020B0503020204020204" pitchFamily="34" charset="-122"/>
+                          <a:ea typeface="微软雅黑" panose="020B0503020204020204" pitchFamily="34" charset="-122"/>
+                          <a:cs typeface="微软雅黑" panose="020B0503020204020204" pitchFamily="34" charset="-120"/>
                         </a:rPr>
                         <a:t>完全不做</a:t>
                       </a:r>
                       <a:endParaRPr lang="en-US" sz="1500" dirty="0">
-                        <a:latin typeface="微软雅黑" charset="0"/>
-                        <a:ea typeface="微软雅黑" charset="0"/>
-                        <a:cs typeface="微软雅黑" charset="0"/>
+                        <a:latin typeface="微软雅黑" panose="020B0503020204020204" pitchFamily="34" charset="-122"/>
+                        <a:ea typeface="微软雅黑" panose="020B0503020204020204" pitchFamily="34" charset="-122"/>
+                        <a:cs typeface="微软雅黑" panose="020B0503020204020204" pitchFamily="34" charset="-122"/>
                       </a:endParaRPr>
                     </a:p>
                   </a:txBody>
-                  <a:tcPr marL="91440" marR="91440" marT="45720" marB="45720" anchor="ctr">
+                  <a:tcPr anchor="ctr">
                     <a:lnL w="9525" cap="flat" cmpd="sng" algn="ctr">
                       <a:solidFill>
                         <a:srgbClr val="D8DBE0"/>
@@ -2869,7 +2768,7 @@
                     <a:bodyPr/>
                     <a:lstStyle/>
                     <a:p>
-                      <a:pPr algn="ctr" indent="0" marL="0">
+                      <a:pPr marL="0" indent="0" algn="ctr">
                         <a:buNone/>
                       </a:pPr>
                       <a:r>
@@ -2877,20 +2776,20 @@
                           <a:solidFill>
                             <a:srgbClr val="1F2329"/>
                           </a:solidFill>
-                          <a:latin typeface="微软雅黑" pitchFamily="34" charset="0"/>
-                          <a:ea typeface="微软雅黑" pitchFamily="34" charset="-122"/>
-                          <a:cs typeface="微软雅黑" pitchFamily="34" charset="-120"/>
+                          <a:latin typeface="微软雅黑" panose="020B0503020204020204" pitchFamily="34" charset="-122"/>
+                          <a:ea typeface="微软雅黑" panose="020B0503020204020204" pitchFamily="34" charset="-122"/>
+                          <a:cs typeface="微软雅黑" panose="020B0503020204020204" pitchFamily="34" charset="-120"/>
                         </a:rPr>
                         <a:t>4</a:t>
                       </a:r>
                       <a:endParaRPr lang="en-US" sz="1500" dirty="0">
-                        <a:latin typeface="微软雅黑" charset="0"/>
-                        <a:ea typeface="微软雅黑" charset="0"/>
-                        <a:cs typeface="微软雅黑" charset="0"/>
+                        <a:latin typeface="微软雅黑" panose="020B0503020204020204" pitchFamily="34" charset="-122"/>
+                        <a:ea typeface="微软雅黑" panose="020B0503020204020204" pitchFamily="34" charset="-122"/>
+                        <a:cs typeface="微软雅黑" panose="020B0503020204020204" pitchFamily="34" charset="-122"/>
                       </a:endParaRPr>
                     </a:p>
                   </a:txBody>
-                  <a:tcPr marL="91440" marR="91440" marT="45720" marB="45720" anchor="ctr">
+                  <a:tcPr anchor="ctr">
                     <a:lnL w="9525" cap="flat" cmpd="sng" algn="ctr">
                       <a:solidFill>
                         <a:srgbClr val="D8DBE0"/>
@@ -2937,7 +2836,7 @@
                     <a:bodyPr/>
                     <a:lstStyle/>
                     <a:p>
-                      <a:pPr algn="ctr" indent="0" marL="0">
+                      <a:pPr marL="0" indent="0" algn="ctr">
                         <a:buNone/>
                       </a:pPr>
                       <a:r>
@@ -2945,20 +2844,20 @@
                           <a:solidFill>
                             <a:srgbClr val="1F2329"/>
                           </a:solidFill>
-                          <a:latin typeface="微软雅黑" pitchFamily="34" charset="0"/>
-                          <a:ea typeface="微软雅黑" pitchFamily="34" charset="-122"/>
-                          <a:cs typeface="微软雅黑" pitchFamily="34" charset="-120"/>
+                          <a:latin typeface="微软雅黑" panose="020B0503020204020204" pitchFamily="34" charset="-122"/>
+                          <a:ea typeface="微软雅黑" panose="020B0503020204020204" pitchFamily="34" charset="-122"/>
+                          <a:cs typeface="微软雅黑" panose="020B0503020204020204" pitchFamily="34" charset="-120"/>
                         </a:rPr>
                         <a:t>4%</a:t>
                       </a:r>
                       <a:endParaRPr lang="en-US" sz="1500" dirty="0">
-                        <a:latin typeface="微软雅黑" charset="0"/>
-                        <a:ea typeface="微软雅黑" charset="0"/>
-                        <a:cs typeface="微软雅黑" charset="0"/>
+                        <a:latin typeface="微软雅黑" panose="020B0503020204020204" pitchFamily="34" charset="-122"/>
+                        <a:ea typeface="微软雅黑" panose="020B0503020204020204" pitchFamily="34" charset="-122"/>
+                        <a:cs typeface="微软雅黑" panose="020B0503020204020204" pitchFamily="34" charset="-122"/>
                       </a:endParaRPr>
                     </a:p>
                   </a:txBody>
-                  <a:tcPr marL="91440" marR="91440" marT="45720" marB="45720" anchor="ctr">
+                  <a:tcPr anchor="ctr">
                     <a:lnL w="9525" cap="flat" cmpd="sng" algn="ctr">
                       <a:solidFill>
                         <a:srgbClr val="D8DBE0"/>
@@ -3005,7 +2904,7 @@
                     <a:bodyPr/>
                     <a:lstStyle/>
                     <a:p>
-                      <a:pPr algn="ctr" indent="0" marL="0">
+                      <a:pPr marL="0" indent="0" algn="ctr">
                         <a:buNone/>
                       </a:pPr>
                       <a:r>
@@ -3013,20 +2912,20 @@
                           <a:solidFill>
                             <a:srgbClr val="1F2329"/>
                           </a:solidFill>
-                          <a:latin typeface="微软雅黑" pitchFamily="34" charset="0"/>
-                          <a:ea typeface="微软雅黑" pitchFamily="34" charset="-122"/>
-                          <a:cs typeface="微软雅黑" pitchFamily="34" charset="-120"/>
+                          <a:latin typeface="微软雅黑" panose="020B0503020204020204" pitchFamily="34" charset="-122"/>
+                          <a:ea typeface="微软雅黑" panose="020B0503020204020204" pitchFamily="34" charset="-122"/>
+                          <a:cs typeface="微软雅黑" panose="020B0503020204020204" pitchFamily="34" charset="-120"/>
                         </a:rPr>
                         <a:t>超纲或无对应题型，直接跳过</a:t>
                       </a:r>
                       <a:endParaRPr lang="en-US" sz="1500" dirty="0">
-                        <a:latin typeface="微软雅黑" charset="0"/>
-                        <a:ea typeface="微软雅黑" charset="0"/>
-                        <a:cs typeface="微软雅黑" charset="0"/>
+                        <a:latin typeface="微软雅黑" panose="020B0503020204020204" pitchFamily="34" charset="-122"/>
+                        <a:ea typeface="微软雅黑" panose="020B0503020204020204" pitchFamily="34" charset="-122"/>
+                        <a:cs typeface="微软雅黑" panose="020B0503020204020204" pitchFamily="34" charset="-122"/>
                       </a:endParaRPr>
                     </a:p>
                   </a:txBody>
-                  <a:tcPr marL="91440" marR="91440" marT="45720" marB="45720" anchor="ctr">
+                  <a:tcPr anchor="ctr">
                     <a:lnL w="9525" cap="flat" cmpd="sng" algn="ctr">
                       <a:solidFill>
                         <a:srgbClr val="D8DBE0"/>
@@ -3088,13 +2987,12 @@
             <a:avLst/>
           </a:prstGeom>
           <a:noFill/>
-          <a:ln/>
         </p:spPr>
         <p:txBody>
           <a:bodyPr wrap="square" rtlCol="0" anchor="t"/>
           <a:lstStyle/>
           <a:p>
-            <a:pPr algn="l" indent="0" marL="0">
+            <a:pPr marL="0" indent="0" algn="l">
               <a:buNone/>
             </a:pPr>
             <a:r>
@@ -3102,9 +3000,9 @@
                 <a:solidFill>
                   <a:srgbClr val="8A9099"/>
                 </a:solidFill>
-                <a:latin typeface="微软雅黑" pitchFamily="34" charset="0"/>
-                <a:ea typeface="微软雅黑" pitchFamily="34" charset="-122"/>
-                <a:cs typeface="微软雅黑" pitchFamily="34" charset="-120"/>
+                <a:latin typeface="微软雅黑" panose="020B0503020204020204" pitchFamily="34" charset="-122"/>
+                <a:ea typeface="微软雅黑" panose="020B0503020204020204" pitchFamily="34" charset="-122"/>
+                <a:cs typeface="微软雅黑" panose="020B0503020204020204" pitchFamily="34" charset="-120"/>
               </a:rPr>
               <a:t>题号口径：选N＝本章单项选择题第N题，答N＝解答题第N题，算N＝算法设计题第N题；页码为题集PDF页（书页＝PDF页−9）。</a:t>
             </a:r>
@@ -3122,7 +3020,7 @@
 
 <file path=ppt/slides/slide3.xml><?xml version="1.0" encoding="utf-8"?>
 <p:sld xmlns:a="http://schemas.openxmlformats.org/drawingml/2006/main" xmlns:r="http://schemas.openxmlformats.org/officeDocument/2006/relationships" xmlns:p="http://schemas.openxmlformats.org/presentationml/2006/main">
-  <p:cSld name="Slide 3">
+  <p:cSld>
     <p:bg>
       <p:bgPr>
         <a:blipFill dpi="0" rotWithShape="1">
@@ -3166,13 +3064,12 @@
             <a:avLst/>
           </a:prstGeom>
           <a:noFill/>
-          <a:ln/>
         </p:spPr>
         <p:txBody>
           <a:bodyPr wrap="square" rtlCol="0" anchor="ctr"/>
           <a:lstStyle/>
           <a:p>
-            <a:pPr algn="r" indent="0" marL="0">
+            <a:pPr marL="0" indent="0" algn="r">
               <a:buNone/>
             </a:pPr>
             <a:r>
@@ -3180,9 +3077,9 @@
                 <a:solidFill>
                   <a:srgbClr val="8A9099"/>
                 </a:solidFill>
-                <a:latin typeface="微软雅黑" pitchFamily="34" charset="0"/>
-                <a:ea typeface="微软雅黑" pitchFamily="34" charset="-122"/>
-                <a:cs typeface="微软雅黑" pitchFamily="34" charset="-120"/>
+                <a:latin typeface="微软雅黑" panose="020B0503020204020204" pitchFamily="34" charset="-122"/>
+                <a:ea typeface="微软雅黑" panose="020B0503020204020204" pitchFamily="34" charset="-122"/>
+                <a:cs typeface="微软雅黑" panose="020B0503020204020204" pitchFamily="34" charset="-120"/>
               </a:rPr>
               <a:t>3 / 9</a:t>
             </a:r>
@@ -3205,13 +3102,12 @@
             <a:avLst/>
           </a:prstGeom>
           <a:noFill/>
-          <a:ln/>
         </p:spPr>
         <p:txBody>
           <a:bodyPr wrap="square" rtlCol="0" anchor="ctr"/>
           <a:lstStyle/>
           <a:p>
-            <a:pPr algn="l" indent="0" marL="0">
+            <a:pPr marL="0" indent="0" algn="l">
               <a:buNone/>
             </a:pPr>
             <a:r>
@@ -3219,9 +3115,9 @@
                 <a:solidFill>
                   <a:srgbClr val="1F4E9C"/>
                 </a:solidFill>
-                <a:latin typeface="微软雅黑" pitchFamily="34" charset="0"/>
-                <a:ea typeface="微软雅黑" pitchFamily="34" charset="-122"/>
-                <a:cs typeface="微软雅黑" pitchFamily="34" charset="-120"/>
+                <a:latin typeface="微软雅黑" panose="020B0503020204020204" pitchFamily="34" charset="-122"/>
+                <a:ea typeface="微软雅黑" panose="020B0503020204020204" pitchFamily="34" charset="-122"/>
+                <a:cs typeface="微软雅黑" panose="020B0503020204020204" pitchFamily="34" charset="-120"/>
               </a:rPr>
               <a:t>有价值必做</a:t>
             </a:r>
@@ -3244,13 +3140,12 @@
             <a:avLst/>
           </a:prstGeom>
           <a:noFill/>
-          <a:ln/>
         </p:spPr>
         <p:txBody>
           <a:bodyPr wrap="square" rtlCol="0" anchor="ctr"/>
           <a:lstStyle/>
           <a:p>
-            <a:pPr algn="l" indent="0" marL="0">
+            <a:pPr marL="0" indent="0" algn="l">
               <a:buNone/>
             </a:pPr>
             <a:r>
@@ -3258,9 +3153,9 @@
                 <a:solidFill>
                   <a:srgbClr val="1F2329"/>
                 </a:solidFill>
-                <a:latin typeface="微软雅黑" pitchFamily="34" charset="0"/>
-                <a:ea typeface="微软雅黑" pitchFamily="34" charset="-122"/>
-                <a:cs typeface="微软雅黑" pitchFamily="34" charset="-120"/>
+                <a:latin typeface="微软雅黑" panose="020B0503020204020204" pitchFamily="34" charset="-122"/>
+                <a:ea typeface="微软雅黑" panose="020B0503020204020204" pitchFamily="34" charset="-122"/>
+                <a:cs typeface="微软雅黑" panose="020B0503020204020204" pitchFamily="34" charset="-120"/>
               </a:rPr>
               <a:t>必做题（1/4）</a:t>
             </a:r>
@@ -3270,21 +3165,15 @@
       </p:sp>
       <p:graphicFrame>
         <p:nvGraphicFramePr>
-          <p:cNvPr id="4" name="Table 0"/>
+          <p:cNvPr id="5" name="Table 0"/>
           <p:cNvGraphicFramePr>
             <a:graphicFrameLocks noGrp="1"/>
           </p:cNvGraphicFramePr>
-          <p:nvPr>
-            <p:extLst>
-              <p:ext uri="{D42A27DB-BD31-4B8C-83A1-F6EECF244321}">
-                <p14:modId xmlns:p14="http://schemas.microsoft.com/office/powerpoint/2010/main" val="1579011935"/>
-              </p:ext>
-            </p:extLst>
-          </p:nvPr>
+          <p:nvPr/>
         </p:nvGraphicFramePr>
         <p:xfrm>
           <a:off x="822960" y="2395728"/>
-          <a:ext cx="10545775" cy="914400"/>
+          <a:ext cx="10545775" cy="2944368"/>
         </p:xfrm>
         <a:graphic>
           <a:graphicData uri="http://schemas.openxmlformats.org/drawingml/2006/table">
@@ -3301,7 +3190,7 @@
                     <a:bodyPr/>
                     <a:lstStyle/>
                     <a:p>
-                      <a:pPr algn="l" indent="0" marL="0">
+                      <a:pPr marL="0" indent="0" algn="l">
                         <a:buNone/>
                       </a:pPr>
                       <a:r>
@@ -3309,20 +3198,20 @@
                           <a:solidFill>
                             <a:srgbClr val="1F4E9C"/>
                           </a:solidFill>
-                          <a:latin typeface="微软雅黑" pitchFamily="34" charset="0"/>
-                          <a:ea typeface="微软雅黑" pitchFamily="34" charset="-122"/>
-                          <a:cs typeface="微软雅黑" pitchFamily="34" charset="-120"/>
+                          <a:latin typeface="微软雅黑" panose="020B0503020204020204" pitchFamily="34" charset="-122"/>
+                          <a:ea typeface="微软雅黑" panose="020B0503020204020204" pitchFamily="34" charset="-122"/>
+                          <a:cs typeface="微软雅黑" panose="020B0503020204020204" pitchFamily="34" charset="-120"/>
                         </a:rPr>
                         <a:t>题号</a:t>
                       </a:r>
                       <a:endParaRPr lang="en-US" sz="1500" dirty="0">
-                        <a:latin typeface="微软雅黑" charset="0"/>
-                        <a:ea typeface="微软雅黑" charset="0"/>
-                        <a:cs typeface="微软雅黑" charset="0"/>
+                        <a:latin typeface="微软雅黑" panose="020B0503020204020204" pitchFamily="34" charset="-122"/>
+                        <a:ea typeface="微软雅黑" panose="020B0503020204020204" pitchFamily="34" charset="-122"/>
+                        <a:cs typeface="微软雅黑" panose="020B0503020204020204" pitchFamily="34" charset="-122"/>
                       </a:endParaRPr>
                     </a:p>
                   </a:txBody>
-                  <a:tcPr marL="91440" marR="91440" marT="45720" marB="45720" anchor="ctr">
+                  <a:tcPr anchor="ctr">
                     <a:lnL w="9525" cap="flat" cmpd="sng" algn="ctr">
                       <a:solidFill>
                         <a:srgbClr val="D8DBE0"/>
@@ -3369,7 +3258,7 @@
                     <a:bodyPr/>
                     <a:lstStyle/>
                     <a:p>
-                      <a:pPr algn="l" indent="0" marL="0">
+                      <a:pPr marL="0" indent="0" algn="l">
                         <a:buNone/>
                       </a:pPr>
                       <a:r>
@@ -3377,20 +3266,20 @@
                           <a:solidFill>
                             <a:srgbClr val="1F4E9C"/>
                           </a:solidFill>
-                          <a:latin typeface="微软雅黑" pitchFamily="34" charset="0"/>
-                          <a:ea typeface="微软雅黑" pitchFamily="34" charset="-122"/>
-                          <a:cs typeface="微软雅黑" pitchFamily="34" charset="-120"/>
+                          <a:latin typeface="微软雅黑" panose="020B0503020204020204" pitchFamily="34" charset="-122"/>
+                          <a:ea typeface="微软雅黑" panose="020B0503020204020204" pitchFamily="34" charset="-122"/>
+                          <a:cs typeface="微软雅黑" panose="020B0503020204020204" pitchFamily="34" charset="-120"/>
                         </a:rPr>
                         <a:t>考点</a:t>
                       </a:r>
                       <a:endParaRPr lang="en-US" sz="1500" dirty="0">
-                        <a:latin typeface="微软雅黑" charset="0"/>
-                        <a:ea typeface="微软雅黑" charset="0"/>
-                        <a:cs typeface="微软雅黑" charset="0"/>
+                        <a:latin typeface="微软雅黑" panose="020B0503020204020204" pitchFamily="34" charset="-122"/>
+                        <a:ea typeface="微软雅黑" panose="020B0503020204020204" pitchFamily="34" charset="-122"/>
+                        <a:cs typeface="微软雅黑" panose="020B0503020204020204" pitchFamily="34" charset="-122"/>
                       </a:endParaRPr>
                     </a:p>
                   </a:txBody>
-                  <a:tcPr marL="91440" marR="91440" marT="45720" marB="45720" anchor="ctr">
+                  <a:tcPr anchor="ctr">
                     <a:lnL w="9525" cap="flat" cmpd="sng" algn="ctr">
                       <a:solidFill>
                         <a:srgbClr val="D8DBE0"/>
@@ -3437,7 +3326,7 @@
                     <a:bodyPr/>
                     <a:lstStyle/>
                     <a:p>
-                      <a:pPr algn="l" indent="0" marL="0">
+                      <a:pPr marL="0" indent="0" algn="l">
                         <a:buNone/>
                       </a:pPr>
                       <a:r>
@@ -3445,20 +3334,20 @@
                           <a:solidFill>
                             <a:srgbClr val="1F4E9C"/>
                           </a:solidFill>
-                          <a:latin typeface="微软雅黑" pitchFamily="34" charset="0"/>
-                          <a:ea typeface="微软雅黑" pitchFamily="34" charset="-122"/>
-                          <a:cs typeface="微软雅黑" pitchFamily="34" charset="-120"/>
+                          <a:latin typeface="微软雅黑" panose="020B0503020204020204" pitchFamily="34" charset="-122"/>
+                          <a:ea typeface="微软雅黑" panose="020B0503020204020204" pitchFamily="34" charset="-122"/>
+                          <a:cs typeface="微软雅黑" panose="020B0503020204020204" pitchFamily="34" charset="-120"/>
                         </a:rPr>
                         <a:t>价值</a:t>
                       </a:r>
                       <a:endParaRPr lang="en-US" sz="1500" dirty="0">
-                        <a:latin typeface="微软雅黑" charset="0"/>
-                        <a:ea typeface="微软雅黑" charset="0"/>
-                        <a:cs typeface="微软雅黑" charset="0"/>
+                        <a:latin typeface="微软雅黑" panose="020B0503020204020204" pitchFamily="34" charset="-122"/>
+                        <a:ea typeface="微软雅黑" panose="020B0503020204020204" pitchFamily="34" charset="-122"/>
+                        <a:cs typeface="微软雅黑" panose="020B0503020204020204" pitchFamily="34" charset="-122"/>
                       </a:endParaRPr>
                     </a:p>
                   </a:txBody>
-                  <a:tcPr marL="91440" marR="91440" marT="45720" marB="45720" anchor="ctr">
+                  <a:tcPr anchor="ctr">
                     <a:lnL w="9525" cap="flat" cmpd="sng" algn="ctr">
                       <a:solidFill>
                         <a:srgbClr val="D8DBE0"/>
@@ -3507,7 +3396,7 @@
                     <a:bodyPr/>
                     <a:lstStyle/>
                     <a:p>
-                      <a:pPr algn="l" indent="0" marL="0">
+                      <a:pPr marL="0" indent="0" algn="l">
                         <a:buNone/>
                       </a:pPr>
                       <a:r>
@@ -3515,20 +3404,20 @@
                           <a:solidFill>
                             <a:srgbClr val="1F2329"/>
                           </a:solidFill>
-                          <a:latin typeface="微软雅黑" pitchFamily="34" charset="0"/>
-                          <a:ea typeface="微软雅黑" pitchFamily="34" charset="-122"/>
-                          <a:cs typeface="微软雅黑" pitchFamily="34" charset="-120"/>
+                          <a:latin typeface="微软雅黑" panose="020B0503020204020204" pitchFamily="34" charset="-122"/>
+                          <a:ea typeface="微软雅黑" panose="020B0503020204020204" pitchFamily="34" charset="-122"/>
+                          <a:cs typeface="微软雅黑" panose="020B0503020204020204" pitchFamily="34" charset="-120"/>
                         </a:rPr>
                         <a:t>10选15</a:t>
                       </a:r>
                       <a:endParaRPr lang="en-US" sz="1500" dirty="0">
-                        <a:latin typeface="微软雅黑" charset="0"/>
-                        <a:ea typeface="微软雅黑" charset="0"/>
-                        <a:cs typeface="微软雅黑" charset="0"/>
+                        <a:latin typeface="微软雅黑" panose="020B0503020204020204" pitchFamily="34" charset="-122"/>
+                        <a:ea typeface="微软雅黑" panose="020B0503020204020204" pitchFamily="34" charset="-122"/>
+                        <a:cs typeface="微软雅黑" panose="020B0503020204020204" pitchFamily="34" charset="-122"/>
                       </a:endParaRPr>
                     </a:p>
                   </a:txBody>
-                  <a:tcPr marL="91440" marR="91440" marT="45720" marB="45720" anchor="ctr">
+                  <a:tcPr anchor="ctr">
                     <a:lnL w="9525" cap="flat" cmpd="sng" algn="ctr">
                       <a:solidFill>
                         <a:srgbClr val="D8DBE0"/>
@@ -3575,7 +3464,7 @@
                     <a:bodyPr/>
                     <a:lstStyle/>
                     <a:p>
-                      <a:pPr algn="l" indent="0" marL="0">
+                      <a:pPr marL="0" indent="0" algn="l">
                         <a:buNone/>
                       </a:pPr>
                       <a:r>
@@ -3583,20 +3472,20 @@
                           <a:solidFill>
                             <a:srgbClr val="1F2329"/>
                           </a:solidFill>
-                          <a:latin typeface="微软雅黑" pitchFamily="34" charset="0"/>
-                          <a:ea typeface="微软雅黑" pitchFamily="34" charset="-122"/>
-                          <a:cs typeface="微软雅黑" pitchFamily="34" charset="-120"/>
+                          <a:latin typeface="微软雅黑" panose="020B0503020204020204" pitchFamily="34" charset="-122"/>
+                          <a:ea typeface="微软雅黑" panose="020B0503020204020204" pitchFamily="34" charset="-122"/>
+                          <a:cs typeface="微软雅黑" panose="020B0503020204020204" pitchFamily="34" charset="-120"/>
                         </a:rPr>
                         <a:t>希尔一趟反推增量</a:t>
                       </a:r>
                       <a:endParaRPr lang="en-US" sz="1500" dirty="0">
-                        <a:latin typeface="微软雅黑" charset="0"/>
-                        <a:ea typeface="微软雅黑" charset="0"/>
-                        <a:cs typeface="微软雅黑" charset="0"/>
+                        <a:latin typeface="微软雅黑" panose="020B0503020204020204" pitchFamily="34" charset="-122"/>
+                        <a:ea typeface="微软雅黑" panose="020B0503020204020204" pitchFamily="34" charset="-122"/>
+                        <a:cs typeface="微软雅黑" panose="020B0503020204020204" pitchFamily="34" charset="-122"/>
                       </a:endParaRPr>
                     </a:p>
                   </a:txBody>
-                  <a:tcPr marL="91440" marR="91440" marT="45720" marB="45720" anchor="ctr">
+                  <a:tcPr anchor="ctr">
                     <a:lnL w="9525" cap="flat" cmpd="sng" algn="ctr">
                       <a:solidFill>
                         <a:srgbClr val="D8DBE0"/>
@@ -3643,7 +3532,7 @@
                     <a:bodyPr/>
                     <a:lstStyle/>
                     <a:p>
-                      <a:pPr algn="l" indent="0" marL="0">
+                      <a:pPr marL="0" indent="0" algn="l">
                         <a:buNone/>
                       </a:pPr>
                       <a:r>
@@ -3651,20 +3540,20 @@
                           <a:solidFill>
                             <a:srgbClr val="1F2329"/>
                           </a:solidFill>
-                          <a:latin typeface="微软雅黑" pitchFamily="34" charset="0"/>
-                          <a:ea typeface="微软雅黑" pitchFamily="34" charset="-122"/>
-                          <a:cs typeface="微软雅黑" pitchFamily="34" charset="-120"/>
+                          <a:latin typeface="微软雅黑" panose="020B0503020204020204" pitchFamily="34" charset="-122"/>
+                          <a:ea typeface="微软雅黑" panose="020B0503020204020204" pitchFamily="34" charset="-122"/>
+                          <a:cs typeface="微软雅黑" panose="020B0503020204020204" pitchFamily="34" charset="-120"/>
                         </a:rPr>
                         <a:t>由第一趟结果反推增量，2024综合1(2)（增量5一趟）同型</a:t>
                       </a:r>
                       <a:endParaRPr lang="en-US" sz="1500" dirty="0">
-                        <a:latin typeface="微软雅黑" charset="0"/>
-                        <a:ea typeface="微软雅黑" charset="0"/>
-                        <a:cs typeface="微软雅黑" charset="0"/>
+                        <a:latin typeface="微软雅黑" panose="020B0503020204020204" pitchFamily="34" charset="-122"/>
+                        <a:ea typeface="微软雅黑" panose="020B0503020204020204" pitchFamily="34" charset="-122"/>
+                        <a:cs typeface="微软雅黑" panose="020B0503020204020204" pitchFamily="34" charset="-122"/>
                       </a:endParaRPr>
                     </a:p>
                   </a:txBody>
-                  <a:tcPr marL="91440" marR="91440" marT="45720" marB="45720" anchor="ctr">
+                  <a:tcPr anchor="ctr">
                     <a:lnL w="9525" cap="flat" cmpd="sng" algn="ctr">
                       <a:solidFill>
                         <a:srgbClr val="D8DBE0"/>
@@ -3713,7 +3602,7 @@
                     <a:bodyPr/>
                     <a:lstStyle/>
                     <a:p>
-                      <a:pPr algn="l" indent="0" marL="0">
+                      <a:pPr marL="0" indent="0" algn="l">
                         <a:buNone/>
                       </a:pPr>
                       <a:r>
@@ -3721,20 +3610,20 @@
                           <a:solidFill>
                             <a:srgbClr val="1F2329"/>
                           </a:solidFill>
-                          <a:latin typeface="微软雅黑" pitchFamily="34" charset="0"/>
-                          <a:ea typeface="微软雅黑" pitchFamily="34" charset="-122"/>
-                          <a:cs typeface="微软雅黑" pitchFamily="34" charset="-120"/>
+                          <a:latin typeface="微软雅黑" panose="020B0503020204020204" pitchFamily="34" charset="-122"/>
+                          <a:ea typeface="微软雅黑" panose="020B0503020204020204" pitchFamily="34" charset="-122"/>
+                          <a:cs typeface="微软雅黑" panose="020B0503020204020204" pitchFamily="34" charset="-120"/>
                         </a:rPr>
                         <a:t>10选18</a:t>
                       </a:r>
                       <a:endParaRPr lang="en-US" sz="1500" dirty="0">
-                        <a:latin typeface="微软雅黑" charset="0"/>
-                        <a:ea typeface="微软雅黑" charset="0"/>
-                        <a:cs typeface="微软雅黑" charset="0"/>
+                        <a:latin typeface="微软雅黑" panose="020B0503020204020204" pitchFamily="34" charset="-122"/>
+                        <a:ea typeface="微软雅黑" panose="020B0503020204020204" pitchFamily="34" charset="-122"/>
+                        <a:cs typeface="微软雅黑" panose="020B0503020204020204" pitchFamily="34" charset="-122"/>
                       </a:endParaRPr>
                     </a:p>
                   </a:txBody>
-                  <a:tcPr marL="91440" marR="91440" marT="45720" marB="45720" anchor="ctr">
+                  <a:tcPr anchor="ctr">
                     <a:lnL w="9525" cap="flat" cmpd="sng" algn="ctr">
                       <a:solidFill>
                         <a:srgbClr val="D8DBE0"/>
@@ -3781,7 +3670,7 @@
                     <a:bodyPr/>
                     <a:lstStyle/>
                     <a:p>
-                      <a:pPr algn="l" indent="0" marL="0">
+                      <a:pPr marL="0" indent="0" algn="l">
                         <a:buNone/>
                       </a:pPr>
                       <a:r>
@@ -3789,20 +3678,20 @@
                           <a:solidFill>
                             <a:srgbClr val="1F2329"/>
                           </a:solidFill>
-                          <a:latin typeface="微软雅黑" pitchFamily="34" charset="0"/>
-                          <a:ea typeface="微软雅黑" pitchFamily="34" charset="-122"/>
-                          <a:cs typeface="微软雅黑" pitchFamily="34" charset="-120"/>
+                          <a:latin typeface="微软雅黑" panose="020B0503020204020204" pitchFamily="34" charset="-122"/>
+                          <a:ea typeface="微软雅黑" panose="020B0503020204020204" pitchFamily="34" charset="-122"/>
+                          <a:cs typeface="微软雅黑" panose="020B0503020204020204" pitchFamily="34" charset="-120"/>
                         </a:rPr>
                         <a:t>希尔多趟手算</a:t>
                       </a:r>
                       <a:endParaRPr lang="en-US" sz="1500" dirty="0">
-                        <a:latin typeface="微软雅黑" charset="0"/>
-                        <a:ea typeface="微软雅黑" charset="0"/>
-                        <a:cs typeface="微软雅黑" charset="0"/>
+                        <a:latin typeface="微软雅黑" panose="020B0503020204020204" pitchFamily="34" charset="-122"/>
+                        <a:ea typeface="微软雅黑" panose="020B0503020204020204" pitchFamily="34" charset="-122"/>
+                        <a:cs typeface="微软雅黑" panose="020B0503020204020204" pitchFamily="34" charset="-122"/>
                       </a:endParaRPr>
                     </a:p>
                   </a:txBody>
-                  <a:tcPr marL="91440" marR="91440" marT="45720" marB="45720" anchor="ctr">
+                  <a:tcPr anchor="ctr">
                     <a:lnL w="9525" cap="flat" cmpd="sng" algn="ctr">
                       <a:solidFill>
                         <a:srgbClr val="D8DBE0"/>
@@ -3849,7 +3738,7 @@
                     <a:bodyPr/>
                     <a:lstStyle/>
                     <a:p>
-                      <a:pPr algn="l" indent="0" marL="0">
+                      <a:pPr marL="0" indent="0" algn="l">
                         <a:buNone/>
                       </a:pPr>
                       <a:r>
@@ -3857,20 +3746,20 @@
                           <a:solidFill>
                             <a:srgbClr val="1F2329"/>
                           </a:solidFill>
-                          <a:latin typeface="微软雅黑" pitchFamily="34" charset="0"/>
-                          <a:ea typeface="微软雅黑" pitchFamily="34" charset="-122"/>
-                          <a:cs typeface="微软雅黑" pitchFamily="34" charset="-120"/>
+                          <a:latin typeface="微软雅黑" panose="020B0503020204020204" pitchFamily="34" charset="-122"/>
+                          <a:ea typeface="微软雅黑" panose="020B0503020204020204" pitchFamily="34" charset="-122"/>
+                          <a:cs typeface="微软雅黑" panose="020B0503020204020204" pitchFamily="34" charset="-120"/>
                         </a:rPr>
                         <a:t>两趟希尔结果推增量与过程</a:t>
                       </a:r>
                       <a:endParaRPr lang="en-US" sz="1500" dirty="0">
-                        <a:latin typeface="微软雅黑" charset="0"/>
-                        <a:ea typeface="微软雅黑" charset="0"/>
-                        <a:cs typeface="微软雅黑" charset="0"/>
+                        <a:latin typeface="微软雅黑" panose="020B0503020204020204" pitchFamily="34" charset="-122"/>
+                        <a:ea typeface="微软雅黑" panose="020B0503020204020204" pitchFamily="34" charset="-122"/>
+                        <a:cs typeface="微软雅黑" panose="020B0503020204020204" pitchFamily="34" charset="-122"/>
                       </a:endParaRPr>
                     </a:p>
                   </a:txBody>
-                  <a:tcPr marL="91440" marR="91440" marT="45720" marB="45720" anchor="ctr">
+                  <a:tcPr anchor="ctr">
                     <a:lnL w="9525" cap="flat" cmpd="sng" algn="ctr">
                       <a:solidFill>
                         <a:srgbClr val="D8DBE0"/>
@@ -3919,7 +3808,7 @@
                     <a:bodyPr/>
                     <a:lstStyle/>
                     <a:p>
-                      <a:pPr algn="l" indent="0" marL="0">
+                      <a:pPr marL="0" indent="0" algn="l">
                         <a:buNone/>
                       </a:pPr>
                       <a:r>
@@ -3927,20 +3816,20 @@
                           <a:solidFill>
                             <a:srgbClr val="1F2329"/>
                           </a:solidFill>
-                          <a:latin typeface="微软雅黑" pitchFamily="34" charset="0"/>
-                          <a:ea typeface="微软雅黑" pitchFamily="34" charset="-122"/>
-                          <a:cs typeface="微软雅黑" pitchFamily="34" charset="-120"/>
+                          <a:latin typeface="微软雅黑" panose="020B0503020204020204" pitchFamily="34" charset="-122"/>
+                          <a:ea typeface="微软雅黑" panose="020B0503020204020204" pitchFamily="34" charset="-122"/>
+                          <a:cs typeface="微软雅黑" panose="020B0503020204020204" pitchFamily="34" charset="-120"/>
                         </a:rPr>
                         <a:t>10选21</a:t>
                       </a:r>
                       <a:endParaRPr lang="en-US" sz="1500" dirty="0">
-                        <a:latin typeface="微软雅黑" charset="0"/>
-                        <a:ea typeface="微软雅黑" charset="0"/>
-                        <a:cs typeface="微软雅黑" charset="0"/>
+                        <a:latin typeface="微软雅黑" panose="020B0503020204020204" pitchFamily="34" charset="-122"/>
+                        <a:ea typeface="微软雅黑" panose="020B0503020204020204" pitchFamily="34" charset="-122"/>
+                        <a:cs typeface="微软雅黑" panose="020B0503020204020204" pitchFamily="34" charset="-122"/>
                       </a:endParaRPr>
                     </a:p>
                   </a:txBody>
-                  <a:tcPr marL="91440" marR="91440" marT="45720" marB="45720" anchor="ctr">
+                  <a:tcPr anchor="ctr">
                     <a:lnL w="9525" cap="flat" cmpd="sng" algn="ctr">
                       <a:solidFill>
                         <a:srgbClr val="D8DBE0"/>
@@ -3987,7 +3876,7 @@
                     <a:bodyPr/>
                     <a:lstStyle/>
                     <a:p>
-                      <a:pPr algn="l" indent="0" marL="0">
+                      <a:pPr marL="0" indent="0" algn="l">
                         <a:buNone/>
                       </a:pPr>
                       <a:r>
@@ -3995,20 +3884,20 @@
                           <a:solidFill>
                             <a:srgbClr val="1F2329"/>
                           </a:solidFill>
-                          <a:latin typeface="微软雅黑" pitchFamily="34" charset="0"/>
-                          <a:ea typeface="微软雅黑" pitchFamily="34" charset="-122"/>
-                          <a:cs typeface="微软雅黑" pitchFamily="34" charset="-120"/>
+                          <a:latin typeface="微软雅黑" panose="020B0503020204020204" pitchFamily="34" charset="-122"/>
+                          <a:ea typeface="微软雅黑" panose="020B0503020204020204" pitchFamily="34" charset="-122"/>
+                          <a:cs typeface="微软雅黑" panose="020B0503020204020204" pitchFamily="34" charset="-120"/>
                         </a:rPr>
                         <a:t>快排第二趟判别</a:t>
                       </a:r>
                       <a:endParaRPr lang="en-US" sz="1500" dirty="0">
-                        <a:latin typeface="微软雅黑" charset="0"/>
-                        <a:ea typeface="微软雅黑" charset="0"/>
-                        <a:cs typeface="微软雅黑" charset="0"/>
+                        <a:latin typeface="微软雅黑" panose="020B0503020204020204" pitchFamily="34" charset="-122"/>
+                        <a:ea typeface="微软雅黑" panose="020B0503020204020204" pitchFamily="34" charset="-122"/>
+                        <a:cs typeface="微软雅黑" panose="020B0503020204020204" pitchFamily="34" charset="-122"/>
                       </a:endParaRPr>
                     </a:p>
                   </a:txBody>
-                  <a:tcPr marL="91440" marR="91440" marT="45720" marB="45720" anchor="ctr">
+                  <a:tcPr anchor="ctr">
                     <a:lnL w="9525" cap="flat" cmpd="sng" algn="ctr">
                       <a:solidFill>
                         <a:srgbClr val="D8DBE0"/>
@@ -4055,7 +3944,7 @@
                     <a:bodyPr/>
                     <a:lstStyle/>
                     <a:p>
-                      <a:pPr algn="l" indent="0" marL="0">
+                      <a:pPr marL="0" indent="0" algn="l">
                         <a:buNone/>
                       </a:pPr>
                       <a:r>
@@ -4063,20 +3952,20 @@
                           <a:solidFill>
                             <a:srgbClr val="1F2329"/>
                           </a:solidFill>
-                          <a:latin typeface="微软雅黑" pitchFamily="34" charset="0"/>
-                          <a:ea typeface="微软雅黑" pitchFamily="34" charset="-122"/>
-                          <a:cs typeface="微软雅黑" pitchFamily="34" charset="-120"/>
+                          <a:latin typeface="微软雅黑" panose="020B0503020204020204" pitchFamily="34" charset="-122"/>
+                          <a:ea typeface="微软雅黑" panose="020B0503020204020204" pitchFamily="34" charset="-122"/>
+                          <a:cs typeface="微软雅黑" panose="020B0503020204020204" pitchFamily="34" charset="-120"/>
                         </a:rPr>
                         <a:t>判不可能的第二趟结果，快排每趟定枢轴位置的理解</a:t>
                       </a:r>
                       <a:endParaRPr lang="en-US" sz="1500" dirty="0">
-                        <a:latin typeface="微软雅黑" charset="0"/>
-                        <a:ea typeface="微软雅黑" charset="0"/>
-                        <a:cs typeface="微软雅黑" charset="0"/>
+                        <a:latin typeface="微软雅黑" panose="020B0503020204020204" pitchFamily="34" charset="-122"/>
+                        <a:ea typeface="微软雅黑" panose="020B0503020204020204" pitchFamily="34" charset="-122"/>
+                        <a:cs typeface="微软雅黑" panose="020B0503020204020204" pitchFamily="34" charset="-122"/>
                       </a:endParaRPr>
                     </a:p>
                   </a:txBody>
-                  <a:tcPr marL="91440" marR="91440" marT="45720" marB="45720" anchor="ctr">
+                  <a:tcPr anchor="ctr">
                     <a:lnL w="9525" cap="flat" cmpd="sng" algn="ctr">
                       <a:solidFill>
                         <a:srgbClr val="D8DBE0"/>
@@ -4125,7 +4014,7 @@
                     <a:bodyPr/>
                     <a:lstStyle/>
                     <a:p>
-                      <a:pPr algn="l" indent="0" marL="0">
+                      <a:pPr marL="0" indent="0" algn="l">
                         <a:buNone/>
                       </a:pPr>
                       <a:r>
@@ -4133,20 +4022,20 @@
                           <a:solidFill>
                             <a:srgbClr val="1F2329"/>
                           </a:solidFill>
-                          <a:latin typeface="微软雅黑" pitchFamily="34" charset="0"/>
-                          <a:ea typeface="微软雅黑" pitchFamily="34" charset="-122"/>
-                          <a:cs typeface="微软雅黑" pitchFamily="34" charset="-120"/>
+                          <a:latin typeface="微软雅黑" panose="020B0503020204020204" pitchFamily="34" charset="-122"/>
+                          <a:ea typeface="微软雅黑" panose="020B0503020204020204" pitchFamily="34" charset="-122"/>
+                          <a:cs typeface="微软雅黑" panose="020B0503020204020204" pitchFamily="34" charset="-120"/>
                         </a:rPr>
                         <a:t>10选22</a:t>
                       </a:r>
                       <a:endParaRPr lang="en-US" sz="1500" dirty="0">
-                        <a:latin typeface="微软雅黑" charset="0"/>
-                        <a:ea typeface="微软雅黑" charset="0"/>
-                        <a:cs typeface="微软雅黑" charset="0"/>
+                        <a:latin typeface="微软雅黑" panose="020B0503020204020204" pitchFamily="34" charset="-122"/>
+                        <a:ea typeface="微软雅黑" panose="020B0503020204020204" pitchFamily="34" charset="-122"/>
+                        <a:cs typeface="微软雅黑" panose="020B0503020204020204" pitchFamily="34" charset="-122"/>
                       </a:endParaRPr>
                     </a:p>
                   </a:txBody>
-                  <a:tcPr marL="91440" marR="91440" marT="45720" marB="45720" anchor="ctr">
+                  <a:tcPr anchor="ctr">
                     <a:lnL w="9525" cap="flat" cmpd="sng" algn="ctr">
                       <a:solidFill>
                         <a:srgbClr val="D8DBE0"/>
@@ -4193,7 +4082,7 @@
                     <a:bodyPr/>
                     <a:lstStyle/>
                     <a:p>
-                      <a:pPr algn="l" indent="0" marL="0">
+                      <a:pPr marL="0" indent="0" algn="l">
                         <a:buNone/>
                       </a:pPr>
                       <a:r>
@@ -4201,20 +4090,20 @@
                           <a:solidFill>
                             <a:srgbClr val="1F2329"/>
                           </a:solidFill>
-                          <a:latin typeface="微软雅黑" pitchFamily="34" charset="0"/>
-                          <a:ea typeface="微软雅黑" pitchFamily="34" charset="-122"/>
-                          <a:cs typeface="微软雅黑" pitchFamily="34" charset="-120"/>
+                          <a:latin typeface="微软雅黑" panose="020B0503020204020204" pitchFamily="34" charset="-122"/>
+                          <a:ea typeface="微软雅黑" panose="020B0503020204020204" pitchFamily="34" charset="-122"/>
+                          <a:cs typeface="微软雅黑" panose="020B0503020204020204" pitchFamily="34" charset="-120"/>
                         </a:rPr>
                         <a:t>堆删除重建比较次数</a:t>
                       </a:r>
                       <a:endParaRPr lang="en-US" sz="1500" dirty="0">
-                        <a:latin typeface="微软雅黑" charset="0"/>
-                        <a:ea typeface="微软雅黑" charset="0"/>
-                        <a:cs typeface="微软雅黑" charset="0"/>
+                        <a:latin typeface="微软雅黑" panose="020B0503020204020204" pitchFamily="34" charset="-122"/>
+                        <a:ea typeface="微软雅黑" panose="020B0503020204020204" pitchFamily="34" charset="-122"/>
+                        <a:cs typeface="微软雅黑" panose="020B0503020204020204" pitchFamily="34" charset="-122"/>
                       </a:endParaRPr>
                     </a:p>
                   </a:txBody>
-                  <a:tcPr marL="91440" marR="91440" marT="45720" marB="45720" anchor="ctr">
+                  <a:tcPr anchor="ctr">
                     <a:lnL w="9525" cap="flat" cmpd="sng" algn="ctr">
                       <a:solidFill>
                         <a:srgbClr val="D8DBE0"/>
@@ -4261,7 +4150,7 @@
                     <a:bodyPr/>
                     <a:lstStyle/>
                     <a:p>
-                      <a:pPr algn="l" indent="0" marL="0">
+                      <a:pPr marL="0" indent="0" algn="l">
                         <a:buNone/>
                       </a:pPr>
                       <a:r>
@@ -4269,20 +4158,20 @@
                           <a:solidFill>
                             <a:srgbClr val="1F2329"/>
                           </a:solidFill>
-                          <a:latin typeface="微软雅黑" pitchFamily="34" charset="0"/>
-                          <a:ea typeface="微软雅黑" pitchFamily="34" charset="-122"/>
-                          <a:cs typeface="微软雅黑" pitchFamily="34" charset="-120"/>
+                          <a:latin typeface="微软雅黑" panose="020B0503020204020204" pitchFamily="34" charset="-122"/>
+                          <a:ea typeface="微软雅黑" panose="020B0503020204020204" pitchFamily="34" charset="-122"/>
+                          <a:cs typeface="微软雅黑" panose="020B0503020204020204" pitchFamily="34" charset="-120"/>
                         </a:rPr>
                         <a:t>小根堆删堆顶重建比较次数，2026填15（重建堆比较次数）同型</a:t>
                       </a:r>
                       <a:endParaRPr lang="en-US" sz="1500" dirty="0">
-                        <a:latin typeface="微软雅黑" charset="0"/>
-                        <a:ea typeface="微软雅黑" charset="0"/>
-                        <a:cs typeface="微软雅黑" charset="0"/>
+                        <a:latin typeface="微软雅黑" panose="020B0503020204020204" pitchFamily="34" charset="-122"/>
+                        <a:ea typeface="微软雅黑" panose="020B0503020204020204" pitchFamily="34" charset="-122"/>
+                        <a:cs typeface="微软雅黑" panose="020B0503020204020204" pitchFamily="34" charset="-122"/>
                       </a:endParaRPr>
                     </a:p>
                   </a:txBody>
-                  <a:tcPr marL="91440" marR="91440" marT="45720" marB="45720" anchor="ctr">
+                  <a:tcPr anchor="ctr">
                     <a:lnL w="9525" cap="flat" cmpd="sng" algn="ctr">
                       <a:solidFill>
                         <a:srgbClr val="D8DBE0"/>
@@ -4331,7 +4220,7 @@
                     <a:bodyPr/>
                     <a:lstStyle/>
                     <a:p>
-                      <a:pPr algn="l" indent="0" marL="0">
+                      <a:pPr marL="0" indent="0" algn="l">
                         <a:buNone/>
                       </a:pPr>
                       <a:r>
@@ -4339,20 +4228,20 @@
                           <a:solidFill>
                             <a:srgbClr val="1F2329"/>
                           </a:solidFill>
-                          <a:latin typeface="微软雅黑" pitchFamily="34" charset="0"/>
-                          <a:ea typeface="微软雅黑" pitchFamily="34" charset="-122"/>
-                          <a:cs typeface="微软雅黑" pitchFamily="34" charset="-120"/>
+                          <a:latin typeface="微软雅黑" panose="020B0503020204020204" pitchFamily="34" charset="-122"/>
+                          <a:ea typeface="微软雅黑" panose="020B0503020204020204" pitchFamily="34" charset="-122"/>
+                          <a:cs typeface="微软雅黑" panose="020B0503020204020204" pitchFamily="34" charset="-120"/>
                         </a:rPr>
                         <a:t>10选23</a:t>
                       </a:r>
                       <a:endParaRPr lang="en-US" sz="1500" dirty="0">
-                        <a:latin typeface="微软雅黑" charset="0"/>
-                        <a:ea typeface="微软雅黑" charset="0"/>
-                        <a:cs typeface="微软雅黑" charset="0"/>
+                        <a:latin typeface="微软雅黑" panose="020B0503020204020204" pitchFamily="34" charset="-122"/>
+                        <a:ea typeface="微软雅黑" panose="020B0503020204020204" pitchFamily="34" charset="-122"/>
+                        <a:cs typeface="微软雅黑" panose="020B0503020204020204" pitchFamily="34" charset="-122"/>
                       </a:endParaRPr>
                     </a:p>
                   </a:txBody>
-                  <a:tcPr marL="91440" marR="91440" marT="45720" marB="45720" anchor="ctr">
+                  <a:tcPr anchor="ctr">
                     <a:lnL w="9525" cap="flat" cmpd="sng" algn="ctr">
                       <a:solidFill>
                         <a:srgbClr val="D8DBE0"/>
@@ -4399,7 +4288,7 @@
                     <a:bodyPr/>
                     <a:lstStyle/>
                     <a:p>
-                      <a:pPr algn="l" indent="0" marL="0">
+                      <a:pPr marL="0" indent="0" algn="l">
                         <a:buNone/>
                       </a:pPr>
                       <a:r>
@@ -4407,20 +4296,20 @@
                           <a:solidFill>
                             <a:srgbClr val="1F2329"/>
                           </a:solidFill>
-                          <a:latin typeface="微软雅黑" pitchFamily="34" charset="0"/>
-                          <a:ea typeface="微软雅黑" pitchFamily="34" charset="-122"/>
-                          <a:cs typeface="微软雅黑" pitchFamily="34" charset="-120"/>
+                          <a:latin typeface="微软雅黑" panose="020B0503020204020204" pitchFamily="34" charset="-122"/>
+                          <a:ea typeface="微软雅黑" panose="020B0503020204020204" pitchFamily="34" charset="-122"/>
+                          <a:cs typeface="微软雅黑" panose="020B0503020204020204" pitchFamily="34" charset="-120"/>
                         </a:rPr>
                         <a:t>堆插入调整比较次数</a:t>
                       </a:r>
                       <a:endParaRPr lang="en-US" sz="1500" dirty="0">
-                        <a:latin typeface="微软雅黑" charset="0"/>
-                        <a:ea typeface="微软雅黑" charset="0"/>
-                        <a:cs typeface="微软雅黑" charset="0"/>
+                        <a:latin typeface="微软雅黑" panose="020B0503020204020204" pitchFamily="34" charset="-122"/>
+                        <a:ea typeface="微软雅黑" panose="020B0503020204020204" pitchFamily="34" charset="-122"/>
+                        <a:cs typeface="微软雅黑" panose="020B0503020204020204" pitchFamily="34" charset="-122"/>
                       </a:endParaRPr>
                     </a:p>
                   </a:txBody>
-                  <a:tcPr marL="91440" marR="91440" marT="45720" marB="45720" anchor="ctr">
+                  <a:tcPr anchor="ctr">
                     <a:lnL w="9525" cap="flat" cmpd="sng" algn="ctr">
                       <a:solidFill>
                         <a:srgbClr val="D8DBE0"/>
@@ -4467,7 +4356,7 @@
                     <a:bodyPr/>
                     <a:lstStyle/>
                     <a:p>
-                      <a:pPr algn="l" indent="0" marL="0">
+                      <a:pPr marL="0" indent="0" algn="l">
                         <a:buNone/>
                       </a:pPr>
                       <a:r>
@@ -4475,20 +4364,20 @@
                           <a:solidFill>
                             <a:srgbClr val="1F2329"/>
                           </a:solidFill>
-                          <a:latin typeface="微软雅黑" pitchFamily="34" charset="0"/>
-                          <a:ea typeface="微软雅黑" pitchFamily="34" charset="-122"/>
-                          <a:cs typeface="微软雅黑" pitchFamily="34" charset="-120"/>
+                          <a:latin typeface="微软雅黑" panose="020B0503020204020204" pitchFamily="34" charset="-122"/>
+                          <a:ea typeface="微软雅黑" panose="020B0503020204020204" pitchFamily="34" charset="-122"/>
+                          <a:cs typeface="微软雅黑" panose="020B0503020204020204" pitchFamily="34" charset="-120"/>
                         </a:rPr>
                         <a:t>大根堆尾部插18的比较次数，2025填10/2026填15原题形态</a:t>
                       </a:r>
                       <a:endParaRPr lang="en-US" sz="1500" dirty="0">
-                        <a:latin typeface="微软雅黑" charset="0"/>
-                        <a:ea typeface="微软雅黑" charset="0"/>
-                        <a:cs typeface="微软雅黑" charset="0"/>
+                        <a:latin typeface="微软雅黑" panose="020B0503020204020204" pitchFamily="34" charset="-122"/>
+                        <a:ea typeface="微软雅黑" panose="020B0503020204020204" pitchFamily="34" charset="-122"/>
+                        <a:cs typeface="微软雅黑" panose="020B0503020204020204" pitchFamily="34" charset="-122"/>
                       </a:endParaRPr>
                     </a:p>
                   </a:txBody>
-                  <a:tcPr marL="91440" marR="91440" marT="45720" marB="45720" anchor="ctr">
+                  <a:tcPr anchor="ctr">
                     <a:lnL w="9525" cap="flat" cmpd="sng" algn="ctr">
                       <a:solidFill>
                         <a:srgbClr val="D8DBE0"/>
@@ -4537,7 +4426,7 @@
                     <a:bodyPr/>
                     <a:lstStyle/>
                     <a:p>
-                      <a:pPr algn="l" indent="0" marL="0">
+                      <a:pPr marL="0" indent="0" algn="l">
                         <a:buNone/>
                       </a:pPr>
                       <a:r>
@@ -4545,20 +4434,20 @@
                           <a:solidFill>
                             <a:srgbClr val="1F2329"/>
                           </a:solidFill>
-                          <a:latin typeface="微软雅黑" pitchFamily="34" charset="0"/>
-                          <a:ea typeface="微软雅黑" pitchFamily="34" charset="-122"/>
-                          <a:cs typeface="微软雅黑" pitchFamily="34" charset="-120"/>
+                          <a:latin typeface="微软雅黑" panose="020B0503020204020204" pitchFamily="34" charset="-122"/>
+                          <a:ea typeface="微软雅黑" panose="020B0503020204020204" pitchFamily="34" charset="-122"/>
+                          <a:cs typeface="微软雅黑" panose="020B0503020204020204" pitchFamily="34" charset="-120"/>
                         </a:rPr>
                         <a:t>10选24</a:t>
                       </a:r>
                       <a:endParaRPr lang="en-US" sz="1500" dirty="0">
-                        <a:latin typeface="微软雅黑" charset="0"/>
-                        <a:ea typeface="微软雅黑" charset="0"/>
-                        <a:cs typeface="微软雅黑" charset="0"/>
+                        <a:latin typeface="微软雅黑" panose="020B0503020204020204" pitchFamily="34" charset="-122"/>
+                        <a:ea typeface="微软雅黑" panose="020B0503020204020204" pitchFamily="34" charset="-122"/>
+                        <a:cs typeface="微软雅黑" panose="020B0503020204020204" pitchFamily="34" charset="-122"/>
                       </a:endParaRPr>
                     </a:p>
                   </a:txBody>
-                  <a:tcPr marL="91440" marR="91440" marT="45720" marB="45720" anchor="ctr">
+                  <a:tcPr anchor="ctr">
                     <a:lnL w="9525" cap="flat" cmpd="sng" algn="ctr">
                       <a:solidFill>
                         <a:srgbClr val="D8DBE0"/>
@@ -4605,7 +4494,7 @@
                     <a:bodyPr/>
                     <a:lstStyle/>
                     <a:p>
-                      <a:pPr algn="l" indent="0" marL="0">
+                      <a:pPr marL="0" indent="0" algn="l">
                         <a:buNone/>
                       </a:pPr>
                       <a:r>
@@ -4613,20 +4502,20 @@
                           <a:solidFill>
                             <a:srgbClr val="1F2329"/>
                           </a:solidFill>
-                          <a:latin typeface="微软雅黑" pitchFamily="34" charset="0"/>
-                          <a:ea typeface="微软雅黑" pitchFamily="34" charset="-122"/>
-                          <a:cs typeface="微软雅黑" pitchFamily="34" charset="-120"/>
+                          <a:latin typeface="微软雅黑" panose="020B0503020204020204" pitchFamily="34" charset="-122"/>
+                          <a:ea typeface="微软雅黑" panose="020B0503020204020204" pitchFamily="34" charset="-122"/>
+                          <a:cs typeface="微软雅黑" panose="020B0503020204020204" pitchFamily="34" charset="-120"/>
                         </a:rPr>
                         <a:t>排序方法辨认</a:t>
                       </a:r>
                       <a:endParaRPr lang="en-US" sz="1500" dirty="0">
-                        <a:latin typeface="微软雅黑" charset="0"/>
-                        <a:ea typeface="微软雅黑" charset="0"/>
-                        <a:cs typeface="微软雅黑" charset="0"/>
+                        <a:latin typeface="微软雅黑" panose="020B0503020204020204" pitchFamily="34" charset="-122"/>
+                        <a:ea typeface="微软雅黑" panose="020B0503020204020204" pitchFamily="34" charset="-122"/>
+                        <a:cs typeface="微软雅黑" panose="020B0503020204020204" pitchFamily="34" charset="-122"/>
                       </a:endParaRPr>
                     </a:p>
                   </a:txBody>
-                  <a:tcPr marL="91440" marR="91440" marT="45720" marB="45720" anchor="ctr">
+                  <a:tcPr anchor="ctr">
                     <a:lnL w="9525" cap="flat" cmpd="sng" algn="ctr">
                       <a:solidFill>
                         <a:srgbClr val="D8DBE0"/>
@@ -4673,7 +4562,7 @@
                     <a:bodyPr/>
                     <a:lstStyle/>
                     <a:p>
-                      <a:pPr algn="l" indent="0" marL="0">
+                      <a:pPr marL="0" indent="0" algn="l">
                         <a:buNone/>
                       </a:pPr>
                       <a:r>
@@ -4681,20 +4570,20 @@
                           <a:solidFill>
                             <a:srgbClr val="1F2329"/>
                           </a:solidFill>
-                          <a:latin typeface="微软雅黑" pitchFamily="34" charset="0"/>
-                          <a:ea typeface="微软雅黑" pitchFamily="34" charset="-122"/>
-                          <a:cs typeface="微软雅黑" pitchFamily="34" charset="-120"/>
+                          <a:latin typeface="微软雅黑" panose="020B0503020204020204" pitchFamily="34" charset="-122"/>
+                          <a:ea typeface="微软雅黑" panose="020B0503020204020204" pitchFamily="34" charset="-122"/>
+                          <a:cs typeface="微软雅黑" panose="020B0503020204020204" pitchFamily="34" charset="-120"/>
                         </a:rPr>
                         <a:t>由序列变化判断排序方法，排序过程辨认</a:t>
                       </a:r>
                       <a:endParaRPr lang="en-US" sz="1500" dirty="0">
-                        <a:latin typeface="微软雅黑" charset="0"/>
-                        <a:ea typeface="微软雅黑" charset="0"/>
-                        <a:cs typeface="微软雅黑" charset="0"/>
+                        <a:latin typeface="微软雅黑" panose="020B0503020204020204" pitchFamily="34" charset="-122"/>
+                        <a:ea typeface="微软雅黑" panose="020B0503020204020204" pitchFamily="34" charset="-122"/>
+                        <a:cs typeface="微软雅黑" panose="020B0503020204020204" pitchFamily="34" charset="-122"/>
                       </a:endParaRPr>
                     </a:p>
                   </a:txBody>
-                  <a:tcPr marL="91440" marR="91440" marT="45720" marB="45720" anchor="ctr">
+                  <a:tcPr anchor="ctr">
                     <a:lnL w="9525" cap="flat" cmpd="sng" algn="ctr">
                       <a:solidFill>
                         <a:srgbClr val="D8DBE0"/>
@@ -4751,7 +4640,7 @@
 
 <file path=ppt/slides/slide4.xml><?xml version="1.0" encoding="utf-8"?>
 <p:sld xmlns:a="http://schemas.openxmlformats.org/drawingml/2006/main" xmlns:r="http://schemas.openxmlformats.org/officeDocument/2006/relationships" xmlns:p="http://schemas.openxmlformats.org/presentationml/2006/main">
-  <p:cSld name="Slide 4">
+  <p:cSld>
     <p:bg>
       <p:bgPr>
         <a:blipFill dpi="0" rotWithShape="1">
@@ -4795,13 +4684,12 @@
             <a:avLst/>
           </a:prstGeom>
           <a:noFill/>
-          <a:ln/>
         </p:spPr>
         <p:txBody>
           <a:bodyPr wrap="square" rtlCol="0" anchor="ctr"/>
           <a:lstStyle/>
           <a:p>
-            <a:pPr algn="r" indent="0" marL="0">
+            <a:pPr marL="0" indent="0" algn="r">
               <a:buNone/>
             </a:pPr>
             <a:r>
@@ -4809,9 +4697,9 @@
                 <a:solidFill>
                   <a:srgbClr val="8A9099"/>
                 </a:solidFill>
-                <a:latin typeface="微软雅黑" pitchFamily="34" charset="0"/>
-                <a:ea typeface="微软雅黑" pitchFamily="34" charset="-122"/>
-                <a:cs typeface="微软雅黑" pitchFamily="34" charset="-120"/>
+                <a:latin typeface="微软雅黑" panose="020B0503020204020204" pitchFamily="34" charset="-122"/>
+                <a:ea typeface="微软雅黑" panose="020B0503020204020204" pitchFamily="34" charset="-122"/>
+                <a:cs typeface="微软雅黑" panose="020B0503020204020204" pitchFamily="34" charset="-120"/>
               </a:rPr>
               <a:t>4 / 9</a:t>
             </a:r>
@@ -4834,13 +4722,12 @@
             <a:avLst/>
           </a:prstGeom>
           <a:noFill/>
-          <a:ln/>
         </p:spPr>
         <p:txBody>
           <a:bodyPr wrap="square" rtlCol="0" anchor="ctr"/>
           <a:lstStyle/>
           <a:p>
-            <a:pPr algn="l" indent="0" marL="0">
+            <a:pPr marL="0" indent="0" algn="l">
               <a:buNone/>
             </a:pPr>
             <a:r>
@@ -4848,9 +4735,9 @@
                 <a:solidFill>
                   <a:srgbClr val="1F4E9C"/>
                 </a:solidFill>
-                <a:latin typeface="微软雅黑" pitchFamily="34" charset="0"/>
-                <a:ea typeface="微软雅黑" pitchFamily="34" charset="-122"/>
-                <a:cs typeface="微软雅黑" pitchFamily="34" charset="-120"/>
+                <a:latin typeface="微软雅黑" panose="020B0503020204020204" pitchFamily="34" charset="-122"/>
+                <a:ea typeface="微软雅黑" panose="020B0503020204020204" pitchFamily="34" charset="-122"/>
+                <a:cs typeface="微软雅黑" panose="020B0503020204020204" pitchFamily="34" charset="-120"/>
               </a:rPr>
               <a:t>有价值必做</a:t>
             </a:r>
@@ -4873,13 +4760,12 @@
             <a:avLst/>
           </a:prstGeom>
           <a:noFill/>
-          <a:ln/>
         </p:spPr>
         <p:txBody>
           <a:bodyPr wrap="square" rtlCol="0" anchor="ctr"/>
           <a:lstStyle/>
           <a:p>
-            <a:pPr algn="l" indent="0" marL="0">
+            <a:pPr marL="0" indent="0" algn="l">
               <a:buNone/>
             </a:pPr>
             <a:r>
@@ -4887,9 +4773,9 @@
                 <a:solidFill>
                   <a:srgbClr val="1F2329"/>
                 </a:solidFill>
-                <a:latin typeface="微软雅黑" pitchFamily="34" charset="0"/>
-                <a:ea typeface="微软雅黑" pitchFamily="34" charset="-122"/>
-                <a:cs typeface="微软雅黑" pitchFamily="34" charset="-120"/>
+                <a:latin typeface="微软雅黑" panose="020B0503020204020204" pitchFamily="34" charset="-122"/>
+                <a:ea typeface="微软雅黑" panose="020B0503020204020204" pitchFamily="34" charset="-122"/>
+                <a:cs typeface="微软雅黑" panose="020B0503020204020204" pitchFamily="34" charset="-120"/>
               </a:rPr>
               <a:t>必做题（2/4）</a:t>
             </a:r>
@@ -4903,17 +4789,11 @@
           <p:cNvGraphicFramePr>
             <a:graphicFrameLocks noGrp="1"/>
           </p:cNvGraphicFramePr>
-          <p:nvPr>
-            <p:extLst>
-              <p:ext uri="{D42A27DB-BD31-4B8C-83A1-F6EECF244321}">
-                <p14:modId xmlns:p14="http://schemas.microsoft.com/office/powerpoint/2010/main" val="1579011935"/>
-              </p:ext>
-            </p:extLst>
-          </p:nvPr>
+          <p:nvPr/>
         </p:nvGraphicFramePr>
         <p:xfrm>
           <a:off x="822960" y="2395728"/>
-          <a:ext cx="10545775" cy="914400"/>
+          <a:ext cx="10545775" cy="2944368"/>
         </p:xfrm>
         <a:graphic>
           <a:graphicData uri="http://schemas.openxmlformats.org/drawingml/2006/table">
@@ -4930,7 +4810,7 @@
                     <a:bodyPr/>
                     <a:lstStyle/>
                     <a:p>
-                      <a:pPr algn="l" indent="0" marL="0">
+                      <a:pPr marL="0" indent="0" algn="l">
                         <a:buNone/>
                       </a:pPr>
                       <a:r>
@@ -4938,20 +4818,20 @@
                           <a:solidFill>
                             <a:srgbClr val="1F4E9C"/>
                           </a:solidFill>
-                          <a:latin typeface="微软雅黑" pitchFamily="34" charset="0"/>
-                          <a:ea typeface="微软雅黑" pitchFamily="34" charset="-122"/>
-                          <a:cs typeface="微软雅黑" pitchFamily="34" charset="-120"/>
+                          <a:latin typeface="微软雅黑" panose="020B0503020204020204" pitchFamily="34" charset="-122"/>
+                          <a:ea typeface="微软雅黑" panose="020B0503020204020204" pitchFamily="34" charset="-122"/>
+                          <a:cs typeface="微软雅黑" panose="020B0503020204020204" pitchFamily="34" charset="-120"/>
                         </a:rPr>
                         <a:t>题号</a:t>
                       </a:r>
                       <a:endParaRPr lang="en-US" sz="1500" dirty="0">
-                        <a:latin typeface="微软雅黑" charset="0"/>
-                        <a:ea typeface="微软雅黑" charset="0"/>
-                        <a:cs typeface="微软雅黑" charset="0"/>
+                        <a:latin typeface="微软雅黑" panose="020B0503020204020204" pitchFamily="34" charset="-122"/>
+                        <a:ea typeface="微软雅黑" panose="020B0503020204020204" pitchFamily="34" charset="-122"/>
+                        <a:cs typeface="微软雅黑" panose="020B0503020204020204" pitchFamily="34" charset="-122"/>
                       </a:endParaRPr>
                     </a:p>
                   </a:txBody>
-                  <a:tcPr marL="91440" marR="91440" marT="45720" marB="45720" anchor="ctr">
+                  <a:tcPr anchor="ctr">
                     <a:lnL w="9525" cap="flat" cmpd="sng" algn="ctr">
                       <a:solidFill>
                         <a:srgbClr val="D8DBE0"/>
@@ -4998,7 +4878,7 @@
                     <a:bodyPr/>
                     <a:lstStyle/>
                     <a:p>
-                      <a:pPr algn="l" indent="0" marL="0">
+                      <a:pPr marL="0" indent="0" algn="l">
                         <a:buNone/>
                       </a:pPr>
                       <a:r>
@@ -5006,20 +4886,20 @@
                           <a:solidFill>
                             <a:srgbClr val="1F4E9C"/>
                           </a:solidFill>
-                          <a:latin typeface="微软雅黑" pitchFamily="34" charset="0"/>
-                          <a:ea typeface="微软雅黑" pitchFamily="34" charset="-122"/>
-                          <a:cs typeface="微软雅黑" pitchFamily="34" charset="-120"/>
+                          <a:latin typeface="微软雅黑" panose="020B0503020204020204" pitchFamily="34" charset="-122"/>
+                          <a:ea typeface="微软雅黑" panose="020B0503020204020204" pitchFamily="34" charset="-122"/>
+                          <a:cs typeface="微软雅黑" panose="020B0503020204020204" pitchFamily="34" charset="-120"/>
                         </a:rPr>
                         <a:t>考点</a:t>
                       </a:r>
                       <a:endParaRPr lang="en-US" sz="1500" dirty="0">
-                        <a:latin typeface="微软雅黑" charset="0"/>
-                        <a:ea typeface="微软雅黑" charset="0"/>
-                        <a:cs typeface="微软雅黑" charset="0"/>
+                        <a:latin typeface="微软雅黑" panose="020B0503020204020204" pitchFamily="34" charset="-122"/>
+                        <a:ea typeface="微软雅黑" panose="020B0503020204020204" pitchFamily="34" charset="-122"/>
+                        <a:cs typeface="微软雅黑" panose="020B0503020204020204" pitchFamily="34" charset="-122"/>
                       </a:endParaRPr>
                     </a:p>
                   </a:txBody>
-                  <a:tcPr marL="91440" marR="91440" marT="45720" marB="45720" anchor="ctr">
+                  <a:tcPr anchor="ctr">
                     <a:lnL w="9525" cap="flat" cmpd="sng" algn="ctr">
                       <a:solidFill>
                         <a:srgbClr val="D8DBE0"/>
@@ -5066,7 +4946,7 @@
                     <a:bodyPr/>
                     <a:lstStyle/>
                     <a:p>
-                      <a:pPr algn="l" indent="0" marL="0">
+                      <a:pPr marL="0" indent="0" algn="l">
                         <a:buNone/>
                       </a:pPr>
                       <a:r>
@@ -5074,20 +4954,20 @@
                           <a:solidFill>
                             <a:srgbClr val="1F4E9C"/>
                           </a:solidFill>
-                          <a:latin typeface="微软雅黑" pitchFamily="34" charset="0"/>
-                          <a:ea typeface="微软雅黑" pitchFamily="34" charset="-122"/>
-                          <a:cs typeface="微软雅黑" pitchFamily="34" charset="-120"/>
+                          <a:latin typeface="微软雅黑" panose="020B0503020204020204" pitchFamily="34" charset="-122"/>
+                          <a:ea typeface="微软雅黑" panose="020B0503020204020204" pitchFamily="34" charset="-122"/>
+                          <a:cs typeface="微软雅黑" panose="020B0503020204020204" pitchFamily="34" charset="-120"/>
                         </a:rPr>
                         <a:t>价值</a:t>
                       </a:r>
                       <a:endParaRPr lang="en-US" sz="1500" dirty="0">
-                        <a:latin typeface="微软雅黑" charset="0"/>
-                        <a:ea typeface="微软雅黑" charset="0"/>
-                        <a:cs typeface="微软雅黑" charset="0"/>
+                        <a:latin typeface="微软雅黑" panose="020B0503020204020204" pitchFamily="34" charset="-122"/>
+                        <a:ea typeface="微软雅黑" panose="020B0503020204020204" pitchFamily="34" charset="-122"/>
+                        <a:cs typeface="微软雅黑" panose="020B0503020204020204" pitchFamily="34" charset="-122"/>
                       </a:endParaRPr>
                     </a:p>
                   </a:txBody>
-                  <a:tcPr marL="91440" marR="91440" marT="45720" marB="45720" anchor="ctr">
+                  <a:tcPr anchor="ctr">
                     <a:lnL w="9525" cap="flat" cmpd="sng" algn="ctr">
                       <a:solidFill>
                         <a:srgbClr val="D8DBE0"/>
@@ -5136,7 +5016,7 @@
                     <a:bodyPr/>
                     <a:lstStyle/>
                     <a:p>
-                      <a:pPr algn="l" indent="0" marL="0">
+                      <a:pPr marL="0" indent="0" algn="l">
                         <a:buNone/>
                       </a:pPr>
                       <a:r>
@@ -5144,20 +5024,20 @@
                           <a:solidFill>
                             <a:srgbClr val="1F2329"/>
                           </a:solidFill>
-                          <a:latin typeface="微软雅黑" pitchFamily="34" charset="0"/>
-                          <a:ea typeface="微软雅黑" pitchFamily="34" charset="-122"/>
-                          <a:cs typeface="微软雅黑" pitchFamily="34" charset="-120"/>
+                          <a:latin typeface="微软雅黑" panose="020B0503020204020204" pitchFamily="34" charset="-122"/>
+                          <a:ea typeface="微软雅黑" panose="020B0503020204020204" pitchFamily="34" charset="-122"/>
+                          <a:cs typeface="微软雅黑" panose="020B0503020204020204" pitchFamily="34" charset="-120"/>
                         </a:rPr>
                         <a:t>10选25</a:t>
                       </a:r>
                       <a:endParaRPr lang="en-US" sz="1500" dirty="0">
-                        <a:latin typeface="微软雅黑" charset="0"/>
-                        <a:ea typeface="微软雅黑" charset="0"/>
-                        <a:cs typeface="微软雅黑" charset="0"/>
+                        <a:latin typeface="微软雅黑" panose="020B0503020204020204" pitchFamily="34" charset="-122"/>
+                        <a:ea typeface="微软雅黑" panose="020B0503020204020204" pitchFamily="34" charset="-122"/>
+                        <a:cs typeface="微软雅黑" panose="020B0503020204020204" pitchFamily="34" charset="-122"/>
                       </a:endParaRPr>
                     </a:p>
                   </a:txBody>
-                  <a:tcPr marL="91440" marR="91440" marT="45720" marB="45720" anchor="ctr">
+                  <a:tcPr anchor="ctr">
                     <a:lnL w="9525" cap="flat" cmpd="sng" algn="ctr">
                       <a:solidFill>
                         <a:srgbClr val="D8DBE0"/>
@@ -5204,7 +5084,7 @@
                     <a:bodyPr/>
                     <a:lstStyle/>
                     <a:p>
-                      <a:pPr algn="l" indent="0" marL="0">
+                      <a:pPr marL="0" indent="0" algn="l">
                         <a:buNone/>
                       </a:pPr>
                       <a:r>
@@ -5212,20 +5092,20 @@
                           <a:solidFill>
                             <a:srgbClr val="1F2329"/>
                           </a:solidFill>
-                          <a:latin typeface="微软雅黑" pitchFamily="34" charset="0"/>
-                          <a:ea typeface="微软雅黑" pitchFamily="34" charset="-122"/>
-                          <a:cs typeface="微软雅黑" pitchFamily="34" charset="-120"/>
+                          <a:latin typeface="微软雅黑" panose="020B0503020204020204" pitchFamily="34" charset="-122"/>
+                          <a:ea typeface="微软雅黑" panose="020B0503020204020204" pitchFamily="34" charset="-122"/>
+                          <a:cs typeface="微软雅黑" panose="020B0503020204020204" pitchFamily="34" charset="-120"/>
                         </a:rPr>
                         <a:t>希尔一趟手算</a:t>
                       </a:r>
                       <a:endParaRPr lang="en-US" sz="1500" dirty="0">
-                        <a:latin typeface="微软雅黑" charset="0"/>
-                        <a:ea typeface="微软雅黑" charset="0"/>
-                        <a:cs typeface="微软雅黑" charset="0"/>
+                        <a:latin typeface="微软雅黑" panose="020B0503020204020204" pitchFamily="34" charset="-122"/>
+                        <a:ea typeface="微软雅黑" panose="020B0503020204020204" pitchFamily="34" charset="-122"/>
+                        <a:cs typeface="微软雅黑" panose="020B0503020204020204" pitchFamily="34" charset="-122"/>
                       </a:endParaRPr>
                     </a:p>
                   </a:txBody>
-                  <a:tcPr marL="91440" marR="91440" marT="45720" marB="45720" anchor="ctr">
+                  <a:tcPr anchor="ctr">
                     <a:lnL w="9525" cap="flat" cmpd="sng" algn="ctr">
                       <a:solidFill>
                         <a:srgbClr val="D8DBE0"/>
@@ -5272,7 +5152,7 @@
                     <a:bodyPr/>
                     <a:lstStyle/>
                     <a:p>
-                      <a:pPr algn="l" indent="0" marL="0">
+                      <a:pPr marL="0" indent="0" algn="l">
                         <a:buNone/>
                       </a:pPr>
                       <a:r>
@@ -5280,20 +5160,20 @@
                           <a:solidFill>
                             <a:srgbClr val="1F2329"/>
                           </a:solidFill>
-                          <a:latin typeface="微软雅黑" pitchFamily="34" charset="0"/>
-                          <a:ea typeface="微软雅黑" pitchFamily="34" charset="-122"/>
-                          <a:cs typeface="微软雅黑" pitchFamily="34" charset="-120"/>
+                          <a:latin typeface="微软雅黑" panose="020B0503020204020204" pitchFamily="34" charset="-122"/>
+                          <a:ea typeface="微软雅黑" panose="020B0503020204020204" pitchFamily="34" charset="-122"/>
+                          <a:cs typeface="微软雅黑" panose="020B0503020204020204" pitchFamily="34" charset="-120"/>
                         </a:rPr>
                         <a:t>增量3一趟结果，2024综合1(2)原题形态</a:t>
                       </a:r>
                       <a:endParaRPr lang="en-US" sz="1500" dirty="0">
-                        <a:latin typeface="微软雅黑" charset="0"/>
-                        <a:ea typeface="微软雅黑" charset="0"/>
-                        <a:cs typeface="微软雅黑" charset="0"/>
+                        <a:latin typeface="微软雅黑" panose="020B0503020204020204" pitchFamily="34" charset="-122"/>
+                        <a:ea typeface="微软雅黑" panose="020B0503020204020204" pitchFamily="34" charset="-122"/>
+                        <a:cs typeface="微软雅黑" panose="020B0503020204020204" pitchFamily="34" charset="-122"/>
                       </a:endParaRPr>
                     </a:p>
                   </a:txBody>
-                  <a:tcPr marL="91440" marR="91440" marT="45720" marB="45720" anchor="ctr">
+                  <a:tcPr anchor="ctr">
                     <a:lnL w="9525" cap="flat" cmpd="sng" algn="ctr">
                       <a:solidFill>
                         <a:srgbClr val="D8DBE0"/>
@@ -5342,7 +5222,7 @@
                     <a:bodyPr/>
                     <a:lstStyle/>
                     <a:p>
-                      <a:pPr algn="l" indent="0" marL="0">
+                      <a:pPr marL="0" indent="0" algn="l">
                         <a:buNone/>
                       </a:pPr>
                       <a:r>
@@ -5350,20 +5230,20 @@
                           <a:solidFill>
                             <a:srgbClr val="1F2329"/>
                           </a:solidFill>
-                          <a:latin typeface="微软雅黑" pitchFamily="34" charset="0"/>
-                          <a:ea typeface="微软雅黑" pitchFamily="34" charset="-122"/>
-                          <a:cs typeface="微软雅黑" pitchFamily="34" charset="-120"/>
+                          <a:latin typeface="微软雅黑" panose="020B0503020204020204" pitchFamily="34" charset="-122"/>
+                          <a:ea typeface="微软雅黑" panose="020B0503020204020204" pitchFamily="34" charset="-122"/>
+                          <a:cs typeface="微软雅黑" panose="020B0503020204020204" pitchFamily="34" charset="-120"/>
                         </a:rPr>
                         <a:t>10选27</a:t>
                       </a:r>
                       <a:endParaRPr lang="en-US" sz="1500" dirty="0">
-                        <a:latin typeface="微软雅黑" charset="0"/>
-                        <a:ea typeface="微软雅黑" charset="0"/>
-                        <a:cs typeface="微软雅黑" charset="0"/>
+                        <a:latin typeface="微软雅黑" panose="020B0503020204020204" pitchFamily="34" charset="-122"/>
+                        <a:ea typeface="微软雅黑" panose="020B0503020204020204" pitchFamily="34" charset="-122"/>
+                        <a:cs typeface="微软雅黑" panose="020B0503020204020204" pitchFamily="34" charset="-122"/>
                       </a:endParaRPr>
                     </a:p>
                   </a:txBody>
-                  <a:tcPr marL="91440" marR="91440" marT="45720" marB="45720" anchor="ctr">
+                  <a:tcPr anchor="ctr">
                     <a:lnL w="9525" cap="flat" cmpd="sng" algn="ctr">
                       <a:solidFill>
                         <a:srgbClr val="D8DBE0"/>
@@ -5410,7 +5290,7 @@
                     <a:bodyPr/>
                     <a:lstStyle/>
                     <a:p>
-                      <a:pPr algn="l" indent="0" marL="0">
+                      <a:pPr marL="0" indent="0" algn="l">
                         <a:buNone/>
                       </a:pPr>
                       <a:r>
@@ -5418,20 +5298,20 @@
                           <a:solidFill>
                             <a:srgbClr val="1F2329"/>
                           </a:solidFill>
-                          <a:latin typeface="微软雅黑" pitchFamily="34" charset="0"/>
-                          <a:ea typeface="微软雅黑" pitchFamily="34" charset="-122"/>
-                          <a:cs typeface="微软雅黑" pitchFamily="34" charset="-120"/>
+                          <a:latin typeface="微软雅黑" panose="020B0503020204020204" pitchFamily="34" charset="-122"/>
+                          <a:ea typeface="微软雅黑" panose="020B0503020204020204" pitchFamily="34" charset="-122"/>
+                          <a:cs typeface="微软雅黑" panose="020B0503020204020204" pitchFamily="34" charset="-120"/>
                         </a:rPr>
                         <a:t>第二趟辨排序</a:t>
                       </a:r>
                       <a:endParaRPr lang="en-US" sz="1500" dirty="0">
-                        <a:latin typeface="微软雅黑" charset="0"/>
-                        <a:ea typeface="微软雅黑" charset="0"/>
-                        <a:cs typeface="微软雅黑" charset="0"/>
+                        <a:latin typeface="微软雅黑" panose="020B0503020204020204" pitchFamily="34" charset="-122"/>
+                        <a:ea typeface="微软雅黑" panose="020B0503020204020204" pitchFamily="34" charset="-122"/>
+                        <a:cs typeface="微软雅黑" panose="020B0503020204020204" pitchFamily="34" charset="-122"/>
                       </a:endParaRPr>
                     </a:p>
                   </a:txBody>
-                  <a:tcPr marL="91440" marR="91440" marT="45720" marB="45720" anchor="ctr">
+                  <a:tcPr anchor="ctr">
                     <a:lnL w="9525" cap="flat" cmpd="sng" algn="ctr">
                       <a:solidFill>
                         <a:srgbClr val="D8DBE0"/>
@@ -5478,7 +5358,7 @@
                     <a:bodyPr/>
                     <a:lstStyle/>
                     <a:p>
-                      <a:pPr algn="l" indent="0" marL="0">
+                      <a:pPr marL="0" indent="0" algn="l">
                         <a:buNone/>
                       </a:pPr>
                       <a:r>
@@ -5486,20 +5366,20 @@
                           <a:solidFill>
                             <a:srgbClr val="1F2329"/>
                           </a:solidFill>
-                          <a:latin typeface="微软雅黑" pitchFamily="34" charset="0"/>
-                          <a:ea typeface="微软雅黑" pitchFamily="34" charset="-122"/>
-                          <a:cs typeface="微软雅黑" pitchFamily="34" charset="-120"/>
+                          <a:latin typeface="微软雅黑" panose="020B0503020204020204" pitchFamily="34" charset="-122"/>
+                          <a:ea typeface="微软雅黑" panose="020B0503020204020204" pitchFamily="34" charset="-122"/>
+                          <a:cs typeface="微软雅黑" panose="020B0503020204020204" pitchFamily="34" charset="-120"/>
                         </a:rPr>
                         <a:t>判只能属哪种排序，冒泡/插入/选择过程辨认</a:t>
                       </a:r>
                       <a:endParaRPr lang="en-US" sz="1500" dirty="0">
-                        <a:latin typeface="微软雅黑" charset="0"/>
-                        <a:ea typeface="微软雅黑" charset="0"/>
-                        <a:cs typeface="微软雅黑" charset="0"/>
+                        <a:latin typeface="微软雅黑" panose="020B0503020204020204" pitchFamily="34" charset="-122"/>
+                        <a:ea typeface="微软雅黑" panose="020B0503020204020204" pitchFamily="34" charset="-122"/>
+                        <a:cs typeface="微软雅黑" panose="020B0503020204020204" pitchFamily="34" charset="-122"/>
                       </a:endParaRPr>
                     </a:p>
                   </a:txBody>
-                  <a:tcPr marL="91440" marR="91440" marT="45720" marB="45720" anchor="ctr">
+                  <a:tcPr anchor="ctr">
                     <a:lnL w="9525" cap="flat" cmpd="sng" algn="ctr">
                       <a:solidFill>
                         <a:srgbClr val="D8DBE0"/>
@@ -5548,7 +5428,7 @@
                     <a:bodyPr/>
                     <a:lstStyle/>
                     <a:p>
-                      <a:pPr algn="l" indent="0" marL="0">
+                      <a:pPr marL="0" indent="0" algn="l">
                         <a:buNone/>
                       </a:pPr>
                       <a:r>
@@ -5556,20 +5436,20 @@
                           <a:solidFill>
                             <a:srgbClr val="1F2329"/>
                           </a:solidFill>
-                          <a:latin typeface="微软雅黑" pitchFamily="34" charset="0"/>
-                          <a:ea typeface="微软雅黑" pitchFamily="34" charset="-122"/>
-                          <a:cs typeface="微软雅黑" pitchFamily="34" charset="-120"/>
+                          <a:latin typeface="微软雅黑" panose="020B0503020204020204" pitchFamily="34" charset="-122"/>
+                          <a:ea typeface="微软雅黑" panose="020B0503020204020204" pitchFamily="34" charset="-122"/>
+                          <a:cs typeface="微软雅黑" panose="020B0503020204020204" pitchFamily="34" charset="-120"/>
                         </a:rPr>
                         <a:t>10选29</a:t>
                       </a:r>
                       <a:endParaRPr lang="en-US" sz="1500" dirty="0">
-                        <a:latin typeface="微软雅黑" charset="0"/>
-                        <a:ea typeface="微软雅黑" charset="0"/>
-                        <a:cs typeface="微软雅黑" charset="0"/>
+                        <a:latin typeface="微软雅黑" panose="020B0503020204020204" pitchFamily="34" charset="-122"/>
+                        <a:ea typeface="微软雅黑" panose="020B0503020204020204" pitchFamily="34" charset="-122"/>
+                        <a:cs typeface="微软雅黑" panose="020B0503020204020204" pitchFamily="34" charset="-122"/>
                       </a:endParaRPr>
                     </a:p>
                   </a:txBody>
-                  <a:tcPr marL="91440" marR="91440" marT="45720" marB="45720" anchor="ctr">
+                  <a:tcPr anchor="ctr">
                     <a:lnL w="9525" cap="flat" cmpd="sng" algn="ctr">
                       <a:solidFill>
                         <a:srgbClr val="D8DBE0"/>
@@ -5616,7 +5496,7 @@
                     <a:bodyPr/>
                     <a:lstStyle/>
                     <a:p>
-                      <a:pPr algn="l" indent="0" marL="0">
+                      <a:pPr marL="0" indent="0" algn="l">
                         <a:buNone/>
                       </a:pPr>
                       <a:r>
@@ -5624,20 +5504,20 @@
                           <a:solidFill>
                             <a:srgbClr val="1F2329"/>
                           </a:solidFill>
-                          <a:latin typeface="微软雅黑" pitchFamily="34" charset="0"/>
-                          <a:ea typeface="微软雅黑" pitchFamily="34" charset="-122"/>
-                          <a:cs typeface="微软雅黑" pitchFamily="34" charset="-120"/>
+                          <a:latin typeface="微软雅黑" panose="020B0503020204020204" pitchFamily="34" charset="-122"/>
+                          <a:ea typeface="微软雅黑" panose="020B0503020204020204" pitchFamily="34" charset="-122"/>
+                          <a:cs typeface="微软雅黑" panose="020B0503020204020204" pitchFamily="34" charset="-120"/>
                         </a:rPr>
                         <a:t>快排一次划分</a:t>
                       </a:r>
                       <a:endParaRPr lang="en-US" sz="1500" dirty="0">
-                        <a:latin typeface="微软雅黑" charset="0"/>
-                        <a:ea typeface="微软雅黑" charset="0"/>
-                        <a:cs typeface="微软雅黑" charset="0"/>
+                        <a:latin typeface="微软雅黑" panose="020B0503020204020204" pitchFamily="34" charset="-122"/>
+                        <a:ea typeface="微软雅黑" panose="020B0503020204020204" pitchFamily="34" charset="-122"/>
+                        <a:cs typeface="微软雅黑" panose="020B0503020204020204" pitchFamily="34" charset="-122"/>
                       </a:endParaRPr>
                     </a:p>
                   </a:txBody>
-                  <a:tcPr marL="91440" marR="91440" marT="45720" marB="45720" anchor="ctr">
+                  <a:tcPr anchor="ctr">
                     <a:lnL w="9525" cap="flat" cmpd="sng" algn="ctr">
                       <a:solidFill>
                         <a:srgbClr val="D8DBE0"/>
@@ -5684,7 +5564,7 @@
                     <a:bodyPr/>
                     <a:lstStyle/>
                     <a:p>
-                      <a:pPr algn="l" indent="0" marL="0">
+                      <a:pPr marL="0" indent="0" algn="l">
                         <a:buNone/>
                       </a:pPr>
                       <a:r>
@@ -5692,20 +5572,20 @@
                           <a:solidFill>
                             <a:srgbClr val="1F2329"/>
                           </a:solidFill>
-                          <a:latin typeface="微软雅黑" pitchFamily="34" charset="0"/>
-                          <a:ea typeface="微软雅黑" pitchFamily="34" charset="-122"/>
-                          <a:cs typeface="微软雅黑" pitchFamily="34" charset="-120"/>
+                          <a:latin typeface="微软雅黑" panose="020B0503020204020204" pitchFamily="34" charset="-122"/>
+                          <a:ea typeface="微软雅黑" panose="020B0503020204020204" pitchFamily="34" charset="-122"/>
+                          <a:cs typeface="微软雅黑" panose="020B0503020204020204" pitchFamily="34" charset="-120"/>
                         </a:rPr>
                         <a:t>以5为枢轴的划分结果，2024综合1(3)原题形态</a:t>
                       </a:r>
                       <a:endParaRPr lang="en-US" sz="1500" dirty="0">
-                        <a:latin typeface="微软雅黑" charset="0"/>
-                        <a:ea typeface="微软雅黑" charset="0"/>
-                        <a:cs typeface="微软雅黑" charset="0"/>
+                        <a:latin typeface="微软雅黑" panose="020B0503020204020204" pitchFamily="34" charset="-122"/>
+                        <a:ea typeface="微软雅黑" panose="020B0503020204020204" pitchFamily="34" charset="-122"/>
+                        <a:cs typeface="微软雅黑" panose="020B0503020204020204" pitchFamily="34" charset="-122"/>
                       </a:endParaRPr>
                     </a:p>
                   </a:txBody>
-                  <a:tcPr marL="91440" marR="91440" marT="45720" marB="45720" anchor="ctr">
+                  <a:tcPr anchor="ctr">
                     <a:lnL w="9525" cap="flat" cmpd="sng" algn="ctr">
                       <a:solidFill>
                         <a:srgbClr val="D8DBE0"/>
@@ -5754,7 +5634,7 @@
                     <a:bodyPr/>
                     <a:lstStyle/>
                     <a:p>
-                      <a:pPr algn="l" indent="0" marL="0">
+                      <a:pPr marL="0" indent="0" algn="l">
                         <a:buNone/>
                       </a:pPr>
                       <a:r>
@@ -5762,20 +5642,20 @@
                           <a:solidFill>
                             <a:srgbClr val="1F2329"/>
                           </a:solidFill>
-                          <a:latin typeface="微软雅黑" pitchFamily="34" charset="0"/>
-                          <a:ea typeface="微软雅黑" pitchFamily="34" charset="-122"/>
-                          <a:cs typeface="微软雅黑" pitchFamily="34" charset="-120"/>
+                          <a:latin typeface="微软雅黑" panose="020B0503020204020204" pitchFamily="34" charset="-122"/>
+                          <a:ea typeface="微软雅黑" panose="020B0503020204020204" pitchFamily="34" charset="-122"/>
+                          <a:cs typeface="微软雅黑" panose="020B0503020204020204" pitchFamily="34" charset="-120"/>
                         </a:rPr>
                         <a:t>10选30</a:t>
                       </a:r>
                       <a:endParaRPr lang="en-US" sz="1500" dirty="0">
-                        <a:latin typeface="微软雅黑" charset="0"/>
-                        <a:ea typeface="微软雅黑" charset="0"/>
-                        <a:cs typeface="微软雅黑" charset="0"/>
+                        <a:latin typeface="微软雅黑" panose="020B0503020204020204" pitchFamily="34" charset="-122"/>
+                        <a:ea typeface="微软雅黑" panose="020B0503020204020204" pitchFamily="34" charset="-122"/>
+                        <a:cs typeface="微软雅黑" panose="020B0503020204020204" pitchFamily="34" charset="-122"/>
                       </a:endParaRPr>
                     </a:p>
                   </a:txBody>
-                  <a:tcPr marL="91440" marR="91440" marT="45720" marB="45720" anchor="ctr">
+                  <a:tcPr anchor="ctr">
                     <a:lnL w="9525" cap="flat" cmpd="sng" algn="ctr">
                       <a:solidFill>
                         <a:srgbClr val="D8DBE0"/>
@@ -5822,7 +5702,7 @@
                     <a:bodyPr/>
                     <a:lstStyle/>
                     <a:p>
-                      <a:pPr algn="l" indent="0" marL="0">
+                      <a:pPr marL="0" indent="0" algn="l">
                         <a:buNone/>
                       </a:pPr>
                       <a:r>
@@ -5830,20 +5710,20 @@
                           <a:solidFill>
                             <a:srgbClr val="1F2329"/>
                           </a:solidFill>
-                          <a:latin typeface="微软雅黑" pitchFamily="34" charset="0"/>
-                          <a:ea typeface="微软雅黑" pitchFamily="34" charset="-122"/>
-                          <a:cs typeface="微软雅黑" pitchFamily="34" charset="-120"/>
+                          <a:latin typeface="微软雅黑" panose="020B0503020204020204" pitchFamily="34" charset="-122"/>
+                          <a:ea typeface="微软雅黑" panose="020B0503020204020204" pitchFamily="34" charset="-122"/>
+                          <a:cs typeface="微软雅黑" panose="020B0503020204020204" pitchFamily="34" charset="-120"/>
                         </a:rPr>
                         <a:t>小根堆插入调整</a:t>
                       </a:r>
                       <a:endParaRPr lang="en-US" sz="1500" dirty="0">
-                        <a:latin typeface="微软雅黑" charset="0"/>
-                        <a:ea typeface="微软雅黑" charset="0"/>
-                        <a:cs typeface="微软雅黑" charset="0"/>
+                        <a:latin typeface="微软雅黑" panose="020B0503020204020204" pitchFamily="34" charset="-122"/>
+                        <a:ea typeface="微软雅黑" panose="020B0503020204020204" pitchFamily="34" charset="-122"/>
+                        <a:cs typeface="微软雅黑" panose="020B0503020204020204" pitchFamily="34" charset="-122"/>
                       </a:endParaRPr>
                     </a:p>
                   </a:txBody>
-                  <a:tcPr marL="91440" marR="91440" marT="45720" marB="45720" anchor="ctr">
+                  <a:tcPr anchor="ctr">
                     <a:lnL w="9525" cap="flat" cmpd="sng" algn="ctr">
                       <a:solidFill>
                         <a:srgbClr val="D8DBE0"/>
@@ -5890,7 +5770,7 @@
                     <a:bodyPr/>
                     <a:lstStyle/>
                     <a:p>
-                      <a:pPr algn="l" indent="0" marL="0">
+                      <a:pPr marL="0" indent="0" algn="l">
                         <a:buNone/>
                       </a:pPr>
                       <a:r>
@@ -5898,20 +5778,20 @@
                           <a:solidFill>
                             <a:srgbClr val="1F2329"/>
                           </a:solidFill>
-                          <a:latin typeface="微软雅黑" pitchFamily="34" charset="0"/>
-                          <a:ea typeface="微软雅黑" pitchFamily="34" charset="-122"/>
-                          <a:cs typeface="微软雅黑" pitchFamily="34" charset="-120"/>
+                          <a:latin typeface="微软雅黑" panose="020B0503020204020204" pitchFamily="34" charset="-122"/>
+                          <a:ea typeface="微软雅黑" panose="020B0503020204020204" pitchFamily="34" charset="-122"/>
+                          <a:cs typeface="微软雅黑" panose="020B0503020204020204" pitchFamily="34" charset="-120"/>
                         </a:rPr>
                         <a:t>插3后小根堆形态，2025填10原题</a:t>
                       </a:r>
                       <a:endParaRPr lang="en-US" sz="1500" dirty="0">
-                        <a:latin typeface="微软雅黑" charset="0"/>
-                        <a:ea typeface="微软雅黑" charset="0"/>
-                        <a:cs typeface="微软雅黑" charset="0"/>
+                        <a:latin typeface="微软雅黑" panose="020B0503020204020204" pitchFamily="34" charset="-122"/>
+                        <a:ea typeface="微软雅黑" panose="020B0503020204020204" pitchFamily="34" charset="-122"/>
+                        <a:cs typeface="微软雅黑" panose="020B0503020204020204" pitchFamily="34" charset="-122"/>
                       </a:endParaRPr>
                     </a:p>
                   </a:txBody>
-                  <a:tcPr marL="91440" marR="91440" marT="45720" marB="45720" anchor="ctr">
+                  <a:tcPr anchor="ctr">
                     <a:lnL w="9525" cap="flat" cmpd="sng" algn="ctr">
                       <a:solidFill>
                         <a:srgbClr val="D8DBE0"/>
@@ -5960,7 +5840,7 @@
                     <a:bodyPr/>
                     <a:lstStyle/>
                     <a:p>
-                      <a:pPr algn="l" indent="0" marL="0">
+                      <a:pPr marL="0" indent="0" algn="l">
                         <a:buNone/>
                       </a:pPr>
                       <a:r>
@@ -5968,20 +5848,20 @@
                           <a:solidFill>
                             <a:srgbClr val="1F2329"/>
                           </a:solidFill>
-                          <a:latin typeface="微软雅黑" pitchFamily="34" charset="0"/>
-                          <a:ea typeface="微软雅黑" pitchFamily="34" charset="-122"/>
-                          <a:cs typeface="微软雅黑" pitchFamily="34" charset="-120"/>
+                          <a:latin typeface="微软雅黑" panose="020B0503020204020204" pitchFamily="34" charset="-122"/>
+                          <a:ea typeface="微软雅黑" panose="020B0503020204020204" pitchFamily="34" charset="-122"/>
+                          <a:cs typeface="微软雅黑" panose="020B0503020204020204" pitchFamily="34" charset="-120"/>
                         </a:rPr>
                         <a:t>10选31</a:t>
                       </a:r>
                       <a:endParaRPr lang="en-US" sz="1500" dirty="0">
-                        <a:latin typeface="微软雅黑" charset="0"/>
-                        <a:ea typeface="微软雅黑" charset="0"/>
-                        <a:cs typeface="微软雅黑" charset="0"/>
+                        <a:latin typeface="微软雅黑" panose="020B0503020204020204" pitchFamily="34" charset="-122"/>
+                        <a:ea typeface="微软雅黑" panose="020B0503020204020204" pitchFamily="34" charset="-122"/>
+                        <a:cs typeface="微软雅黑" panose="020B0503020204020204" pitchFamily="34" charset="-122"/>
                       </a:endParaRPr>
                     </a:p>
                   </a:txBody>
-                  <a:tcPr marL="91440" marR="91440" marT="45720" marB="45720" anchor="ctr">
+                  <a:tcPr anchor="ctr">
                     <a:lnL w="9525" cap="flat" cmpd="sng" algn="ctr">
                       <a:solidFill>
                         <a:srgbClr val="D8DBE0"/>
@@ -6028,7 +5908,7 @@
                     <a:bodyPr/>
                     <a:lstStyle/>
                     <a:p>
-                      <a:pPr algn="l" indent="0" marL="0">
+                      <a:pPr marL="0" indent="0" algn="l">
                         <a:buNone/>
                       </a:pPr>
                       <a:r>
@@ -6036,20 +5916,20 @@
                           <a:solidFill>
                             <a:srgbClr val="1F2329"/>
                           </a:solidFill>
-                          <a:latin typeface="微软雅黑" pitchFamily="34" charset="0"/>
-                          <a:ea typeface="微软雅黑" pitchFamily="34" charset="-122"/>
-                          <a:cs typeface="微软雅黑" pitchFamily="34" charset="-120"/>
+                          <a:latin typeface="微软雅黑" panose="020B0503020204020204" pitchFamily="34" charset="-122"/>
+                          <a:ea typeface="微软雅黑" panose="020B0503020204020204" pitchFamily="34" charset="-122"/>
+                          <a:cs typeface="微软雅黑" panose="020B0503020204020204" pitchFamily="34" charset="-120"/>
                         </a:rPr>
                         <a:t>建堆过程</a:t>
                       </a:r>
                       <a:endParaRPr lang="en-US" sz="1500" dirty="0">
-                        <a:latin typeface="微软雅黑" charset="0"/>
-                        <a:ea typeface="微软雅黑" charset="0"/>
-                        <a:cs typeface="微软雅黑" charset="0"/>
+                        <a:latin typeface="微软雅黑" panose="020B0503020204020204" pitchFamily="34" charset="-122"/>
+                        <a:ea typeface="微软雅黑" panose="020B0503020204020204" pitchFamily="34" charset="-122"/>
+                        <a:cs typeface="微软雅黑" panose="020B0503020204020204" pitchFamily="34" charset="-122"/>
                       </a:endParaRPr>
                     </a:p>
                   </a:txBody>
-                  <a:tcPr marL="91440" marR="91440" marT="45720" marB="45720" anchor="ctr">
+                  <a:tcPr anchor="ctr">
                     <a:lnL w="9525" cap="flat" cmpd="sng" algn="ctr">
                       <a:solidFill>
                         <a:srgbClr val="D8DBE0"/>
@@ -6096,7 +5976,7 @@
                     <a:bodyPr/>
                     <a:lstStyle/>
                     <a:p>
-                      <a:pPr algn="l" indent="0" marL="0">
+                      <a:pPr marL="0" indent="0" algn="l">
                         <a:buNone/>
                       </a:pPr>
                       <a:r>
@@ -6104,20 +5984,20 @@
                           <a:solidFill>
                             <a:srgbClr val="1F2329"/>
                           </a:solidFill>
-                          <a:latin typeface="微软雅黑" pitchFamily="34" charset="0"/>
-                          <a:ea typeface="微软雅黑" pitchFamily="34" charset="-122"/>
-                          <a:cs typeface="微软雅黑" pitchFamily="34" charset="-120"/>
+                          <a:latin typeface="微软雅黑" panose="020B0503020204020204" pitchFamily="34" charset="-122"/>
+                          <a:ea typeface="微软雅黑" panose="020B0503020204020204" pitchFamily="34" charset="-122"/>
+                          <a:cs typeface="微软雅黑" panose="020B0503020204020204" pitchFamily="34" charset="-120"/>
                         </a:rPr>
                         <a:t>建大根堆序列变化，2024综合1(4)（构造小根堆）同型</a:t>
                       </a:r>
                       <a:endParaRPr lang="en-US" sz="1500" dirty="0">
-                        <a:latin typeface="微软雅黑" charset="0"/>
-                        <a:ea typeface="微软雅黑" charset="0"/>
-                        <a:cs typeface="微软雅黑" charset="0"/>
+                        <a:latin typeface="微软雅黑" panose="020B0503020204020204" pitchFamily="34" charset="-122"/>
+                        <a:ea typeface="微软雅黑" panose="020B0503020204020204" pitchFamily="34" charset="-122"/>
+                        <a:cs typeface="微软雅黑" panose="020B0503020204020204" pitchFamily="34" charset="-122"/>
                       </a:endParaRPr>
                     </a:p>
                   </a:txBody>
-                  <a:tcPr marL="91440" marR="91440" marT="45720" marB="45720" anchor="ctr">
+                  <a:tcPr anchor="ctr">
                     <a:lnL w="9525" cap="flat" cmpd="sng" algn="ctr">
                       <a:solidFill>
                         <a:srgbClr val="D8DBE0"/>
@@ -6166,7 +6046,7 @@
                     <a:bodyPr/>
                     <a:lstStyle/>
                     <a:p>
-                      <a:pPr algn="l" indent="0" marL="0">
+                      <a:pPr marL="0" indent="0" algn="l">
                         <a:buNone/>
                       </a:pPr>
                       <a:r>
@@ -6174,20 +6054,20 @@
                           <a:solidFill>
                             <a:srgbClr val="1F2329"/>
                           </a:solidFill>
-                          <a:latin typeface="微软雅黑" pitchFamily="34" charset="0"/>
-                          <a:ea typeface="微软雅黑" pitchFamily="34" charset="-122"/>
-                          <a:cs typeface="微软雅黑" pitchFamily="34" charset="-120"/>
+                          <a:latin typeface="微软雅黑" panose="020B0503020204020204" pitchFamily="34" charset="-122"/>
+                          <a:ea typeface="微软雅黑" panose="020B0503020204020204" pitchFamily="34" charset="-122"/>
+                          <a:cs typeface="微软雅黑" panose="020B0503020204020204" pitchFamily="34" charset="-120"/>
                         </a:rPr>
                         <a:t>10选32</a:t>
                       </a:r>
                       <a:endParaRPr lang="en-US" sz="1500" dirty="0">
-                        <a:latin typeface="微软雅黑" charset="0"/>
-                        <a:ea typeface="微软雅黑" charset="0"/>
-                        <a:cs typeface="微软雅黑" charset="0"/>
+                        <a:latin typeface="微软雅黑" panose="020B0503020204020204" pitchFamily="34" charset="-122"/>
+                        <a:ea typeface="微软雅黑" panose="020B0503020204020204" pitchFamily="34" charset="-122"/>
+                        <a:cs typeface="微软雅黑" panose="020B0503020204020204" pitchFamily="34" charset="-122"/>
                       </a:endParaRPr>
                     </a:p>
                   </a:txBody>
-                  <a:tcPr marL="91440" marR="91440" marT="45720" marB="45720" anchor="ctr">
+                  <a:tcPr anchor="ctr">
                     <a:lnL w="9525" cap="flat" cmpd="sng" algn="ctr">
                       <a:solidFill>
                         <a:srgbClr val="D8DBE0"/>
@@ -6234,7 +6114,7 @@
                     <a:bodyPr/>
                     <a:lstStyle/>
                     <a:p>
-                      <a:pPr algn="l" indent="0" marL="0">
+                      <a:pPr marL="0" indent="0" algn="l">
                         <a:buNone/>
                       </a:pPr>
                       <a:r>
@@ -6242,20 +6122,20 @@
                           <a:solidFill>
                             <a:srgbClr val="1F2329"/>
                           </a:solidFill>
-                          <a:latin typeface="微软雅黑" pitchFamily="34" charset="0"/>
-                          <a:ea typeface="微软雅黑" pitchFamily="34" charset="-122"/>
-                          <a:cs typeface="微软雅黑" pitchFamily="34" charset="-120"/>
+                          <a:latin typeface="微软雅黑" panose="020B0503020204020204" pitchFamily="34" charset="-122"/>
+                          <a:ea typeface="微软雅黑" panose="020B0503020204020204" pitchFamily="34" charset="-122"/>
+                          <a:cs typeface="微软雅黑" panose="020B0503020204020204" pitchFamily="34" charset="-120"/>
                         </a:rPr>
                         <a:t>归并一趟手算</a:t>
                       </a:r>
                       <a:endParaRPr lang="en-US" sz="1500" dirty="0">
-                        <a:latin typeface="微软雅黑" charset="0"/>
-                        <a:ea typeface="微软雅黑" charset="0"/>
-                        <a:cs typeface="微软雅黑" charset="0"/>
+                        <a:latin typeface="微软雅黑" panose="020B0503020204020204" pitchFamily="34" charset="-122"/>
+                        <a:ea typeface="微软雅黑" panose="020B0503020204020204" pitchFamily="34" charset="-122"/>
+                        <a:cs typeface="微软雅黑" panose="020B0503020204020204" pitchFamily="34" charset="-122"/>
                       </a:endParaRPr>
                     </a:p>
                   </a:txBody>
-                  <a:tcPr marL="91440" marR="91440" marT="45720" marB="45720" anchor="ctr">
+                  <a:tcPr anchor="ctr">
                     <a:lnL w="9525" cap="flat" cmpd="sng" algn="ctr">
                       <a:solidFill>
                         <a:srgbClr val="D8DBE0"/>
@@ -6302,7 +6182,7 @@
                     <a:bodyPr/>
                     <a:lstStyle/>
                     <a:p>
-                      <a:pPr algn="l" indent="0" marL="0">
+                      <a:pPr marL="0" indent="0" algn="l">
                         <a:buNone/>
                       </a:pPr>
                       <a:r>
@@ -6310,20 +6190,20 @@
                           <a:solidFill>
                             <a:srgbClr val="1F2329"/>
                           </a:solidFill>
-                          <a:latin typeface="微软雅黑" pitchFamily="34" charset="0"/>
-                          <a:ea typeface="微软雅黑" pitchFamily="34" charset="-122"/>
-                          <a:cs typeface="微软雅黑" pitchFamily="34" charset="-120"/>
+                          <a:latin typeface="微软雅黑" panose="020B0503020204020204" pitchFamily="34" charset="-122"/>
+                          <a:ea typeface="微软雅黑" panose="020B0503020204020204" pitchFamily="34" charset="-122"/>
+                          <a:cs typeface="微软雅黑" panose="020B0503020204020204" pitchFamily="34" charset="-120"/>
                         </a:rPr>
                         <a:t>相邻有序子列两两归并结果，2022综合22(5)</a:t>
                       </a:r>
                       <a:endParaRPr lang="en-US" sz="1500" dirty="0">
-                        <a:latin typeface="微软雅黑" charset="0"/>
-                        <a:ea typeface="微软雅黑" charset="0"/>
-                        <a:cs typeface="微软雅黑" charset="0"/>
+                        <a:latin typeface="微软雅黑" panose="020B0503020204020204" pitchFamily="34" charset="-122"/>
+                        <a:ea typeface="微软雅黑" panose="020B0503020204020204" pitchFamily="34" charset="-122"/>
+                        <a:cs typeface="微软雅黑" panose="020B0503020204020204" pitchFamily="34" charset="-122"/>
                       </a:endParaRPr>
                     </a:p>
                   </a:txBody>
-                  <a:tcPr marL="91440" marR="91440" marT="45720" marB="45720" anchor="ctr">
+                  <a:tcPr anchor="ctr">
                     <a:lnL w="9525" cap="flat" cmpd="sng" algn="ctr">
                       <a:solidFill>
                         <a:srgbClr val="D8DBE0"/>
@@ -6380,7 +6260,7 @@
 
 <file path=ppt/slides/slide5.xml><?xml version="1.0" encoding="utf-8"?>
 <p:sld xmlns:a="http://schemas.openxmlformats.org/drawingml/2006/main" xmlns:r="http://schemas.openxmlformats.org/officeDocument/2006/relationships" xmlns:p="http://schemas.openxmlformats.org/presentationml/2006/main">
-  <p:cSld name="Slide 5">
+  <p:cSld>
     <p:bg>
       <p:bgPr>
         <a:blipFill dpi="0" rotWithShape="1">
@@ -6424,13 +6304,12 @@
             <a:avLst/>
           </a:prstGeom>
           <a:noFill/>
-          <a:ln/>
         </p:spPr>
         <p:txBody>
           <a:bodyPr wrap="square" rtlCol="0" anchor="ctr"/>
           <a:lstStyle/>
           <a:p>
-            <a:pPr algn="r" indent="0" marL="0">
+            <a:pPr marL="0" indent="0" algn="r">
               <a:buNone/>
             </a:pPr>
             <a:r>
@@ -6438,9 +6317,9 @@
                 <a:solidFill>
                   <a:srgbClr val="8A9099"/>
                 </a:solidFill>
-                <a:latin typeface="微软雅黑" pitchFamily="34" charset="0"/>
-                <a:ea typeface="微软雅黑" pitchFamily="34" charset="-122"/>
-                <a:cs typeface="微软雅黑" pitchFamily="34" charset="-120"/>
+                <a:latin typeface="微软雅黑" panose="020B0503020204020204" pitchFamily="34" charset="-122"/>
+                <a:ea typeface="微软雅黑" panose="020B0503020204020204" pitchFamily="34" charset="-122"/>
+                <a:cs typeface="微软雅黑" panose="020B0503020204020204" pitchFamily="34" charset="-120"/>
               </a:rPr>
               <a:t>5 / 9</a:t>
             </a:r>
@@ -6463,13 +6342,12 @@
             <a:avLst/>
           </a:prstGeom>
           <a:noFill/>
-          <a:ln/>
         </p:spPr>
         <p:txBody>
           <a:bodyPr wrap="square" rtlCol="0" anchor="ctr"/>
           <a:lstStyle/>
           <a:p>
-            <a:pPr algn="l" indent="0" marL="0">
+            <a:pPr marL="0" indent="0" algn="l">
               <a:buNone/>
             </a:pPr>
             <a:r>
@@ -6477,9 +6355,9 @@
                 <a:solidFill>
                   <a:srgbClr val="1F4E9C"/>
                 </a:solidFill>
-                <a:latin typeface="微软雅黑" pitchFamily="34" charset="0"/>
-                <a:ea typeface="微软雅黑" pitchFamily="34" charset="-122"/>
-                <a:cs typeface="微软雅黑" pitchFamily="34" charset="-120"/>
+                <a:latin typeface="微软雅黑" panose="020B0503020204020204" pitchFamily="34" charset="-122"/>
+                <a:ea typeface="微软雅黑" panose="020B0503020204020204" pitchFamily="34" charset="-122"/>
+                <a:cs typeface="微软雅黑" panose="020B0503020204020204" pitchFamily="34" charset="-120"/>
               </a:rPr>
               <a:t>有价值必做</a:t>
             </a:r>
@@ -6502,13 +6380,12 @@
             <a:avLst/>
           </a:prstGeom>
           <a:noFill/>
-          <a:ln/>
         </p:spPr>
         <p:txBody>
           <a:bodyPr wrap="square" rtlCol="0" anchor="ctr"/>
           <a:lstStyle/>
           <a:p>
-            <a:pPr algn="l" indent="0" marL="0">
+            <a:pPr marL="0" indent="0" algn="l">
               <a:buNone/>
             </a:pPr>
             <a:r>
@@ -6516,9 +6393,9 @@
                 <a:solidFill>
                   <a:srgbClr val="1F2329"/>
                 </a:solidFill>
-                <a:latin typeface="微软雅黑" pitchFamily="34" charset="0"/>
-                <a:ea typeface="微软雅黑" pitchFamily="34" charset="-122"/>
-                <a:cs typeface="微软雅黑" pitchFamily="34" charset="-120"/>
+                <a:latin typeface="微软雅黑" panose="020B0503020204020204" pitchFamily="34" charset="-122"/>
+                <a:ea typeface="微软雅黑" panose="020B0503020204020204" pitchFamily="34" charset="-122"/>
+                <a:cs typeface="微软雅黑" panose="020B0503020204020204" pitchFamily="34" charset="-120"/>
               </a:rPr>
               <a:t>必做题（3/4）</a:t>
             </a:r>
@@ -6532,17 +6409,11 @@
           <p:cNvGraphicFramePr>
             <a:graphicFrameLocks noGrp="1"/>
           </p:cNvGraphicFramePr>
-          <p:nvPr>
-            <p:extLst>
-              <p:ext uri="{D42A27DB-BD31-4B8C-83A1-F6EECF244321}">
-                <p14:modId xmlns:p14="http://schemas.microsoft.com/office/powerpoint/2010/main" val="1579011935"/>
-              </p:ext>
-            </p:extLst>
-          </p:nvPr>
+          <p:nvPr/>
         </p:nvGraphicFramePr>
         <p:xfrm>
           <a:off x="822960" y="2395728"/>
-          <a:ext cx="10545775" cy="914400"/>
+          <a:ext cx="10545775" cy="2944368"/>
         </p:xfrm>
         <a:graphic>
           <a:graphicData uri="http://schemas.openxmlformats.org/drawingml/2006/table">
@@ -6559,7 +6430,7 @@
                     <a:bodyPr/>
                     <a:lstStyle/>
                     <a:p>
-                      <a:pPr algn="l" indent="0" marL="0">
+                      <a:pPr marL="0" indent="0" algn="l">
                         <a:buNone/>
                       </a:pPr>
                       <a:r>
@@ -6567,20 +6438,20 @@
                           <a:solidFill>
                             <a:srgbClr val="1F4E9C"/>
                           </a:solidFill>
-                          <a:latin typeface="微软雅黑" pitchFamily="34" charset="0"/>
-                          <a:ea typeface="微软雅黑" pitchFamily="34" charset="-122"/>
-                          <a:cs typeface="微软雅黑" pitchFamily="34" charset="-120"/>
+                          <a:latin typeface="微软雅黑" panose="020B0503020204020204" pitchFamily="34" charset="-122"/>
+                          <a:ea typeface="微软雅黑" panose="020B0503020204020204" pitchFamily="34" charset="-122"/>
+                          <a:cs typeface="微软雅黑" panose="020B0503020204020204" pitchFamily="34" charset="-120"/>
                         </a:rPr>
                         <a:t>题号</a:t>
                       </a:r>
                       <a:endParaRPr lang="en-US" sz="1500" dirty="0">
-                        <a:latin typeface="微软雅黑" charset="0"/>
-                        <a:ea typeface="微软雅黑" charset="0"/>
-                        <a:cs typeface="微软雅黑" charset="0"/>
+                        <a:latin typeface="微软雅黑" panose="020B0503020204020204" pitchFamily="34" charset="-122"/>
+                        <a:ea typeface="微软雅黑" panose="020B0503020204020204" pitchFamily="34" charset="-122"/>
+                        <a:cs typeface="微软雅黑" panose="020B0503020204020204" pitchFamily="34" charset="-122"/>
                       </a:endParaRPr>
                     </a:p>
                   </a:txBody>
-                  <a:tcPr marL="91440" marR="91440" marT="45720" marB="45720" anchor="ctr">
+                  <a:tcPr anchor="ctr">
                     <a:lnL w="9525" cap="flat" cmpd="sng" algn="ctr">
                       <a:solidFill>
                         <a:srgbClr val="D8DBE0"/>
@@ -6627,7 +6498,7 @@
                     <a:bodyPr/>
                     <a:lstStyle/>
                     <a:p>
-                      <a:pPr algn="l" indent="0" marL="0">
+                      <a:pPr marL="0" indent="0" algn="l">
                         <a:buNone/>
                       </a:pPr>
                       <a:r>
@@ -6635,20 +6506,20 @@
                           <a:solidFill>
                             <a:srgbClr val="1F4E9C"/>
                           </a:solidFill>
-                          <a:latin typeface="微软雅黑" pitchFamily="34" charset="0"/>
-                          <a:ea typeface="微软雅黑" pitchFamily="34" charset="-122"/>
-                          <a:cs typeface="微软雅黑" pitchFamily="34" charset="-120"/>
+                          <a:latin typeface="微软雅黑" panose="020B0503020204020204" pitchFamily="34" charset="-122"/>
+                          <a:ea typeface="微软雅黑" panose="020B0503020204020204" pitchFamily="34" charset="-122"/>
+                          <a:cs typeface="微软雅黑" panose="020B0503020204020204" pitchFamily="34" charset="-120"/>
                         </a:rPr>
                         <a:t>考点</a:t>
                       </a:r>
                       <a:endParaRPr lang="en-US" sz="1500" dirty="0">
-                        <a:latin typeface="微软雅黑" charset="0"/>
-                        <a:ea typeface="微软雅黑" charset="0"/>
-                        <a:cs typeface="微软雅黑" charset="0"/>
+                        <a:latin typeface="微软雅黑" panose="020B0503020204020204" pitchFamily="34" charset="-122"/>
+                        <a:ea typeface="微软雅黑" panose="020B0503020204020204" pitchFamily="34" charset="-122"/>
+                        <a:cs typeface="微软雅黑" panose="020B0503020204020204" pitchFamily="34" charset="-122"/>
                       </a:endParaRPr>
                     </a:p>
                   </a:txBody>
-                  <a:tcPr marL="91440" marR="91440" marT="45720" marB="45720" anchor="ctr">
+                  <a:tcPr anchor="ctr">
                     <a:lnL w="9525" cap="flat" cmpd="sng" algn="ctr">
                       <a:solidFill>
                         <a:srgbClr val="D8DBE0"/>
@@ -6695,7 +6566,7 @@
                     <a:bodyPr/>
                     <a:lstStyle/>
                     <a:p>
-                      <a:pPr algn="l" indent="0" marL="0">
+                      <a:pPr marL="0" indent="0" algn="l">
                         <a:buNone/>
                       </a:pPr>
                       <a:r>
@@ -6703,20 +6574,20 @@
                           <a:solidFill>
                             <a:srgbClr val="1F4E9C"/>
                           </a:solidFill>
-                          <a:latin typeface="微软雅黑" pitchFamily="34" charset="0"/>
-                          <a:ea typeface="微软雅黑" pitchFamily="34" charset="-122"/>
-                          <a:cs typeface="微软雅黑" pitchFamily="34" charset="-120"/>
+                          <a:latin typeface="微软雅黑" panose="020B0503020204020204" pitchFamily="34" charset="-122"/>
+                          <a:ea typeface="微软雅黑" panose="020B0503020204020204" pitchFamily="34" charset="-122"/>
+                          <a:cs typeface="微软雅黑" panose="020B0503020204020204" pitchFamily="34" charset="-120"/>
                         </a:rPr>
                         <a:t>价值</a:t>
                       </a:r>
                       <a:endParaRPr lang="en-US" sz="1500" dirty="0">
-                        <a:latin typeface="微软雅黑" charset="0"/>
-                        <a:ea typeface="微软雅黑" charset="0"/>
-                        <a:cs typeface="微软雅黑" charset="0"/>
+                        <a:latin typeface="微软雅黑" panose="020B0503020204020204" pitchFamily="34" charset="-122"/>
+                        <a:ea typeface="微软雅黑" panose="020B0503020204020204" pitchFamily="34" charset="-122"/>
+                        <a:cs typeface="微软雅黑" panose="020B0503020204020204" pitchFamily="34" charset="-122"/>
                       </a:endParaRPr>
                     </a:p>
                   </a:txBody>
-                  <a:tcPr marL="91440" marR="91440" marT="45720" marB="45720" anchor="ctr">
+                  <a:tcPr anchor="ctr">
                     <a:lnL w="9525" cap="flat" cmpd="sng" algn="ctr">
                       <a:solidFill>
                         <a:srgbClr val="D8DBE0"/>
@@ -6765,7 +6636,7 @@
                     <a:bodyPr/>
                     <a:lstStyle/>
                     <a:p>
-                      <a:pPr algn="l" indent="0" marL="0">
+                      <a:pPr marL="0" indent="0" algn="l">
                         <a:buNone/>
                       </a:pPr>
                       <a:r>
@@ -6773,20 +6644,20 @@
                           <a:solidFill>
                             <a:srgbClr val="1F2329"/>
                           </a:solidFill>
-                          <a:latin typeface="微软雅黑" pitchFamily="34" charset="0"/>
-                          <a:ea typeface="微软雅黑" pitchFamily="34" charset="-122"/>
-                          <a:cs typeface="微软雅黑" pitchFamily="34" charset="-120"/>
+                          <a:latin typeface="微软雅黑" panose="020B0503020204020204" pitchFamily="34" charset="-122"/>
+                          <a:ea typeface="微软雅黑" panose="020B0503020204020204" pitchFamily="34" charset="-122"/>
+                          <a:cs typeface="微软雅黑" panose="020B0503020204020204" pitchFamily="34" charset="-120"/>
                         </a:rPr>
                         <a:t>10选33</a:t>
                       </a:r>
                       <a:endParaRPr lang="en-US" sz="1500" dirty="0">
-                        <a:latin typeface="微软雅黑" charset="0"/>
-                        <a:ea typeface="微软雅黑" charset="0"/>
-                        <a:cs typeface="微软雅黑" charset="0"/>
+                        <a:latin typeface="微软雅黑" panose="020B0503020204020204" pitchFamily="34" charset="-122"/>
+                        <a:ea typeface="微软雅黑" panose="020B0503020204020204" pitchFamily="34" charset="-122"/>
+                        <a:cs typeface="微软雅黑" panose="020B0503020204020204" pitchFamily="34" charset="-122"/>
                       </a:endParaRPr>
                     </a:p>
                   </a:txBody>
-                  <a:tcPr marL="91440" marR="91440" marT="45720" marB="45720" anchor="ctr">
+                  <a:tcPr anchor="ctr">
                     <a:lnL w="9525" cap="flat" cmpd="sng" algn="ctr">
                       <a:solidFill>
                         <a:srgbClr val="D8DBE0"/>
@@ -6833,7 +6704,7 @@
                     <a:bodyPr/>
                     <a:lstStyle/>
                     <a:p>
-                      <a:pPr algn="l" indent="0" marL="0">
+                      <a:pPr marL="0" indent="0" algn="l">
                         <a:buNone/>
                       </a:pPr>
                       <a:r>
@@ -6841,20 +6712,20 @@
                           <a:solidFill>
                             <a:srgbClr val="1F2329"/>
                           </a:solidFill>
-                          <a:latin typeface="微软雅黑" pitchFamily="34" charset="0"/>
-                          <a:ea typeface="微软雅黑" pitchFamily="34" charset="-122"/>
-                          <a:cs typeface="微软雅黑" pitchFamily="34" charset="-120"/>
+                          <a:latin typeface="微软雅黑" panose="020B0503020204020204" pitchFamily="34" charset="-122"/>
+                          <a:ea typeface="微软雅黑" panose="020B0503020204020204" pitchFamily="34" charset="-122"/>
+                          <a:cs typeface="微软雅黑" panose="020B0503020204020204" pitchFamily="34" charset="-120"/>
                         </a:rPr>
                         <a:t>基数排序趟结果</a:t>
                       </a:r>
                       <a:endParaRPr lang="en-US" sz="1500" dirty="0">
-                        <a:latin typeface="微软雅黑" charset="0"/>
-                        <a:ea typeface="微软雅黑" charset="0"/>
-                        <a:cs typeface="微软雅黑" charset="0"/>
+                        <a:latin typeface="微软雅黑" panose="020B0503020204020204" pitchFamily="34" charset="-122"/>
+                        <a:ea typeface="微软雅黑" panose="020B0503020204020204" pitchFamily="34" charset="-122"/>
+                        <a:cs typeface="微软雅黑" panose="020B0503020204020204" pitchFamily="34" charset="-122"/>
                       </a:endParaRPr>
                     </a:p>
                   </a:txBody>
-                  <a:tcPr marL="91440" marR="91440" marT="45720" marB="45720" anchor="ctr">
+                  <a:tcPr anchor="ctr">
                     <a:lnL w="9525" cap="flat" cmpd="sng" algn="ctr">
                       <a:solidFill>
                         <a:srgbClr val="D8DBE0"/>
@@ -6901,7 +6772,7 @@
                     <a:bodyPr/>
                     <a:lstStyle/>
                     <a:p>
-                      <a:pPr algn="l" indent="0" marL="0">
+                      <a:pPr marL="0" indent="0" algn="l">
                         <a:buNone/>
                       </a:pPr>
                       <a:r>
@@ -6909,20 +6780,20 @@
                           <a:solidFill>
                             <a:srgbClr val="1F2329"/>
                           </a:solidFill>
-                          <a:latin typeface="微软雅黑" pitchFamily="34" charset="0"/>
-                          <a:ea typeface="微软雅黑" pitchFamily="34" charset="-122"/>
-                          <a:cs typeface="微软雅黑" pitchFamily="34" charset="-120"/>
+                          <a:latin typeface="微软雅黑" panose="020B0503020204020204" pitchFamily="34" charset="-122"/>
+                          <a:ea typeface="微软雅黑" panose="020B0503020204020204" pitchFamily="34" charset="-122"/>
+                          <a:cs typeface="微软雅黑" panose="020B0503020204020204" pitchFamily="34" charset="-120"/>
                         </a:rPr>
                         <a:t>两趟LSD后结果，2024综合1(1)（每趟结果）同型</a:t>
                       </a:r>
                       <a:endParaRPr lang="en-US" sz="1500" dirty="0">
-                        <a:latin typeface="微软雅黑" charset="0"/>
-                        <a:ea typeface="微软雅黑" charset="0"/>
-                        <a:cs typeface="微软雅黑" charset="0"/>
+                        <a:latin typeface="微软雅黑" panose="020B0503020204020204" pitchFamily="34" charset="-122"/>
+                        <a:ea typeface="微软雅黑" panose="020B0503020204020204" pitchFamily="34" charset="-122"/>
+                        <a:cs typeface="微软雅黑" panose="020B0503020204020204" pitchFamily="34" charset="-122"/>
                       </a:endParaRPr>
                     </a:p>
                   </a:txBody>
-                  <a:tcPr marL="91440" marR="91440" marT="45720" marB="45720" anchor="ctr">
+                  <a:tcPr anchor="ctr">
                     <a:lnL w="9525" cap="flat" cmpd="sng" algn="ctr">
                       <a:solidFill>
                         <a:srgbClr val="D8DBE0"/>
@@ -6971,7 +6842,7 @@
                     <a:bodyPr/>
                     <a:lstStyle/>
                     <a:p>
-                      <a:pPr algn="l" indent="0" marL="0">
+                      <a:pPr marL="0" indent="0" algn="l">
                         <a:buNone/>
                       </a:pPr>
                       <a:r>
@@ -6979,20 +6850,20 @@
                           <a:solidFill>
                             <a:srgbClr val="1F2329"/>
                           </a:solidFill>
-                          <a:latin typeface="微软雅黑" pitchFamily="34" charset="0"/>
-                          <a:ea typeface="微软雅黑" pitchFamily="34" charset="-122"/>
-                          <a:cs typeface="微软雅黑" pitchFamily="34" charset="-120"/>
+                          <a:latin typeface="微软雅黑" panose="020B0503020204020204" pitchFamily="34" charset="-122"/>
+                          <a:ea typeface="微软雅黑" panose="020B0503020204020204" pitchFamily="34" charset="-122"/>
+                          <a:cs typeface="微软雅黑" panose="020B0503020204020204" pitchFamily="34" charset="-120"/>
                         </a:rPr>
                         <a:t>10选39</a:t>
                       </a:r>
                       <a:endParaRPr lang="en-US" sz="1500" dirty="0">
-                        <a:latin typeface="微软雅黑" charset="0"/>
-                        <a:ea typeface="微软雅黑" charset="0"/>
-                        <a:cs typeface="微软雅黑" charset="0"/>
+                        <a:latin typeface="微软雅黑" panose="020B0503020204020204" pitchFamily="34" charset="-122"/>
+                        <a:ea typeface="微软雅黑" panose="020B0503020204020204" pitchFamily="34" charset="-122"/>
+                        <a:cs typeface="微软雅黑" panose="020B0503020204020204" pitchFamily="34" charset="-122"/>
                       </a:endParaRPr>
                     </a:p>
                   </a:txBody>
-                  <a:tcPr marL="91440" marR="91440" marT="45720" marB="45720" anchor="ctr">
+                  <a:tcPr anchor="ctr">
                     <a:lnL w="9525" cap="flat" cmpd="sng" algn="ctr">
                       <a:solidFill>
                         <a:srgbClr val="D8DBE0"/>
@@ -7039,7 +6910,7 @@
                     <a:bodyPr/>
                     <a:lstStyle/>
                     <a:p>
-                      <a:pPr algn="l" indent="0" marL="0">
+                      <a:pPr marL="0" indent="0" algn="l">
                         <a:buNone/>
                       </a:pPr>
                       <a:r>
@@ -7047,20 +6918,20 @@
                           <a:solidFill>
                             <a:srgbClr val="1F2329"/>
                           </a:solidFill>
-                          <a:latin typeface="微软雅黑" pitchFamily="34" charset="0"/>
-                          <a:ea typeface="微软雅黑" pitchFamily="34" charset="-122"/>
-                          <a:cs typeface="微软雅黑" pitchFamily="34" charset="-120"/>
+                          <a:latin typeface="微软雅黑" panose="020B0503020204020204" pitchFamily="34" charset="-122"/>
+                          <a:ea typeface="微软雅黑" panose="020B0503020204020204" pitchFamily="34" charset="-122"/>
+                          <a:cs typeface="微软雅黑" panose="020B0503020204020204" pitchFamily="34" charset="-120"/>
                         </a:rPr>
                         <a:t>基数排序趟手算</a:t>
                       </a:r>
                       <a:endParaRPr lang="en-US" sz="1500" dirty="0">
-                        <a:latin typeface="微软雅黑" charset="0"/>
-                        <a:ea typeface="微软雅黑" charset="0"/>
-                        <a:cs typeface="微软雅黑" charset="0"/>
+                        <a:latin typeface="微软雅黑" panose="020B0503020204020204" pitchFamily="34" charset="-122"/>
+                        <a:ea typeface="微软雅黑" panose="020B0503020204020204" pitchFamily="34" charset="-122"/>
+                        <a:cs typeface="微软雅黑" panose="020B0503020204020204" pitchFamily="34" charset="-122"/>
                       </a:endParaRPr>
                     </a:p>
                   </a:txBody>
-                  <a:tcPr marL="91440" marR="91440" marT="45720" marB="45720" anchor="ctr">
+                  <a:tcPr anchor="ctr">
                     <a:lnL w="9525" cap="flat" cmpd="sng" algn="ctr">
                       <a:solidFill>
                         <a:srgbClr val="D8DBE0"/>
@@ -7107,7 +6978,7 @@
                     <a:bodyPr/>
                     <a:lstStyle/>
                     <a:p>
-                      <a:pPr algn="l" indent="0" marL="0">
+                      <a:pPr marL="0" indent="0" algn="l">
                         <a:buNone/>
                       </a:pPr>
                       <a:r>
@@ -7115,20 +6986,20 @@
                           <a:solidFill>
                             <a:srgbClr val="1F2329"/>
                           </a:solidFill>
-                          <a:latin typeface="微软雅黑" pitchFamily="34" charset="0"/>
-                          <a:ea typeface="微软雅黑" pitchFamily="34" charset="-122"/>
-                          <a:cs typeface="微软雅黑" pitchFamily="34" charset="-120"/>
+                          <a:latin typeface="微软雅黑" panose="020B0503020204020204" pitchFamily="34" charset="-122"/>
+                          <a:ea typeface="微软雅黑" panose="020B0503020204020204" pitchFamily="34" charset="-122"/>
+                          <a:cs typeface="微软雅黑" panose="020B0503020204020204" pitchFamily="34" charset="-120"/>
                         </a:rPr>
                         <a:t>第2趟分配收集结果，与选33同考点同题型（2024综合1(1)）</a:t>
                       </a:r>
                       <a:endParaRPr lang="en-US" sz="1500" dirty="0">
-                        <a:latin typeface="微软雅黑" charset="0"/>
-                        <a:ea typeface="微软雅黑" charset="0"/>
-                        <a:cs typeface="微软雅黑" charset="0"/>
+                        <a:latin typeface="微软雅黑" panose="020B0503020204020204" pitchFamily="34" charset="-122"/>
+                        <a:ea typeface="微软雅黑" panose="020B0503020204020204" pitchFamily="34" charset="-122"/>
+                        <a:cs typeface="微软雅黑" panose="020B0503020204020204" pitchFamily="34" charset="-122"/>
                       </a:endParaRPr>
                     </a:p>
                   </a:txBody>
-                  <a:tcPr marL="91440" marR="91440" marT="45720" marB="45720" anchor="ctr">
+                  <a:tcPr anchor="ctr">
                     <a:lnL w="9525" cap="flat" cmpd="sng" algn="ctr">
                       <a:solidFill>
                         <a:srgbClr val="D8DBE0"/>
@@ -7177,7 +7048,7 @@
                     <a:bodyPr/>
                     <a:lstStyle/>
                     <a:p>
-                      <a:pPr algn="l" indent="0" marL="0">
+                      <a:pPr marL="0" indent="0" algn="l">
                         <a:buNone/>
                       </a:pPr>
                       <a:r>
@@ -7185,20 +7056,20 @@
                           <a:solidFill>
                             <a:srgbClr val="1F2329"/>
                           </a:solidFill>
-                          <a:latin typeface="微软雅黑" pitchFamily="34" charset="0"/>
-                          <a:ea typeface="微软雅黑" pitchFamily="34" charset="-122"/>
-                          <a:cs typeface="微软雅黑" pitchFamily="34" charset="-120"/>
+                          <a:latin typeface="微软雅黑" panose="020B0503020204020204" pitchFamily="34" charset="-122"/>
+                          <a:ea typeface="微软雅黑" panose="020B0503020204020204" pitchFamily="34" charset="-122"/>
+                          <a:cs typeface="微软雅黑" panose="020B0503020204020204" pitchFamily="34" charset="-120"/>
                         </a:rPr>
                         <a:t>10选42</a:t>
                       </a:r>
                       <a:endParaRPr lang="en-US" sz="1500" dirty="0">
-                        <a:latin typeface="微软雅黑" charset="0"/>
-                        <a:ea typeface="微软雅黑" charset="0"/>
-                        <a:cs typeface="微软雅黑" charset="0"/>
+                        <a:latin typeface="微软雅黑" panose="020B0503020204020204" pitchFamily="34" charset="-122"/>
+                        <a:ea typeface="微软雅黑" panose="020B0503020204020204" pitchFamily="34" charset="-122"/>
+                        <a:cs typeface="微软雅黑" panose="020B0503020204020204" pitchFamily="34" charset="-122"/>
                       </a:endParaRPr>
                     </a:p>
                   </a:txBody>
-                  <a:tcPr marL="91440" marR="91440" marT="45720" marB="45720" anchor="ctr">
+                  <a:tcPr anchor="ctr">
                     <a:lnL w="9525" cap="flat" cmpd="sng" algn="ctr">
                       <a:solidFill>
                         <a:srgbClr val="D8DBE0"/>
@@ -7245,7 +7116,7 @@
                     <a:bodyPr/>
                     <a:lstStyle/>
                     <a:p>
-                      <a:pPr algn="l" indent="0" marL="0">
+                      <a:pPr marL="0" indent="0" algn="l">
                         <a:buNone/>
                       </a:pPr>
                       <a:r>
@@ -7253,20 +7124,20 @@
                           <a:solidFill>
                             <a:srgbClr val="1F2329"/>
                           </a:solidFill>
-                          <a:latin typeface="微软雅黑" pitchFamily="34" charset="0"/>
-                          <a:ea typeface="微软雅黑" pitchFamily="34" charset="-122"/>
-                          <a:cs typeface="微软雅黑" pitchFamily="34" charset="-120"/>
+                          <a:latin typeface="微软雅黑" panose="020B0503020204020204" pitchFamily="34" charset="-122"/>
+                          <a:ea typeface="微软雅黑" panose="020B0503020204020204" pitchFamily="34" charset="-122"/>
+                          <a:cs typeface="微软雅黑" panose="020B0503020204020204" pitchFamily="34" charset="-120"/>
                         </a:rPr>
                         <a:t>快排第二趟判别</a:t>
                       </a:r>
                       <a:endParaRPr lang="en-US" sz="1500" dirty="0">
-                        <a:latin typeface="微软雅黑" charset="0"/>
-                        <a:ea typeface="微软雅黑" charset="0"/>
-                        <a:cs typeface="微软雅黑" charset="0"/>
+                        <a:latin typeface="微软雅黑" panose="020B0503020204020204" pitchFamily="34" charset="-122"/>
+                        <a:ea typeface="微软雅黑" panose="020B0503020204020204" pitchFamily="34" charset="-122"/>
+                        <a:cs typeface="微软雅黑" panose="020B0503020204020204" pitchFamily="34" charset="-122"/>
                       </a:endParaRPr>
                     </a:p>
                   </a:txBody>
-                  <a:tcPr marL="91440" marR="91440" marT="45720" marB="45720" anchor="ctr">
+                  <a:tcPr anchor="ctr">
                     <a:lnL w="9525" cap="flat" cmpd="sng" algn="ctr">
                       <a:solidFill>
                         <a:srgbClr val="D8DBE0"/>
@@ -7313,7 +7184,7 @@
                     <a:bodyPr/>
                     <a:lstStyle/>
                     <a:p>
-                      <a:pPr algn="l" indent="0" marL="0">
+                      <a:pPr marL="0" indent="0" algn="l">
                         <a:buNone/>
                       </a:pPr>
                       <a:r>
@@ -7321,20 +7192,20 @@
                           <a:solidFill>
                             <a:srgbClr val="1F2329"/>
                           </a:solidFill>
-                          <a:latin typeface="微软雅黑" pitchFamily="34" charset="0"/>
-                          <a:ea typeface="微软雅黑" pitchFamily="34" charset="-122"/>
-                          <a:cs typeface="微软雅黑" pitchFamily="34" charset="-120"/>
+                          <a:latin typeface="微软雅黑" panose="020B0503020204020204" pitchFamily="34" charset="-122"/>
+                          <a:ea typeface="微软雅黑" panose="020B0503020204020204" pitchFamily="34" charset="-122"/>
+                          <a:cs typeface="微软雅黑" panose="020B0503020204020204" pitchFamily="34" charset="-120"/>
                         </a:rPr>
                         <a:t>判不可能是快排第二趟结果，与选21同型（每趟定枢轴位置）</a:t>
                       </a:r>
                       <a:endParaRPr lang="en-US" sz="1500" dirty="0">
-                        <a:latin typeface="微软雅黑" charset="0"/>
-                        <a:ea typeface="微软雅黑" charset="0"/>
-                        <a:cs typeface="微软雅黑" charset="0"/>
+                        <a:latin typeface="微软雅黑" panose="020B0503020204020204" pitchFamily="34" charset="-122"/>
+                        <a:ea typeface="微软雅黑" panose="020B0503020204020204" pitchFamily="34" charset="-122"/>
+                        <a:cs typeface="微软雅黑" panose="020B0503020204020204" pitchFamily="34" charset="-122"/>
                       </a:endParaRPr>
                     </a:p>
                   </a:txBody>
-                  <a:tcPr marL="91440" marR="91440" marT="45720" marB="45720" anchor="ctr">
+                  <a:tcPr anchor="ctr">
                     <a:lnL w="9525" cap="flat" cmpd="sng" algn="ctr">
                       <a:solidFill>
                         <a:srgbClr val="D8DBE0"/>
@@ -7383,7 +7254,7 @@
                     <a:bodyPr/>
                     <a:lstStyle/>
                     <a:p>
-                      <a:pPr algn="l" indent="0" marL="0">
+                      <a:pPr marL="0" indent="0" algn="l">
                         <a:buNone/>
                       </a:pPr>
                       <a:r>
@@ -7391,20 +7262,20 @@
                           <a:solidFill>
                             <a:srgbClr val="1F2329"/>
                           </a:solidFill>
-                          <a:latin typeface="微软雅黑" pitchFamily="34" charset="0"/>
-                          <a:ea typeface="微软雅黑" pitchFamily="34" charset="-122"/>
-                          <a:cs typeface="微软雅黑" pitchFamily="34" charset="-120"/>
+                          <a:latin typeface="微软雅黑" panose="020B0503020204020204" pitchFamily="34" charset="-122"/>
+                          <a:ea typeface="微软雅黑" panose="020B0503020204020204" pitchFamily="34" charset="-122"/>
+                          <a:cs typeface="微软雅黑" panose="020B0503020204020204" pitchFamily="34" charset="-120"/>
                         </a:rPr>
                         <a:t>10答1</a:t>
                       </a:r>
                       <a:endParaRPr lang="en-US" sz="1500" dirty="0">
-                        <a:latin typeface="微软雅黑" charset="0"/>
-                        <a:ea typeface="微软雅黑" charset="0"/>
-                        <a:cs typeface="微软雅黑" charset="0"/>
+                        <a:latin typeface="微软雅黑" panose="020B0503020204020204" pitchFamily="34" charset="-122"/>
+                        <a:ea typeface="微软雅黑" panose="020B0503020204020204" pitchFamily="34" charset="-122"/>
+                        <a:cs typeface="微软雅黑" panose="020B0503020204020204" pitchFamily="34" charset="-122"/>
                       </a:endParaRPr>
                     </a:p>
                   </a:txBody>
-                  <a:tcPr marL="91440" marR="91440" marT="45720" marB="45720" anchor="ctr">
+                  <a:tcPr anchor="ctr">
                     <a:lnL w="9525" cap="flat" cmpd="sng" algn="ctr">
                       <a:solidFill>
                         <a:srgbClr val="D8DBE0"/>
@@ -7451,7 +7322,7 @@
                     <a:bodyPr/>
                     <a:lstStyle/>
                     <a:p>
-                      <a:pPr algn="l" indent="0" marL="0">
+                      <a:pPr marL="0" indent="0" algn="l">
                         <a:buNone/>
                       </a:pPr>
                       <a:r>
@@ -7459,20 +7330,20 @@
                           <a:solidFill>
                             <a:srgbClr val="1F2329"/>
                           </a:solidFill>
-                          <a:latin typeface="微软雅黑" pitchFamily="34" charset="0"/>
-                          <a:ea typeface="微软雅黑" pitchFamily="34" charset="-122"/>
-                          <a:cs typeface="微软雅黑" pitchFamily="34" charset="-120"/>
+                          <a:latin typeface="微软雅黑" panose="020B0503020204020204" pitchFamily="34" charset="-122"/>
+                          <a:ea typeface="微软雅黑" panose="020B0503020204020204" pitchFamily="34" charset="-122"/>
+                          <a:cs typeface="微软雅黑" panose="020B0503020204020204" pitchFamily="34" charset="-120"/>
                         </a:rPr>
                         <a:t>多种排序手工执行</a:t>
                       </a:r>
                       <a:endParaRPr lang="en-US" sz="1500" dirty="0">
-                        <a:latin typeface="微软雅黑" charset="0"/>
-                        <a:ea typeface="微软雅黑" charset="0"/>
-                        <a:cs typeface="微软雅黑" charset="0"/>
+                        <a:latin typeface="微软雅黑" panose="020B0503020204020204" pitchFamily="34" charset="-122"/>
+                        <a:ea typeface="微软雅黑" panose="020B0503020204020204" pitchFamily="34" charset="-122"/>
+                        <a:cs typeface="微软雅黑" panose="020B0503020204020204" pitchFamily="34" charset="-122"/>
                       </a:endParaRPr>
                     </a:p>
                   </a:txBody>
-                  <a:tcPr marL="91440" marR="91440" marT="45720" marB="45720" anchor="ctr">
+                  <a:tcPr anchor="ctr">
                     <a:lnL w="9525" cap="flat" cmpd="sng" algn="ctr">
                       <a:solidFill>
                         <a:srgbClr val="D8DBE0"/>
@@ -7519,7 +7390,7 @@
                     <a:bodyPr/>
                     <a:lstStyle/>
                     <a:p>
-                      <a:pPr algn="l" indent="0" marL="0">
+                      <a:pPr marL="0" indent="0" algn="l">
                         <a:buNone/>
                       </a:pPr>
                       <a:r>
@@ -7527,20 +7398,20 @@
                           <a:solidFill>
                             <a:srgbClr val="1F2329"/>
                           </a:solidFill>
-                          <a:latin typeface="微软雅黑" pitchFamily="34" charset="0"/>
-                          <a:ea typeface="微软雅黑" pitchFamily="34" charset="-122"/>
-                          <a:cs typeface="微软雅黑" pitchFamily="34" charset="-120"/>
+                          <a:latin typeface="微软雅黑" panose="020B0503020204020204" pitchFamily="34" charset="-122"/>
+                          <a:ea typeface="微软雅黑" panose="020B0503020204020204" pitchFamily="34" charset="-122"/>
+                          <a:cs typeface="微软雅黑" panose="020B0503020204020204" pitchFamily="34" charset="-120"/>
                         </a:rPr>
                         <a:t>10元素手工执行各排序，2024综合1原题形态（四种排序手算）</a:t>
                       </a:r>
                       <a:endParaRPr lang="en-US" sz="1500" dirty="0">
-                        <a:latin typeface="微软雅黑" charset="0"/>
-                        <a:ea typeface="微软雅黑" charset="0"/>
-                        <a:cs typeface="微软雅黑" charset="0"/>
+                        <a:latin typeface="微软雅黑" panose="020B0503020204020204" pitchFamily="34" charset="-122"/>
+                        <a:ea typeface="微软雅黑" panose="020B0503020204020204" pitchFamily="34" charset="-122"/>
+                        <a:cs typeface="微软雅黑" panose="020B0503020204020204" pitchFamily="34" charset="-122"/>
                       </a:endParaRPr>
                     </a:p>
                   </a:txBody>
-                  <a:tcPr marL="91440" marR="91440" marT="45720" marB="45720" anchor="ctr">
+                  <a:tcPr anchor="ctr">
                     <a:lnL w="9525" cap="flat" cmpd="sng" algn="ctr">
                       <a:solidFill>
                         <a:srgbClr val="D8DBE0"/>
@@ -7589,7 +7460,7 @@
                     <a:bodyPr/>
                     <a:lstStyle/>
                     <a:p>
-                      <a:pPr algn="l" indent="0" marL="0">
+                      <a:pPr marL="0" indent="0" algn="l">
                         <a:buNone/>
                       </a:pPr>
                       <a:r>
@@ -7597,20 +7468,20 @@
                           <a:solidFill>
                             <a:srgbClr val="1F2329"/>
                           </a:solidFill>
-                          <a:latin typeface="微软雅黑" pitchFamily="34" charset="0"/>
-                          <a:ea typeface="微软雅黑" pitchFamily="34" charset="-122"/>
-                          <a:cs typeface="微软雅黑" pitchFamily="34" charset="-120"/>
+                          <a:latin typeface="微软雅黑" panose="020B0503020204020204" pitchFamily="34" charset="-122"/>
+                          <a:ea typeface="微软雅黑" panose="020B0503020204020204" pitchFamily="34" charset="-122"/>
+                          <a:cs typeface="微软雅黑" panose="020B0503020204020204" pitchFamily="34" charset="-120"/>
                         </a:rPr>
                         <a:t>10答2</a:t>
                       </a:r>
                       <a:endParaRPr lang="en-US" sz="1500" dirty="0">
-                        <a:latin typeface="微软雅黑" charset="0"/>
-                        <a:ea typeface="微软雅黑" charset="0"/>
-                        <a:cs typeface="微软雅黑" charset="0"/>
+                        <a:latin typeface="微软雅黑" panose="020B0503020204020204" pitchFamily="34" charset="-122"/>
+                        <a:ea typeface="微软雅黑" panose="020B0503020204020204" pitchFamily="34" charset="-122"/>
+                        <a:cs typeface="微软雅黑" panose="020B0503020204020204" pitchFamily="34" charset="-122"/>
                       </a:endParaRPr>
                     </a:p>
                   </a:txBody>
-                  <a:tcPr marL="91440" marR="91440" marT="45720" marB="45720" anchor="ctr">
+                  <a:tcPr anchor="ctr">
                     <a:lnL w="9525" cap="flat" cmpd="sng" algn="ctr">
                       <a:solidFill>
                         <a:srgbClr val="D8DBE0"/>
@@ -7657,7 +7528,7 @@
                     <a:bodyPr/>
                     <a:lstStyle/>
                     <a:p>
-                      <a:pPr algn="l" indent="0" marL="0">
+                      <a:pPr marL="0" indent="0" algn="l">
                         <a:buNone/>
                       </a:pPr>
                       <a:r>
@@ -7665,20 +7536,20 @@
                           <a:solidFill>
                             <a:srgbClr val="1F2329"/>
                           </a:solidFill>
-                          <a:latin typeface="微软雅黑" pitchFamily="34" charset="0"/>
-                          <a:ea typeface="微软雅黑" pitchFamily="34" charset="-122"/>
-                          <a:cs typeface="微软雅黑" pitchFamily="34" charset="-120"/>
+                          <a:latin typeface="微软雅黑" panose="020B0503020204020204" pitchFamily="34" charset="-122"/>
+                          <a:ea typeface="微软雅黑" panose="020B0503020204020204" pitchFamily="34" charset="-122"/>
+                          <a:cs typeface="微软雅黑" panose="020B0503020204020204" pitchFamily="34" charset="-120"/>
                         </a:rPr>
                         <a:t>Partition过程</a:t>
                       </a:r>
                       <a:endParaRPr lang="en-US" sz="1500" dirty="0">
-                        <a:latin typeface="微软雅黑" charset="0"/>
-                        <a:ea typeface="微软雅黑" charset="0"/>
-                        <a:cs typeface="微软雅黑" charset="0"/>
+                        <a:latin typeface="微软雅黑" panose="020B0503020204020204" pitchFamily="34" charset="-122"/>
+                        <a:ea typeface="微软雅黑" panose="020B0503020204020204" pitchFamily="34" charset="-122"/>
+                        <a:cs typeface="微软雅黑" panose="020B0503020204020204" pitchFamily="34" charset="-122"/>
                       </a:endParaRPr>
                     </a:p>
                   </a:txBody>
-                  <a:tcPr marL="91440" marR="91440" marT="45720" marB="45720" anchor="ctr">
+                  <a:tcPr anchor="ctr">
                     <a:lnL w="9525" cap="flat" cmpd="sng" algn="ctr">
                       <a:solidFill>
                         <a:srgbClr val="D8DBE0"/>
@@ -7725,7 +7596,7 @@
                     <a:bodyPr/>
                     <a:lstStyle/>
                     <a:p>
-                      <a:pPr algn="l" indent="0" marL="0">
+                      <a:pPr marL="0" indent="0" algn="l">
                         <a:buNone/>
                       </a:pPr>
                       <a:r>
@@ -7733,20 +7604,20 @@
                           <a:solidFill>
                             <a:srgbClr val="1F2329"/>
                           </a:solidFill>
-                          <a:latin typeface="微软雅黑" pitchFamily="34" charset="0"/>
-                          <a:ea typeface="微软雅黑" pitchFamily="34" charset="-122"/>
-                          <a:cs typeface="微软雅黑" pitchFamily="34" charset="-120"/>
+                          <a:latin typeface="微软雅黑" panose="020B0503020204020204" pitchFamily="34" charset="-122"/>
+                          <a:ea typeface="微软雅黑" panose="020B0503020204020204" pitchFamily="34" charset="-122"/>
+                          <a:cs typeface="微软雅黑" panose="020B0503020204020204" pitchFamily="34" charset="-120"/>
                         </a:rPr>
                         <a:t>三次调用Partition/Merge的过程，划分手算</a:t>
                       </a:r>
                       <a:endParaRPr lang="en-US" sz="1500" dirty="0">
-                        <a:latin typeface="微软雅黑" charset="0"/>
-                        <a:ea typeface="微软雅黑" charset="0"/>
-                        <a:cs typeface="微软雅黑" charset="0"/>
+                        <a:latin typeface="微软雅黑" panose="020B0503020204020204" pitchFamily="34" charset="-122"/>
+                        <a:ea typeface="微软雅黑" panose="020B0503020204020204" pitchFamily="34" charset="-122"/>
+                        <a:cs typeface="微软雅黑" panose="020B0503020204020204" pitchFamily="34" charset="-122"/>
                       </a:endParaRPr>
                     </a:p>
                   </a:txBody>
-                  <a:tcPr marL="91440" marR="91440" marT="45720" marB="45720" anchor="ctr">
+                  <a:tcPr anchor="ctr">
                     <a:lnL w="9525" cap="flat" cmpd="sng" algn="ctr">
                       <a:solidFill>
                         <a:srgbClr val="D8DBE0"/>
@@ -7795,7 +7666,7 @@
                     <a:bodyPr/>
                     <a:lstStyle/>
                     <a:p>
-                      <a:pPr algn="l" indent="0" marL="0">
+                      <a:pPr marL="0" indent="0" algn="l">
                         <a:buNone/>
                       </a:pPr>
                       <a:r>
@@ -7803,20 +7674,20 @@
                           <a:solidFill>
                             <a:srgbClr val="1F2329"/>
                           </a:solidFill>
-                          <a:latin typeface="微软雅黑" pitchFamily="34" charset="0"/>
-                          <a:ea typeface="微软雅黑" pitchFamily="34" charset="-122"/>
-                          <a:cs typeface="微软雅黑" pitchFamily="34" charset="-120"/>
+                          <a:latin typeface="微软雅黑" panose="020B0503020204020204" pitchFamily="34" charset="-122"/>
+                          <a:ea typeface="微软雅黑" panose="020B0503020204020204" pitchFamily="34" charset="-122"/>
+                          <a:cs typeface="微软雅黑" panose="020B0503020204020204" pitchFamily="34" charset="-120"/>
                         </a:rPr>
                         <a:t>10答10</a:t>
                       </a:r>
                       <a:endParaRPr lang="en-US" sz="1500" dirty="0">
-                        <a:latin typeface="微软雅黑" charset="0"/>
-                        <a:ea typeface="微软雅黑" charset="0"/>
-                        <a:cs typeface="微软雅黑" charset="0"/>
+                        <a:latin typeface="微软雅黑" panose="020B0503020204020204" pitchFamily="34" charset="-122"/>
+                        <a:ea typeface="微软雅黑" panose="020B0503020204020204" pitchFamily="34" charset="-122"/>
+                        <a:cs typeface="微软雅黑" panose="020B0503020204020204" pitchFamily="34" charset="-122"/>
                       </a:endParaRPr>
                     </a:p>
                   </a:txBody>
-                  <a:tcPr marL="91440" marR="91440" marT="45720" marB="45720" anchor="ctr">
+                  <a:tcPr anchor="ctr">
                     <a:lnL w="9525" cap="flat" cmpd="sng" algn="ctr">
                       <a:solidFill>
                         <a:srgbClr val="D8DBE0"/>
@@ -7863,7 +7734,7 @@
                     <a:bodyPr/>
                     <a:lstStyle/>
                     <a:p>
-                      <a:pPr algn="l" indent="0" marL="0">
+                      <a:pPr marL="0" indent="0" algn="l">
                         <a:buNone/>
                       </a:pPr>
                       <a:r>
@@ -7871,20 +7742,20 @@
                           <a:solidFill>
                             <a:srgbClr val="1F2329"/>
                           </a:solidFill>
-                          <a:latin typeface="微软雅黑" pitchFamily="34" charset="0"/>
-                          <a:ea typeface="微软雅黑" pitchFamily="34" charset="-122"/>
-                          <a:cs typeface="微软雅黑" pitchFamily="34" charset="-120"/>
+                          <a:latin typeface="微软雅黑" panose="020B0503020204020204" pitchFamily="34" charset="-122"/>
+                          <a:ea typeface="微软雅黑" panose="020B0503020204020204" pitchFamily="34" charset="-122"/>
+                          <a:cs typeface="微软雅黑" panose="020B0503020204020204" pitchFamily="34" charset="-120"/>
                         </a:rPr>
                         <a:t>读排序代码算执行次数</a:t>
                       </a:r>
                       <a:endParaRPr lang="en-US" sz="1500" dirty="0">
-                        <a:latin typeface="微软雅黑" charset="0"/>
-                        <a:ea typeface="微软雅黑" charset="0"/>
-                        <a:cs typeface="微软雅黑" charset="0"/>
+                        <a:latin typeface="微软雅黑" panose="020B0503020204020204" pitchFamily="34" charset="-122"/>
+                        <a:ea typeface="微软雅黑" panose="020B0503020204020204" pitchFamily="34" charset="-122"/>
+                        <a:cs typeface="微软雅黑" panose="020B0503020204020204" pitchFamily="34" charset="-122"/>
                       </a:endParaRPr>
                     </a:p>
                   </a:txBody>
-                  <a:tcPr marL="91440" marR="91440" marT="45720" marB="45720" anchor="ctr">
+                  <a:tcPr anchor="ctr">
                     <a:lnL w="9525" cap="flat" cmpd="sng" algn="ctr">
                       <a:solidFill>
                         <a:srgbClr val="D8DBE0"/>
@@ -7931,7 +7802,7 @@
                     <a:bodyPr/>
                     <a:lstStyle/>
                     <a:p>
-                      <a:pPr algn="l" indent="0" marL="0">
+                      <a:pPr marL="0" indent="0" algn="l">
                         <a:buNone/>
                       </a:pPr>
                       <a:r>
@@ -7939,20 +7810,20 @@
                           <a:solidFill>
                             <a:srgbClr val="1F2329"/>
                           </a:solidFill>
-                          <a:latin typeface="微软雅黑" pitchFamily="34" charset="0"/>
-                          <a:ea typeface="微软雅黑" pitchFamily="34" charset="-122"/>
-                          <a:cs typeface="微软雅黑" pitchFamily="34" charset="-120"/>
+                          <a:latin typeface="微软雅黑" panose="020B0503020204020204" pitchFamily="34" charset="-122"/>
+                          <a:ea typeface="微软雅黑" panose="020B0503020204020204" pitchFamily="34" charset="-122"/>
+                          <a:cs typeface="微软雅黑" panose="020B0503020204020204" pitchFamily="34" charset="-120"/>
                         </a:rPr>
                         <a:t>读排序算法讨论基本操作次数，程序阅读+复杂度</a:t>
                       </a:r>
                       <a:endParaRPr lang="en-US" sz="1500" dirty="0">
-                        <a:latin typeface="微软雅黑" charset="0"/>
-                        <a:ea typeface="微软雅黑" charset="0"/>
-                        <a:cs typeface="微软雅黑" charset="0"/>
+                        <a:latin typeface="微软雅黑" panose="020B0503020204020204" pitchFamily="34" charset="-122"/>
+                        <a:ea typeface="微软雅黑" panose="020B0503020204020204" pitchFamily="34" charset="-122"/>
+                        <a:cs typeface="微软雅黑" panose="020B0503020204020204" pitchFamily="34" charset="-122"/>
                       </a:endParaRPr>
                     </a:p>
                   </a:txBody>
-                  <a:tcPr marL="91440" marR="91440" marT="45720" marB="45720" anchor="ctr">
+                  <a:tcPr anchor="ctr">
                     <a:lnL w="9525" cap="flat" cmpd="sng" algn="ctr">
                       <a:solidFill>
                         <a:srgbClr val="D8DBE0"/>
@@ -8009,7 +7880,7 @@
 
 <file path=ppt/slides/slide6.xml><?xml version="1.0" encoding="utf-8"?>
 <p:sld xmlns:a="http://schemas.openxmlformats.org/drawingml/2006/main" xmlns:r="http://schemas.openxmlformats.org/officeDocument/2006/relationships" xmlns:p="http://schemas.openxmlformats.org/presentationml/2006/main">
-  <p:cSld name="Slide 6">
+  <p:cSld>
     <p:bg>
       <p:bgPr>
         <a:blipFill dpi="0" rotWithShape="1">
@@ -8053,13 +7924,12 @@
             <a:avLst/>
           </a:prstGeom>
           <a:noFill/>
-          <a:ln/>
         </p:spPr>
         <p:txBody>
           <a:bodyPr wrap="square" rtlCol="0" anchor="ctr"/>
           <a:lstStyle/>
           <a:p>
-            <a:pPr algn="r" indent="0" marL="0">
+            <a:pPr marL="0" indent="0" algn="r">
               <a:buNone/>
             </a:pPr>
             <a:r>
@@ -8067,9 +7937,9 @@
                 <a:solidFill>
                   <a:srgbClr val="8A9099"/>
                 </a:solidFill>
-                <a:latin typeface="微软雅黑" pitchFamily="34" charset="0"/>
-                <a:ea typeface="微软雅黑" pitchFamily="34" charset="-122"/>
-                <a:cs typeface="微软雅黑" pitchFamily="34" charset="-120"/>
+                <a:latin typeface="微软雅黑" panose="020B0503020204020204" pitchFamily="34" charset="-122"/>
+                <a:ea typeface="微软雅黑" panose="020B0503020204020204" pitchFamily="34" charset="-122"/>
+                <a:cs typeface="微软雅黑" panose="020B0503020204020204" pitchFamily="34" charset="-120"/>
               </a:rPr>
               <a:t>6 / 9</a:t>
             </a:r>
@@ -8092,13 +7962,12 @@
             <a:avLst/>
           </a:prstGeom>
           <a:noFill/>
-          <a:ln/>
         </p:spPr>
         <p:txBody>
           <a:bodyPr wrap="square" rtlCol="0" anchor="ctr"/>
           <a:lstStyle/>
           <a:p>
-            <a:pPr algn="l" indent="0" marL="0">
+            <a:pPr marL="0" indent="0" algn="l">
               <a:buNone/>
             </a:pPr>
             <a:r>
@@ -8106,9 +7975,9 @@
                 <a:solidFill>
                   <a:srgbClr val="1F4E9C"/>
                 </a:solidFill>
-                <a:latin typeface="微软雅黑" pitchFamily="34" charset="0"/>
-                <a:ea typeface="微软雅黑" pitchFamily="34" charset="-122"/>
-                <a:cs typeface="微软雅黑" pitchFamily="34" charset="-120"/>
+                <a:latin typeface="微软雅黑" panose="020B0503020204020204" pitchFamily="34" charset="-122"/>
+                <a:ea typeface="微软雅黑" panose="020B0503020204020204" pitchFamily="34" charset="-122"/>
+                <a:cs typeface="微软雅黑" panose="020B0503020204020204" pitchFamily="34" charset="-120"/>
               </a:rPr>
               <a:t>有价值必做</a:t>
             </a:r>
@@ -8131,13 +8000,12 @@
             <a:avLst/>
           </a:prstGeom>
           <a:noFill/>
-          <a:ln/>
         </p:spPr>
         <p:txBody>
           <a:bodyPr wrap="square" rtlCol="0" anchor="ctr"/>
           <a:lstStyle/>
           <a:p>
-            <a:pPr algn="l" indent="0" marL="0">
+            <a:pPr marL="0" indent="0" algn="l">
               <a:buNone/>
             </a:pPr>
             <a:r>
@@ -8145,9 +8013,9 @@
                 <a:solidFill>
                   <a:srgbClr val="1F2329"/>
                 </a:solidFill>
-                <a:latin typeface="微软雅黑" pitchFamily="34" charset="0"/>
-                <a:ea typeface="微软雅黑" pitchFamily="34" charset="-122"/>
-                <a:cs typeface="微软雅黑" pitchFamily="34" charset="-120"/>
+                <a:latin typeface="微软雅黑" panose="020B0503020204020204" pitchFamily="34" charset="-122"/>
+                <a:ea typeface="微软雅黑" panose="020B0503020204020204" pitchFamily="34" charset="-122"/>
+                <a:cs typeface="微软雅黑" panose="020B0503020204020204" pitchFamily="34" charset="-120"/>
               </a:rPr>
               <a:t>必做题（4/4）</a:t>
             </a:r>
@@ -8161,17 +8029,11 @@
           <p:cNvGraphicFramePr>
             <a:graphicFrameLocks noGrp="1"/>
           </p:cNvGraphicFramePr>
-          <p:nvPr>
-            <p:extLst>
-              <p:ext uri="{D42A27DB-BD31-4B8C-83A1-F6EECF244321}">
-                <p14:modId xmlns:p14="http://schemas.microsoft.com/office/powerpoint/2010/main" val="1579011935"/>
-              </p:ext>
-            </p:extLst>
-          </p:nvPr>
+          <p:nvPr/>
         </p:nvGraphicFramePr>
         <p:xfrm>
           <a:off x="822960" y="2395728"/>
-          <a:ext cx="10545775" cy="914400"/>
+          <a:ext cx="10545775" cy="2944368"/>
         </p:xfrm>
         <a:graphic>
           <a:graphicData uri="http://schemas.openxmlformats.org/drawingml/2006/table">
@@ -8188,7 +8050,7 @@
                     <a:bodyPr/>
                     <a:lstStyle/>
                     <a:p>
-                      <a:pPr algn="l" indent="0" marL="0">
+                      <a:pPr marL="0" indent="0" algn="l">
                         <a:buNone/>
                       </a:pPr>
                       <a:r>
@@ -8196,20 +8058,20 @@
                           <a:solidFill>
                             <a:srgbClr val="1F4E9C"/>
                           </a:solidFill>
-                          <a:latin typeface="微软雅黑" pitchFamily="34" charset="0"/>
-                          <a:ea typeface="微软雅黑" pitchFamily="34" charset="-122"/>
-                          <a:cs typeface="微软雅黑" pitchFamily="34" charset="-120"/>
+                          <a:latin typeface="微软雅黑" panose="020B0503020204020204" pitchFamily="34" charset="-122"/>
+                          <a:ea typeface="微软雅黑" panose="020B0503020204020204" pitchFamily="34" charset="-122"/>
+                          <a:cs typeface="微软雅黑" panose="020B0503020204020204" pitchFamily="34" charset="-120"/>
                         </a:rPr>
                         <a:t>题号</a:t>
                       </a:r>
                       <a:endParaRPr lang="en-US" sz="1500" dirty="0">
-                        <a:latin typeface="微软雅黑" charset="0"/>
-                        <a:ea typeface="微软雅黑" charset="0"/>
-                        <a:cs typeface="微软雅黑" charset="0"/>
+                        <a:latin typeface="微软雅黑" panose="020B0503020204020204" pitchFamily="34" charset="-122"/>
+                        <a:ea typeface="微软雅黑" panose="020B0503020204020204" pitchFamily="34" charset="-122"/>
+                        <a:cs typeface="微软雅黑" panose="020B0503020204020204" pitchFamily="34" charset="-122"/>
                       </a:endParaRPr>
                     </a:p>
                   </a:txBody>
-                  <a:tcPr marL="91440" marR="91440" marT="45720" marB="45720" anchor="ctr">
+                  <a:tcPr anchor="ctr">
                     <a:lnL w="9525" cap="flat" cmpd="sng" algn="ctr">
                       <a:solidFill>
                         <a:srgbClr val="D8DBE0"/>
@@ -8256,7 +8118,7 @@
                     <a:bodyPr/>
                     <a:lstStyle/>
                     <a:p>
-                      <a:pPr algn="l" indent="0" marL="0">
+                      <a:pPr marL="0" indent="0" algn="l">
                         <a:buNone/>
                       </a:pPr>
                       <a:r>
@@ -8264,20 +8126,20 @@
                           <a:solidFill>
                             <a:srgbClr val="1F4E9C"/>
                           </a:solidFill>
-                          <a:latin typeface="微软雅黑" pitchFamily="34" charset="0"/>
-                          <a:ea typeface="微软雅黑" pitchFamily="34" charset="-122"/>
-                          <a:cs typeface="微软雅黑" pitchFamily="34" charset="-120"/>
+                          <a:latin typeface="微软雅黑" panose="020B0503020204020204" pitchFamily="34" charset="-122"/>
+                          <a:ea typeface="微软雅黑" panose="020B0503020204020204" pitchFamily="34" charset="-122"/>
+                          <a:cs typeface="微软雅黑" panose="020B0503020204020204" pitchFamily="34" charset="-120"/>
                         </a:rPr>
                         <a:t>考点</a:t>
                       </a:r>
                       <a:endParaRPr lang="en-US" sz="1500" dirty="0">
-                        <a:latin typeface="微软雅黑" charset="0"/>
-                        <a:ea typeface="微软雅黑" charset="0"/>
-                        <a:cs typeface="微软雅黑" charset="0"/>
+                        <a:latin typeface="微软雅黑" panose="020B0503020204020204" pitchFamily="34" charset="-122"/>
+                        <a:ea typeface="微软雅黑" panose="020B0503020204020204" pitchFamily="34" charset="-122"/>
+                        <a:cs typeface="微软雅黑" panose="020B0503020204020204" pitchFamily="34" charset="-122"/>
                       </a:endParaRPr>
                     </a:p>
                   </a:txBody>
-                  <a:tcPr marL="91440" marR="91440" marT="45720" marB="45720" anchor="ctr">
+                  <a:tcPr anchor="ctr">
                     <a:lnL w="9525" cap="flat" cmpd="sng" algn="ctr">
                       <a:solidFill>
                         <a:srgbClr val="D8DBE0"/>
@@ -8324,7 +8186,7 @@
                     <a:bodyPr/>
                     <a:lstStyle/>
                     <a:p>
-                      <a:pPr algn="l" indent="0" marL="0">
+                      <a:pPr marL="0" indent="0" algn="l">
                         <a:buNone/>
                       </a:pPr>
                       <a:r>
@@ -8332,20 +8194,20 @@
                           <a:solidFill>
                             <a:srgbClr val="1F4E9C"/>
                           </a:solidFill>
-                          <a:latin typeface="微软雅黑" pitchFamily="34" charset="0"/>
-                          <a:ea typeface="微软雅黑" pitchFamily="34" charset="-122"/>
-                          <a:cs typeface="微软雅黑" pitchFamily="34" charset="-120"/>
+                          <a:latin typeface="微软雅黑" panose="020B0503020204020204" pitchFamily="34" charset="-122"/>
+                          <a:ea typeface="微软雅黑" panose="020B0503020204020204" pitchFamily="34" charset="-122"/>
+                          <a:cs typeface="微软雅黑" panose="020B0503020204020204" pitchFamily="34" charset="-120"/>
                         </a:rPr>
                         <a:t>价值</a:t>
                       </a:r>
                       <a:endParaRPr lang="en-US" sz="1500" dirty="0">
-                        <a:latin typeface="微软雅黑" charset="0"/>
-                        <a:ea typeface="微软雅黑" charset="0"/>
-                        <a:cs typeface="微软雅黑" charset="0"/>
+                        <a:latin typeface="微软雅黑" panose="020B0503020204020204" pitchFamily="34" charset="-122"/>
+                        <a:ea typeface="微软雅黑" panose="020B0503020204020204" pitchFamily="34" charset="-122"/>
+                        <a:cs typeface="微软雅黑" panose="020B0503020204020204" pitchFamily="34" charset="-122"/>
                       </a:endParaRPr>
                     </a:p>
                   </a:txBody>
-                  <a:tcPr marL="91440" marR="91440" marT="45720" marB="45720" anchor="ctr">
+                  <a:tcPr anchor="ctr">
                     <a:lnL w="9525" cap="flat" cmpd="sng" algn="ctr">
                       <a:solidFill>
                         <a:srgbClr val="D8DBE0"/>
@@ -8394,7 +8256,7 @@
                     <a:bodyPr/>
                     <a:lstStyle/>
                     <a:p>
-                      <a:pPr algn="l" indent="0" marL="0">
+                      <a:pPr marL="0" indent="0" algn="l">
                         <a:buNone/>
                       </a:pPr>
                       <a:r>
@@ -8402,20 +8264,20 @@
                           <a:solidFill>
                             <a:srgbClr val="1F2329"/>
                           </a:solidFill>
-                          <a:latin typeface="微软雅黑" pitchFamily="34" charset="0"/>
-                          <a:ea typeface="微软雅黑" pitchFamily="34" charset="-122"/>
-                          <a:cs typeface="微软雅黑" pitchFamily="34" charset="-120"/>
+                          <a:latin typeface="微软雅黑" panose="020B0503020204020204" pitchFamily="34" charset="-122"/>
+                          <a:ea typeface="微软雅黑" panose="020B0503020204020204" pitchFamily="34" charset="-122"/>
+                          <a:cs typeface="微软雅黑" panose="020B0503020204020204" pitchFamily="34" charset="-120"/>
                         </a:rPr>
                         <a:t>10答12</a:t>
                       </a:r>
                       <a:endParaRPr lang="en-US" sz="1500" dirty="0">
-                        <a:latin typeface="微软雅黑" charset="0"/>
-                        <a:ea typeface="微软雅黑" charset="0"/>
-                        <a:cs typeface="微软雅黑" charset="0"/>
+                        <a:latin typeface="微软雅黑" panose="020B0503020204020204" pitchFamily="34" charset="-122"/>
+                        <a:ea typeface="微软雅黑" panose="020B0503020204020204" pitchFamily="34" charset="-122"/>
+                        <a:cs typeface="微软雅黑" panose="020B0503020204020204" pitchFamily="34" charset="-122"/>
                       </a:endParaRPr>
                     </a:p>
                   </a:txBody>
-                  <a:tcPr marL="91440" marR="91440" marT="45720" marB="45720" anchor="ctr">
+                  <a:tcPr anchor="ctr">
                     <a:lnL w="9525" cap="flat" cmpd="sng" algn="ctr">
                       <a:solidFill>
                         <a:srgbClr val="D8DBE0"/>
@@ -8462,7 +8324,7 @@
                     <a:bodyPr/>
                     <a:lstStyle/>
                     <a:p>
-                      <a:pPr algn="l" indent="0" marL="0">
+                      <a:pPr marL="0" indent="0" algn="l">
                         <a:buNone/>
                       </a:pPr>
                       <a:r>
@@ -8470,20 +8332,20 @@
                           <a:solidFill>
                             <a:srgbClr val="1F2329"/>
                           </a:solidFill>
-                          <a:latin typeface="微软雅黑" pitchFamily="34" charset="0"/>
-                          <a:ea typeface="微软雅黑" pitchFamily="34" charset="-122"/>
-                          <a:cs typeface="微软雅黑" pitchFamily="34" charset="-120"/>
+                          <a:latin typeface="微软雅黑" panose="020B0503020204020204" pitchFamily="34" charset="-122"/>
+                          <a:ea typeface="微软雅黑" panose="020B0503020204020204" pitchFamily="34" charset="-122"/>
+                          <a:cs typeface="微软雅黑" panose="020B0503020204020204" pitchFamily="34" charset="-120"/>
                         </a:rPr>
                         <a:t>判堆与调整</a:t>
                       </a:r>
                       <a:endParaRPr lang="en-US" sz="1500" dirty="0">
-                        <a:latin typeface="微软雅黑" charset="0"/>
-                        <a:ea typeface="微软雅黑" charset="0"/>
-                        <a:cs typeface="微软雅黑" charset="0"/>
+                        <a:latin typeface="微软雅黑" panose="020B0503020204020204" pitchFamily="34" charset="-122"/>
+                        <a:ea typeface="微软雅黑" panose="020B0503020204020204" pitchFamily="34" charset="-122"/>
+                        <a:cs typeface="微软雅黑" panose="020B0503020204020204" pitchFamily="34" charset="-122"/>
                       </a:endParaRPr>
                     </a:p>
                   </a:txBody>
-                  <a:tcPr marL="91440" marR="91440" marT="45720" marB="45720" anchor="ctr">
+                  <a:tcPr anchor="ctr">
                     <a:lnL w="9525" cap="flat" cmpd="sng" algn="ctr">
                       <a:solidFill>
                         <a:srgbClr val="D8DBE0"/>
@@ -8530,7 +8392,7 @@
                     <a:bodyPr/>
                     <a:lstStyle/>
                     <a:p>
-                      <a:pPr algn="l" indent="0" marL="0">
+                      <a:pPr marL="0" indent="0" algn="l">
                         <a:buNone/>
                       </a:pPr>
                       <a:r>
@@ -8538,20 +8400,20 @@
                           <a:solidFill>
                             <a:srgbClr val="1F2329"/>
                           </a:solidFill>
-                          <a:latin typeface="微软雅黑" pitchFamily="34" charset="0"/>
-                          <a:ea typeface="微软雅黑" pitchFamily="34" charset="-122"/>
-                          <a:cs typeface="微软雅黑" pitchFamily="34" charset="-120"/>
+                          <a:latin typeface="微软雅黑" panose="020B0503020204020204" pitchFamily="34" charset="-122"/>
+                          <a:ea typeface="微软雅黑" panose="020B0503020204020204" pitchFamily="34" charset="-122"/>
+                          <a:cs typeface="微软雅黑" panose="020B0503020204020204" pitchFamily="34" charset="-120"/>
                         </a:rPr>
                         <a:t>判别+调整为堆（交换最少），2024综合1(4)族</a:t>
                       </a:r>
                       <a:endParaRPr lang="en-US" sz="1500" dirty="0">
-                        <a:latin typeface="微软雅黑" charset="0"/>
-                        <a:ea typeface="微软雅黑" charset="0"/>
-                        <a:cs typeface="微软雅黑" charset="0"/>
+                        <a:latin typeface="微软雅黑" panose="020B0503020204020204" pitchFamily="34" charset="-122"/>
+                        <a:ea typeface="微软雅黑" panose="020B0503020204020204" pitchFamily="34" charset="-122"/>
+                        <a:cs typeface="微软雅黑" panose="020B0503020204020204" pitchFamily="34" charset="-122"/>
                       </a:endParaRPr>
                     </a:p>
                   </a:txBody>
-                  <a:tcPr marL="91440" marR="91440" marT="45720" marB="45720" anchor="ctr">
+                  <a:tcPr anchor="ctr">
                     <a:lnL w="9525" cap="flat" cmpd="sng" algn="ctr">
                       <a:solidFill>
                         <a:srgbClr val="D8DBE0"/>
@@ -8600,7 +8462,7 @@
                     <a:bodyPr/>
                     <a:lstStyle/>
                     <a:p>
-                      <a:pPr algn="l" indent="0" marL="0">
+                      <a:pPr marL="0" indent="0" algn="l">
                         <a:buNone/>
                       </a:pPr>
                       <a:r>
@@ -8608,20 +8470,20 @@
                           <a:solidFill>
                             <a:srgbClr val="1F2329"/>
                           </a:solidFill>
-                          <a:latin typeface="微软雅黑" pitchFamily="34" charset="0"/>
-                          <a:ea typeface="微软雅黑" pitchFamily="34" charset="-122"/>
-                          <a:cs typeface="微软雅黑" pitchFamily="34" charset="-120"/>
+                          <a:latin typeface="微软雅黑" panose="020B0503020204020204" pitchFamily="34" charset="-122"/>
+                          <a:ea typeface="微软雅黑" panose="020B0503020204020204" pitchFamily="34" charset="-122"/>
+                          <a:cs typeface="微软雅黑" panose="020B0503020204020204" pitchFamily="34" charset="-120"/>
                         </a:rPr>
                         <a:t>10答14</a:t>
                       </a:r>
                       <a:endParaRPr lang="en-US" sz="1500" dirty="0">
-                        <a:latin typeface="微软雅黑" charset="0"/>
-                        <a:ea typeface="微软雅黑" charset="0"/>
-                        <a:cs typeface="微软雅黑" charset="0"/>
+                        <a:latin typeface="微软雅黑" panose="020B0503020204020204" pitchFamily="34" charset="-122"/>
+                        <a:ea typeface="微软雅黑" panose="020B0503020204020204" pitchFamily="34" charset="-122"/>
+                        <a:cs typeface="微软雅黑" panose="020B0503020204020204" pitchFamily="34" charset="-122"/>
                       </a:endParaRPr>
                     </a:p>
                   </a:txBody>
-                  <a:tcPr marL="91440" marR="91440" marT="45720" marB="45720" anchor="ctr">
+                  <a:tcPr anchor="ctr">
                     <a:lnL w="9525" cap="flat" cmpd="sng" algn="ctr">
                       <a:solidFill>
                         <a:srgbClr val="D8DBE0"/>
@@ -8668,7 +8530,7 @@
                     <a:bodyPr/>
                     <a:lstStyle/>
                     <a:p>
-                      <a:pPr algn="l" indent="0" marL="0">
+                      <a:pPr marL="0" indent="0" algn="l">
                         <a:buNone/>
                       </a:pPr>
                       <a:r>
@@ -8676,20 +8538,20 @@
                           <a:solidFill>
                             <a:srgbClr val="1F2329"/>
                           </a:solidFill>
-                          <a:latin typeface="微软雅黑" pitchFamily="34" charset="0"/>
-                          <a:ea typeface="微软雅黑" pitchFamily="34" charset="-122"/>
-                          <a:cs typeface="微软雅黑" pitchFamily="34" charset="-120"/>
+                          <a:latin typeface="微软雅黑" panose="020B0503020204020204" pitchFamily="34" charset="-122"/>
+                          <a:ea typeface="微软雅黑" panose="020B0503020204020204" pitchFamily="34" charset="-122"/>
+                          <a:cs typeface="微软雅黑" panose="020B0503020204020204" pitchFamily="34" charset="-120"/>
                         </a:rPr>
                         <a:t>前k大最小比较</a:t>
                       </a:r>
                       <a:endParaRPr lang="en-US" sz="1500" dirty="0">
-                        <a:latin typeface="微软雅黑" charset="0"/>
-                        <a:ea typeface="微软雅黑" charset="0"/>
-                        <a:cs typeface="微软雅黑" charset="0"/>
+                        <a:latin typeface="微软雅黑" panose="020B0503020204020204" pitchFamily="34" charset="-122"/>
+                        <a:ea typeface="微软雅黑" panose="020B0503020204020204" pitchFamily="34" charset="-122"/>
+                        <a:cs typeface="微软雅黑" panose="020B0503020204020204" pitchFamily="34" charset="-122"/>
                       </a:endParaRPr>
                     </a:p>
                   </a:txBody>
-                  <a:tcPr marL="91440" marR="91440" marT="45720" marB="45720" anchor="ctr">
+                  <a:tcPr anchor="ctr">
                     <a:lnL w="9525" cap="flat" cmpd="sng" algn="ctr">
                       <a:solidFill>
                         <a:srgbClr val="D8DBE0"/>
@@ -8736,7 +8598,7 @@
                     <a:bodyPr/>
                     <a:lstStyle/>
                     <a:p>
-                      <a:pPr algn="l" indent="0" marL="0">
+                      <a:pPr marL="0" indent="0" algn="l">
                         <a:buNone/>
                       </a:pPr>
                       <a:r>
@@ -8744,20 +8606,20 @@
                           <a:solidFill>
                             <a:srgbClr val="1F2329"/>
                           </a:solidFill>
-                          <a:latin typeface="微软雅黑" pitchFamily="34" charset="0"/>
-                          <a:ea typeface="微软雅黑" pitchFamily="34" charset="-122"/>
-                          <a:cs typeface="微软雅黑" pitchFamily="34" charset="-120"/>
+                          <a:latin typeface="微软雅黑" panose="020B0503020204020204" pitchFamily="34" charset="-122"/>
+                          <a:ea typeface="微软雅黑" panose="020B0503020204020204" pitchFamily="34" charset="-122"/>
+                          <a:cs typeface="微软雅黑" panose="020B0503020204020204" pitchFamily="34" charset="-120"/>
                         </a:rPr>
                         <a:t>不排序选前k记录的最少比较，Top-K题型课大纲内容</a:t>
                       </a:r>
                       <a:endParaRPr lang="en-US" sz="1500" dirty="0">
-                        <a:latin typeface="微软雅黑" charset="0"/>
-                        <a:ea typeface="微软雅黑" charset="0"/>
-                        <a:cs typeface="微软雅黑" charset="0"/>
+                        <a:latin typeface="微软雅黑" panose="020B0503020204020204" pitchFamily="34" charset="-122"/>
+                        <a:ea typeface="微软雅黑" panose="020B0503020204020204" pitchFamily="34" charset="-122"/>
+                        <a:cs typeface="微软雅黑" panose="020B0503020204020204" pitchFamily="34" charset="-122"/>
                       </a:endParaRPr>
                     </a:p>
                   </a:txBody>
-                  <a:tcPr marL="91440" marR="91440" marT="45720" marB="45720" anchor="ctr">
+                  <a:tcPr anchor="ctr">
                     <a:lnL w="9525" cap="flat" cmpd="sng" algn="ctr">
                       <a:solidFill>
                         <a:srgbClr val="D8DBE0"/>
@@ -8806,7 +8668,7 @@
                     <a:bodyPr/>
                     <a:lstStyle/>
                     <a:p>
-                      <a:pPr algn="l" indent="0" marL="0">
+                      <a:pPr marL="0" indent="0" algn="l">
                         <a:buNone/>
                       </a:pPr>
                       <a:r>
@@ -8814,20 +8676,20 @@
                           <a:solidFill>
                             <a:srgbClr val="1F2329"/>
                           </a:solidFill>
-                          <a:latin typeface="微软雅黑" pitchFamily="34" charset="0"/>
-                          <a:ea typeface="微软雅黑" pitchFamily="34" charset="-122"/>
-                          <a:cs typeface="微软雅黑" pitchFamily="34" charset="-120"/>
+                          <a:latin typeface="微软雅黑" panose="020B0503020204020204" pitchFamily="34" charset="-122"/>
+                          <a:ea typeface="微软雅黑" panose="020B0503020204020204" pitchFamily="34" charset="-122"/>
+                          <a:cs typeface="微软雅黑" panose="020B0503020204020204" pitchFamily="34" charset="-120"/>
                         </a:rPr>
                         <a:t>10算11</a:t>
                       </a:r>
                       <a:endParaRPr lang="en-US" sz="1500" dirty="0">
-                        <a:latin typeface="微软雅黑" charset="0"/>
-                        <a:ea typeface="微软雅黑" charset="0"/>
-                        <a:cs typeface="微软雅黑" charset="0"/>
+                        <a:latin typeface="微软雅黑" panose="020B0503020204020204" pitchFamily="34" charset="-122"/>
+                        <a:ea typeface="微软雅黑" panose="020B0503020204020204" pitchFamily="34" charset="-122"/>
+                        <a:cs typeface="微软雅黑" panose="020B0503020204020204" pitchFamily="34" charset="-122"/>
                       </a:endParaRPr>
                     </a:p>
                   </a:txBody>
-                  <a:tcPr marL="91440" marR="91440" marT="45720" marB="45720" anchor="ctr">
+                  <a:tcPr anchor="ctr">
                     <a:lnL w="9525" cap="flat" cmpd="sng" algn="ctr">
                       <a:solidFill>
                         <a:srgbClr val="D8DBE0"/>
@@ -8874,7 +8736,7 @@
                     <a:bodyPr/>
                     <a:lstStyle/>
                     <a:p>
-                      <a:pPr algn="l" indent="0" marL="0">
+                      <a:pPr marL="0" indent="0" algn="l">
                         <a:buNone/>
                       </a:pPr>
                       <a:r>
@@ -8882,20 +8744,20 @@
                           <a:solidFill>
                             <a:srgbClr val="1F2329"/>
                           </a:solidFill>
-                          <a:latin typeface="微软雅黑" pitchFamily="34" charset="0"/>
-                          <a:ea typeface="微软雅黑" pitchFamily="34" charset="-122"/>
-                          <a:cs typeface="微软雅黑" pitchFamily="34" charset="-120"/>
+                          <a:latin typeface="微软雅黑" panose="020B0503020204020204" pitchFamily="34" charset="-122"/>
+                          <a:ea typeface="微软雅黑" panose="020B0503020204020204" pitchFamily="34" charset="-122"/>
+                          <a:cs typeface="微软雅黑" panose="020B0503020204020204" pitchFamily="34" charset="-120"/>
                         </a:rPr>
                         <a:t>单链表选择排序</a:t>
                       </a:r>
                       <a:endParaRPr lang="en-US" sz="1500" dirty="0">
-                        <a:latin typeface="微软雅黑" charset="0"/>
-                        <a:ea typeface="微软雅黑" charset="0"/>
-                        <a:cs typeface="微软雅黑" charset="0"/>
+                        <a:latin typeface="微软雅黑" panose="020B0503020204020204" pitchFamily="34" charset="-122"/>
+                        <a:ea typeface="微软雅黑" panose="020B0503020204020204" pitchFamily="34" charset="-122"/>
+                        <a:cs typeface="微软雅黑" panose="020B0503020204020204" pitchFamily="34" charset="-122"/>
                       </a:endParaRPr>
                     </a:p>
                   </a:txBody>
-                  <a:tcPr marL="91440" marR="91440" marT="45720" marB="45720" anchor="ctr">
+                  <a:tcPr anchor="ctr">
                     <a:lnL w="9525" cap="flat" cmpd="sng" algn="ctr">
                       <a:solidFill>
                         <a:srgbClr val="D8DBE0"/>
@@ -8942,7 +8804,7 @@
                     <a:bodyPr/>
                     <a:lstStyle/>
                     <a:p>
-                      <a:pPr algn="l" indent="0" marL="0">
+                      <a:pPr marL="0" indent="0" algn="l">
                         <a:buNone/>
                       </a:pPr>
                       <a:r>
@@ -8950,20 +8812,20 @@
                           <a:solidFill>
                             <a:srgbClr val="1F2329"/>
                           </a:solidFill>
-                          <a:latin typeface="微软雅黑" pitchFamily="34" charset="0"/>
-                          <a:ea typeface="微软雅黑" pitchFamily="34" charset="-122"/>
-                          <a:cs typeface="微软雅黑" pitchFamily="34" charset="-120"/>
+                          <a:latin typeface="微软雅黑" panose="020B0503020204020204" pitchFamily="34" charset="-122"/>
+                          <a:ea typeface="微软雅黑" panose="020B0503020204020204" pitchFamily="34" charset="-122"/>
+                          <a:cs typeface="微软雅黑" panose="020B0503020204020204" pitchFamily="34" charset="-120"/>
                         </a:rPr>
                         <a:t>单链表简单选择排序，2025程序阅读4原题</a:t>
                       </a:r>
                       <a:endParaRPr lang="en-US" sz="1500" dirty="0">
-                        <a:latin typeface="微软雅黑" charset="0"/>
-                        <a:ea typeface="微软雅黑" charset="0"/>
-                        <a:cs typeface="微软雅黑" charset="0"/>
+                        <a:latin typeface="微软雅黑" panose="020B0503020204020204" pitchFamily="34" charset="-122"/>
+                        <a:ea typeface="微软雅黑" panose="020B0503020204020204" pitchFamily="34" charset="-122"/>
+                        <a:cs typeface="微软雅黑" panose="020B0503020204020204" pitchFamily="34" charset="-122"/>
                       </a:endParaRPr>
                     </a:p>
                   </a:txBody>
-                  <a:tcPr marL="91440" marR="91440" marT="45720" marB="45720" anchor="ctr">
+                  <a:tcPr anchor="ctr">
                     <a:lnL w="9525" cap="flat" cmpd="sng" algn="ctr">
                       <a:solidFill>
                         <a:srgbClr val="D8DBE0"/>
@@ -9012,7 +8874,7 @@
                     <a:bodyPr/>
                     <a:lstStyle/>
                     <a:p>
-                      <a:pPr algn="l" indent="0" marL="0">
+                      <a:pPr marL="0" indent="0" algn="l">
                         <a:buNone/>
                       </a:pPr>
                       <a:r>
@@ -9020,20 +8882,20 @@
                           <a:solidFill>
                             <a:srgbClr val="1F2329"/>
                           </a:solidFill>
-                          <a:latin typeface="微软雅黑" pitchFamily="34" charset="0"/>
-                          <a:ea typeface="微软雅黑" pitchFamily="34" charset="-122"/>
-                          <a:cs typeface="微软雅黑" pitchFamily="34" charset="-120"/>
+                          <a:latin typeface="微软雅黑" panose="020B0503020204020204" pitchFamily="34" charset="-122"/>
+                          <a:ea typeface="微软雅黑" panose="020B0503020204020204" pitchFamily="34" charset="-122"/>
+                          <a:cs typeface="微软雅黑" panose="020B0503020204020204" pitchFamily="34" charset="-120"/>
                         </a:rPr>
                         <a:t>10算12</a:t>
                       </a:r>
                       <a:endParaRPr lang="en-US" sz="1500" dirty="0">
-                        <a:latin typeface="微软雅黑" charset="0"/>
-                        <a:ea typeface="微软雅黑" charset="0"/>
-                        <a:cs typeface="微软雅黑" charset="0"/>
+                        <a:latin typeface="微软雅黑" panose="020B0503020204020204" pitchFamily="34" charset="-122"/>
+                        <a:ea typeface="微软雅黑" panose="020B0503020204020204" pitchFamily="34" charset="-122"/>
+                        <a:cs typeface="微软雅黑" panose="020B0503020204020204" pitchFamily="34" charset="-122"/>
                       </a:endParaRPr>
                     </a:p>
                   </a:txBody>
-                  <a:tcPr marL="91440" marR="91440" marT="45720" marB="45720" anchor="ctr">
+                  <a:tcPr anchor="ctr">
                     <a:lnL w="9525" cap="flat" cmpd="sng" algn="ctr">
                       <a:solidFill>
                         <a:srgbClr val="D8DBE0"/>
@@ -9080,7 +8942,7 @@
                     <a:bodyPr/>
                     <a:lstStyle/>
                     <a:p>
-                      <a:pPr algn="l" indent="0" marL="0">
+                      <a:pPr marL="0" indent="0" algn="l">
                         <a:buNone/>
                       </a:pPr>
                       <a:r>
@@ -9088,20 +8950,20 @@
                           <a:solidFill>
                             <a:srgbClr val="1F2329"/>
                           </a:solidFill>
-                          <a:latin typeface="微软雅黑" pitchFamily="34" charset="0"/>
-                          <a:ea typeface="微软雅黑" pitchFamily="34" charset="-122"/>
-                          <a:cs typeface="微软雅黑" pitchFamily="34" charset="-120"/>
+                          <a:latin typeface="微软雅黑" panose="020B0503020204020204" pitchFamily="34" charset="-122"/>
+                          <a:ea typeface="微软雅黑" panose="020B0503020204020204" pitchFamily="34" charset="-122"/>
+                          <a:cs typeface="微软雅黑" panose="020B0503020204020204" pitchFamily="34" charset="-120"/>
                         </a:rPr>
                         <a:t>逐个插入建堆</a:t>
                       </a:r>
                       <a:endParaRPr lang="en-US" sz="1500" dirty="0">
-                        <a:latin typeface="微软雅黑" charset="0"/>
-                        <a:ea typeface="微软雅黑" charset="0"/>
-                        <a:cs typeface="微软雅黑" charset="0"/>
+                        <a:latin typeface="微软雅黑" panose="020B0503020204020204" pitchFamily="34" charset="-122"/>
+                        <a:ea typeface="微软雅黑" panose="020B0503020204020204" pitchFamily="34" charset="-122"/>
+                        <a:cs typeface="微软雅黑" panose="020B0503020204020204" pitchFamily="34" charset="-122"/>
                       </a:endParaRPr>
                     </a:p>
                   </a:txBody>
-                  <a:tcPr marL="91440" marR="91440" marT="45720" marB="45720" anchor="ctr">
+                  <a:tcPr anchor="ctr">
                     <a:lnL w="9525" cap="flat" cmpd="sng" algn="ctr">
                       <a:solidFill>
                         <a:srgbClr val="D8DBE0"/>
@@ -9148,7 +9010,7 @@
                     <a:bodyPr/>
                     <a:lstStyle/>
                     <a:p>
-                      <a:pPr algn="l" indent="0" marL="0">
+                      <a:pPr marL="0" indent="0" algn="l">
                         <a:buNone/>
                       </a:pPr>
                       <a:r>
@@ -9156,20 +9018,20 @@
                           <a:solidFill>
                             <a:srgbClr val="1F2329"/>
                           </a:solidFill>
-                          <a:latin typeface="微软雅黑" pitchFamily="34" charset="0"/>
-                          <a:ea typeface="微软雅黑" pitchFamily="34" charset="-122"/>
-                          <a:cs typeface="微软雅黑" pitchFamily="34" charset="-120"/>
+                          <a:latin typeface="微软雅黑" panose="020B0503020204020204" pitchFamily="34" charset="-122"/>
+                          <a:ea typeface="微软雅黑" panose="020B0503020204020204" pitchFamily="34" charset="-122"/>
+                          <a:cs typeface="微软雅黑" panose="020B0503020204020204" pitchFamily="34" charset="-120"/>
                         </a:rPr>
                         <a:t>O(log n)插入调整+建堆复杂度讨论，2026填15</a:t>
                       </a:r>
                       <a:endParaRPr lang="en-US" sz="1500" dirty="0">
-                        <a:latin typeface="微软雅黑" charset="0"/>
-                        <a:ea typeface="微软雅黑" charset="0"/>
-                        <a:cs typeface="微软雅黑" charset="0"/>
+                        <a:latin typeface="微软雅黑" panose="020B0503020204020204" pitchFamily="34" charset="-122"/>
+                        <a:ea typeface="微软雅黑" panose="020B0503020204020204" pitchFamily="34" charset="-122"/>
+                        <a:cs typeface="微软雅黑" panose="020B0503020204020204" pitchFamily="34" charset="-122"/>
                       </a:endParaRPr>
                     </a:p>
                   </a:txBody>
-                  <a:tcPr marL="91440" marR="91440" marT="45720" marB="45720" anchor="ctr">
+                  <a:tcPr anchor="ctr">
                     <a:lnL w="9525" cap="flat" cmpd="sng" algn="ctr">
                       <a:solidFill>
                         <a:srgbClr val="D8DBE0"/>
@@ -9218,7 +9080,7 @@
                     <a:bodyPr/>
                     <a:lstStyle/>
                     <a:p>
-                      <a:pPr algn="l" indent="0" marL="0">
+                      <a:pPr marL="0" indent="0" algn="l">
                         <a:buNone/>
                       </a:pPr>
                       <a:r>
@@ -9226,20 +9088,20 @@
                           <a:solidFill>
                             <a:srgbClr val="1F2329"/>
                           </a:solidFill>
-                          <a:latin typeface="微软雅黑" pitchFamily="34" charset="0"/>
-                          <a:ea typeface="微软雅黑" pitchFamily="34" charset="-122"/>
-                          <a:cs typeface="微软雅黑" pitchFamily="34" charset="-120"/>
+                          <a:latin typeface="微软雅黑" panose="020B0503020204020204" pitchFamily="34" charset="-122"/>
+                          <a:ea typeface="微软雅黑" panose="020B0503020204020204" pitchFamily="34" charset="-122"/>
+                          <a:cs typeface="微软雅黑" panose="020B0503020204020204" pitchFamily="34" charset="-120"/>
                         </a:rPr>
                         <a:t>10算14</a:t>
                       </a:r>
                       <a:endParaRPr lang="en-US" sz="1500" dirty="0">
-                        <a:latin typeface="微软雅黑" charset="0"/>
-                        <a:ea typeface="微软雅黑" charset="0"/>
-                        <a:cs typeface="微软雅黑" charset="0"/>
+                        <a:latin typeface="微软雅黑" panose="020B0503020204020204" pitchFamily="34" charset="-122"/>
+                        <a:ea typeface="微软雅黑" panose="020B0503020204020204" pitchFamily="34" charset="-122"/>
+                        <a:cs typeface="微软雅黑" panose="020B0503020204020204" pitchFamily="34" charset="-122"/>
                       </a:endParaRPr>
                     </a:p>
                   </a:txBody>
-                  <a:tcPr marL="91440" marR="91440" marT="45720" marB="45720" anchor="ctr">
+                  <a:tcPr anchor="ctr">
                     <a:lnL w="9525" cap="flat" cmpd="sng" algn="ctr">
                       <a:solidFill>
                         <a:srgbClr val="D8DBE0"/>
@@ -9286,7 +9148,7 @@
                     <a:bodyPr/>
                     <a:lstStyle/>
                     <a:p>
-                      <a:pPr algn="l" indent="0" marL="0">
+                      <a:pPr marL="0" indent="0" algn="l">
                         <a:buNone/>
                       </a:pPr>
                       <a:r>
@@ -9294,20 +9156,20 @@
                           <a:solidFill>
                             <a:srgbClr val="1F2329"/>
                           </a:solidFill>
-                          <a:latin typeface="微软雅黑" pitchFamily="34" charset="0"/>
-                          <a:ea typeface="微软雅黑" pitchFamily="34" charset="-122"/>
-                          <a:cs typeface="微软雅黑" pitchFamily="34" charset="-120"/>
+                          <a:latin typeface="微软雅黑" panose="020B0503020204020204" pitchFamily="34" charset="-122"/>
+                          <a:ea typeface="微软雅黑" panose="020B0503020204020204" pitchFamily="34" charset="-122"/>
+                          <a:cs typeface="微软雅黑" panose="020B0503020204020204" pitchFamily="34" charset="-120"/>
                         </a:rPr>
                         <a:t>链表归并排序</a:t>
                       </a:r>
                       <a:endParaRPr lang="en-US" sz="1500" dirty="0">
-                        <a:latin typeface="微软雅黑" charset="0"/>
-                        <a:ea typeface="微软雅黑" charset="0"/>
-                        <a:cs typeface="微软雅黑" charset="0"/>
+                        <a:latin typeface="微软雅黑" panose="020B0503020204020204" pitchFamily="34" charset="-122"/>
+                        <a:ea typeface="微软雅黑" panose="020B0503020204020204" pitchFamily="34" charset="-122"/>
+                        <a:cs typeface="微软雅黑" panose="020B0503020204020204" pitchFamily="34" charset="-122"/>
                       </a:endParaRPr>
                     </a:p>
                   </a:txBody>
-                  <a:tcPr marL="91440" marR="91440" marT="45720" marB="45720" anchor="ctr">
+                  <a:tcPr anchor="ctr">
                     <a:lnL w="9525" cap="flat" cmpd="sng" algn="ctr">
                       <a:solidFill>
                         <a:srgbClr val="D8DBE0"/>
@@ -9354,7 +9216,7 @@
                     <a:bodyPr/>
                     <a:lstStyle/>
                     <a:p>
-                      <a:pPr algn="l" indent="0" marL="0">
+                      <a:pPr marL="0" indent="0" algn="l">
                         <a:buNone/>
                       </a:pPr>
                       <a:r>
@@ -9362,20 +9224,20 @@
                           <a:solidFill>
                             <a:srgbClr val="1F2329"/>
                           </a:solidFill>
-                          <a:latin typeface="微软雅黑" pitchFamily="34" charset="0"/>
-                          <a:ea typeface="微软雅黑" pitchFamily="34" charset="-122"/>
-                          <a:cs typeface="微软雅黑" pitchFamily="34" charset="-120"/>
+                          <a:latin typeface="微软雅黑" panose="020B0503020204020204" pitchFamily="34" charset="-122"/>
+                          <a:ea typeface="微软雅黑" panose="020B0503020204020204" pitchFamily="34" charset="-122"/>
+                          <a:cs typeface="微软雅黑" panose="020B0503020204020204" pitchFamily="34" charset="-120"/>
                         </a:rPr>
                         <a:t>单链表递归归并，归并模板+链表（2024阅读3链表归并族）</a:t>
                       </a:r>
                       <a:endParaRPr lang="en-US" sz="1500" dirty="0">
-                        <a:latin typeface="微软雅黑" charset="0"/>
-                        <a:ea typeface="微软雅黑" charset="0"/>
-                        <a:cs typeface="微软雅黑" charset="0"/>
+                        <a:latin typeface="微软雅黑" panose="020B0503020204020204" pitchFamily="34" charset="-122"/>
+                        <a:ea typeface="微软雅黑" panose="020B0503020204020204" pitchFamily="34" charset="-122"/>
+                        <a:cs typeface="微软雅黑" panose="020B0503020204020204" pitchFamily="34" charset="-122"/>
                       </a:endParaRPr>
                     </a:p>
                   </a:txBody>
-                  <a:tcPr marL="91440" marR="91440" marT="45720" marB="45720" anchor="ctr">
+                  <a:tcPr anchor="ctr">
                     <a:lnL w="9525" cap="flat" cmpd="sng" algn="ctr">
                       <a:solidFill>
                         <a:srgbClr val="D8DBE0"/>
@@ -9424,7 +9286,7 @@
                     <a:bodyPr/>
                     <a:lstStyle/>
                     <a:p>
-                      <a:pPr algn="l" indent="0" marL="0">
+                      <a:pPr marL="0" indent="0" algn="l">
                         <a:buNone/>
                       </a:pPr>
                       <a:r>
@@ -9432,20 +9294,20 @@
                           <a:solidFill>
                             <a:srgbClr val="1F2329"/>
                           </a:solidFill>
-                          <a:latin typeface="微软雅黑" pitchFamily="34" charset="0"/>
-                          <a:ea typeface="微软雅黑" pitchFamily="34" charset="-122"/>
-                          <a:cs typeface="微软雅黑" pitchFamily="34" charset="-120"/>
+                          <a:latin typeface="微软雅黑" panose="020B0503020204020204" pitchFamily="34" charset="-122"/>
+                          <a:ea typeface="微软雅黑" panose="020B0503020204020204" pitchFamily="34" charset="-122"/>
+                          <a:cs typeface="微软雅黑" panose="020B0503020204020204" pitchFamily="34" charset="-120"/>
                         </a:rPr>
                         <a:t>10算26</a:t>
                       </a:r>
                       <a:endParaRPr lang="en-US" sz="1500" dirty="0">
-                        <a:latin typeface="微软雅黑" charset="0"/>
-                        <a:ea typeface="微软雅黑" charset="0"/>
-                        <a:cs typeface="微软雅黑" charset="0"/>
+                        <a:latin typeface="微软雅黑" panose="020B0503020204020204" pitchFamily="34" charset="-122"/>
+                        <a:ea typeface="微软雅黑" panose="020B0503020204020204" pitchFamily="34" charset="-122"/>
+                        <a:cs typeface="微软雅黑" panose="020B0503020204020204" pitchFamily="34" charset="-122"/>
                       </a:endParaRPr>
                     </a:p>
                   </a:txBody>
-                  <a:tcPr marL="91440" marR="91440" marT="45720" marB="45720" anchor="ctr">
+                  <a:tcPr anchor="ctr">
                     <a:lnL w="9525" cap="flat" cmpd="sng" algn="ctr">
                       <a:solidFill>
                         <a:srgbClr val="D8DBE0"/>
@@ -9492,7 +9354,7 @@
                     <a:bodyPr/>
                     <a:lstStyle/>
                     <a:p>
-                      <a:pPr algn="l" indent="0" marL="0">
+                      <a:pPr marL="0" indent="0" algn="l">
                         <a:buNone/>
                       </a:pPr>
                       <a:r>
@@ -9500,20 +9362,20 @@
                           <a:solidFill>
                             <a:srgbClr val="1F2329"/>
                           </a:solidFill>
-                          <a:latin typeface="微软雅黑" pitchFamily="34" charset="0"/>
-                          <a:ea typeface="微软雅黑" pitchFamily="34" charset="-122"/>
-                          <a:cs typeface="微软雅黑" pitchFamily="34" charset="-120"/>
+                          <a:latin typeface="微软雅黑" panose="020B0503020204020204" pitchFamily="34" charset="-122"/>
+                          <a:ea typeface="微软雅黑" panose="020B0503020204020204" pitchFamily="34" charset="-122"/>
+                          <a:cs typeface="微软雅黑" panose="020B0503020204020204" pitchFamily="34" charset="-120"/>
                         </a:rPr>
                         <a:t>有序数组合并</a:t>
                       </a:r>
                       <a:endParaRPr lang="en-US" sz="1500" dirty="0">
-                        <a:latin typeface="微软雅黑" charset="0"/>
-                        <a:ea typeface="微软雅黑" charset="0"/>
-                        <a:cs typeface="微软雅黑" charset="0"/>
+                        <a:latin typeface="微软雅黑" panose="020B0503020204020204" pitchFamily="34" charset="-122"/>
+                        <a:ea typeface="微软雅黑" panose="020B0503020204020204" pitchFamily="34" charset="-122"/>
+                        <a:cs typeface="微软雅黑" panose="020B0503020204020204" pitchFamily="34" charset="-122"/>
                       </a:endParaRPr>
                     </a:p>
                   </a:txBody>
-                  <a:tcPr marL="91440" marR="91440" marT="45720" marB="45720" anchor="ctr">
+                  <a:tcPr anchor="ctr">
                     <a:lnL w="9525" cap="flat" cmpd="sng" algn="ctr">
                       <a:solidFill>
                         <a:srgbClr val="D8DBE0"/>
@@ -9560,7 +9422,7 @@
                     <a:bodyPr/>
                     <a:lstStyle/>
                     <a:p>
-                      <a:pPr algn="l" indent="0" marL="0">
+                      <a:pPr marL="0" indent="0" algn="l">
                         <a:buNone/>
                       </a:pPr>
                       <a:r>
@@ -9568,20 +9430,20 @@
                           <a:solidFill>
                             <a:srgbClr val="1F2329"/>
                           </a:solidFill>
-                          <a:latin typeface="微软雅黑" pitchFamily="34" charset="0"/>
-                          <a:ea typeface="微软雅黑" pitchFamily="34" charset="-122"/>
-                          <a:cs typeface="微软雅黑" pitchFamily="34" charset="-120"/>
+                          <a:latin typeface="微软雅黑" panose="020B0503020204020204" pitchFamily="34" charset="-122"/>
+                          <a:ea typeface="微软雅黑" panose="020B0503020204020204" pitchFamily="34" charset="-122"/>
+                          <a:cs typeface="微软雅黑" panose="020B0503020204020204" pitchFamily="34" charset="-120"/>
                         </a:rPr>
                         <a:t>A(m+n)/B(n)两有序数组原地合并，Merge模板标准变式</a:t>
                       </a:r>
                       <a:endParaRPr lang="en-US" sz="1500" dirty="0">
-                        <a:latin typeface="微软雅黑" charset="0"/>
-                        <a:ea typeface="微软雅黑" charset="0"/>
-                        <a:cs typeface="微软雅黑" charset="0"/>
+                        <a:latin typeface="微软雅黑" panose="020B0503020204020204" pitchFamily="34" charset="-122"/>
+                        <a:ea typeface="微软雅黑" panose="020B0503020204020204" pitchFamily="34" charset="-122"/>
+                        <a:cs typeface="微软雅黑" panose="020B0503020204020204" pitchFamily="34" charset="-122"/>
                       </a:endParaRPr>
                     </a:p>
                   </a:txBody>
-                  <a:tcPr marL="91440" marR="91440" marT="45720" marB="45720" anchor="ctr">
+                  <a:tcPr anchor="ctr">
                     <a:lnL w="9525" cap="flat" cmpd="sng" algn="ctr">
                       <a:solidFill>
                         <a:srgbClr val="D8DBE0"/>
@@ -9638,7 +9500,7 @@
 
 <file path=ppt/slides/slide7.xml><?xml version="1.0" encoding="utf-8"?>
 <p:sld xmlns:a="http://schemas.openxmlformats.org/drawingml/2006/main" xmlns:r="http://schemas.openxmlformats.org/officeDocument/2006/relationships" xmlns:p="http://schemas.openxmlformats.org/presentationml/2006/main">
-  <p:cSld name="Slide 7">
+  <p:cSld>
     <p:bg>
       <p:bgPr>
         <a:blipFill dpi="0" rotWithShape="1">
@@ -9682,13 +9544,12 @@
             <a:avLst/>
           </a:prstGeom>
           <a:noFill/>
-          <a:ln/>
         </p:spPr>
         <p:txBody>
           <a:bodyPr wrap="square" rtlCol="0" anchor="ctr"/>
           <a:lstStyle/>
           <a:p>
-            <a:pPr algn="r" indent="0" marL="0">
+            <a:pPr marL="0" indent="0" algn="r">
               <a:buNone/>
             </a:pPr>
             <a:r>
@@ -9696,11 +9557,11 @@
                 <a:solidFill>
                   <a:srgbClr val="8A9099"/>
                 </a:solidFill>
-                <a:latin typeface="微软雅黑" pitchFamily="34" charset="0"/>
-                <a:ea typeface="微软雅黑" pitchFamily="34" charset="-122"/>
-                <a:cs typeface="微软雅黑" pitchFamily="34" charset="-120"/>
+                <a:latin typeface="微软雅黑" panose="020B0503020204020204" pitchFamily="34" charset="-122"/>
+                <a:ea typeface="微软雅黑" panose="020B0503020204020204" pitchFamily="34" charset="-122"/>
+                <a:cs typeface="微软雅黑" panose="020B0503020204020204" pitchFamily="34" charset="-120"/>
               </a:rPr>
-              <a:t>7 / 9</a:t>
+              <a:t>8 / 9</a:t>
             </a:r>
             <a:endParaRPr lang="en-US" sz="1000" dirty="0"/>
           </a:p>
@@ -9721,13 +9582,12 @@
             <a:avLst/>
           </a:prstGeom>
           <a:noFill/>
-          <a:ln/>
         </p:spPr>
         <p:txBody>
           <a:bodyPr wrap="square" rtlCol="0" anchor="ctr"/>
           <a:lstStyle/>
           <a:p>
-            <a:pPr algn="l" indent="0" marL="0">
+            <a:pPr marL="0" indent="0" algn="l">
               <a:buNone/>
             </a:pPr>
             <a:r>
@@ -9735,11 +9595,11 @@
                 <a:solidFill>
                   <a:srgbClr val="1F4E9C"/>
                 </a:solidFill>
-                <a:latin typeface="微软雅黑" pitchFamily="34" charset="0"/>
-                <a:ea typeface="微软雅黑" pitchFamily="34" charset="-122"/>
-                <a:cs typeface="微软雅黑" pitchFamily="34" charset="-120"/>
+                <a:latin typeface="微软雅黑" panose="020B0503020204020204" pitchFamily="34" charset="-122"/>
+                <a:ea typeface="微软雅黑" panose="020B0503020204020204" pitchFamily="34" charset="-122"/>
+                <a:cs typeface="微软雅黑" panose="020B0503020204020204" pitchFamily="34" charset="-120"/>
               </a:rPr>
-              <a:t>可做可不做</a:t>
+              <a:t>完全不做</a:t>
             </a:r>
             <a:endParaRPr lang="en-US" sz="1400" dirty="0"/>
           </a:p>
@@ -9760,13 +9620,12 @@
             <a:avLst/>
           </a:prstGeom>
           <a:noFill/>
-          <a:ln/>
         </p:spPr>
         <p:txBody>
           <a:bodyPr wrap="square" rtlCol="0" anchor="ctr"/>
           <a:lstStyle/>
           <a:p>
-            <a:pPr algn="l" indent="0" marL="0">
+            <a:pPr marL="0" indent="0" algn="l">
               <a:buNone/>
             </a:pPr>
             <a:r>
@@ -9774,11 +9633,11 @@
                 <a:solidFill>
                   <a:srgbClr val="1F2329"/>
                 </a:solidFill>
-                <a:latin typeface="微软雅黑" pitchFamily="34" charset="0"/>
-                <a:ea typeface="微软雅黑" pitchFamily="34" charset="-122"/>
-                <a:cs typeface="微软雅黑" pitchFamily="34" charset="-120"/>
+                <a:latin typeface="微软雅黑" panose="020B0503020204020204" pitchFamily="34" charset="-122"/>
+                <a:ea typeface="微软雅黑" panose="020B0503020204020204" pitchFamily="34" charset="-122"/>
+                <a:cs typeface="微软雅黑" panose="020B0503020204020204" pitchFamily="34" charset="-120"/>
               </a:rPr>
-              <a:t>可做可不做清单</a:t>
+              <a:t>完全不做清单</a:t>
             </a:r>
             <a:endParaRPr lang="en-US" sz="2800" dirty="0"/>
           </a:p>
@@ -9786,21 +9645,15 @@
       </p:sp>
       <p:graphicFrame>
         <p:nvGraphicFramePr>
-          <p:cNvPr id="8" name="Table 0"/>
+          <p:cNvPr id="9" name="Table 0"/>
           <p:cNvGraphicFramePr>
             <a:graphicFrameLocks noGrp="1"/>
           </p:cNvGraphicFramePr>
-          <p:nvPr>
-            <p:extLst>
-              <p:ext uri="{D42A27DB-BD31-4B8C-83A1-F6EECF244321}">
-                <p14:modId xmlns:p14="http://schemas.microsoft.com/office/powerpoint/2010/main" val="1579011935"/>
-              </p:ext>
-            </p:extLst>
-          </p:nvPr>
+          <p:nvPr/>
         </p:nvGraphicFramePr>
         <p:xfrm>
           <a:off x="822960" y="2395728"/>
-          <a:ext cx="10545775" cy="914400"/>
+          <a:ext cx="10545775" cy="2103120"/>
         </p:xfrm>
         <a:graphic>
           <a:graphicData uri="http://schemas.openxmlformats.org/drawingml/2006/table">
@@ -9816,7 +9669,7 @@
                     <a:bodyPr/>
                     <a:lstStyle/>
                     <a:p>
-                      <a:pPr algn="l" indent="0" marL="0">
+                      <a:pPr marL="0" indent="0" algn="l">
                         <a:buNone/>
                       </a:pPr>
                       <a:r>
@@ -9824,20 +9677,20 @@
                           <a:solidFill>
                             <a:srgbClr val="1F4E9C"/>
                           </a:solidFill>
-                          <a:latin typeface="微软雅黑" pitchFamily="34" charset="0"/>
-                          <a:ea typeface="微软雅黑" pitchFamily="34" charset="-122"/>
-                          <a:cs typeface="微软雅黑" pitchFamily="34" charset="-120"/>
+                          <a:latin typeface="微软雅黑" panose="020B0503020204020204" pitchFamily="34" charset="-122"/>
+                          <a:ea typeface="微软雅黑" panose="020B0503020204020204" pitchFamily="34" charset="-122"/>
+                          <a:cs typeface="微软雅黑" panose="020B0503020204020204" pitchFamily="34" charset="-120"/>
                         </a:rPr>
-                        <a:t>分组</a:t>
+                        <a:t>内容</a:t>
                       </a:r>
                       <a:endParaRPr lang="en-US" sz="1500" dirty="0">
-                        <a:latin typeface="微软雅黑" charset="0"/>
-                        <a:ea typeface="微软雅黑" charset="0"/>
-                        <a:cs typeface="微软雅黑" charset="0"/>
+                        <a:latin typeface="微软雅黑" panose="020B0503020204020204" pitchFamily="34" charset="-122"/>
+                        <a:ea typeface="微软雅黑" panose="020B0503020204020204" pitchFamily="34" charset="-122"/>
+                        <a:cs typeface="微软雅黑" panose="020B0503020204020204" pitchFamily="34" charset="-122"/>
                       </a:endParaRPr>
                     </a:p>
                   </a:txBody>
-                  <a:tcPr marL="91440" marR="91440" marT="45720" marB="45720" anchor="ctr">
+                  <a:tcPr anchor="ctr">
                     <a:lnL w="9525" cap="flat" cmpd="sng" algn="ctr">
                       <a:solidFill>
                         <a:srgbClr val="D8DBE0"/>
@@ -9884,7 +9737,7 @@
                     <a:bodyPr/>
                     <a:lstStyle/>
                     <a:p>
-                      <a:pPr algn="l" indent="0" marL="0">
+                      <a:pPr marL="0" indent="0" algn="l">
                         <a:buNone/>
                       </a:pPr>
                       <a:r>
@@ -9892,20 +9745,20 @@
                           <a:solidFill>
                             <a:srgbClr val="1F4E9C"/>
                           </a:solidFill>
-                          <a:latin typeface="微软雅黑" pitchFamily="34" charset="0"/>
-                          <a:ea typeface="微软雅黑" pitchFamily="34" charset="-122"/>
-                          <a:cs typeface="微软雅黑" pitchFamily="34" charset="-120"/>
+                          <a:latin typeface="微软雅黑" panose="020B0503020204020204" pitchFamily="34" charset="-122"/>
+                          <a:ea typeface="微软雅黑" panose="020B0503020204020204" pitchFamily="34" charset="-122"/>
+                          <a:cs typeface="微软雅黑" panose="020B0503020204020204" pitchFamily="34" charset="-120"/>
                         </a:rPr>
                         <a:t>题号</a:t>
                       </a:r>
                       <a:endParaRPr lang="en-US" sz="1500" dirty="0">
-                        <a:latin typeface="微软雅黑" charset="0"/>
-                        <a:ea typeface="微软雅黑" charset="0"/>
-                        <a:cs typeface="微软雅黑" charset="0"/>
+                        <a:latin typeface="微软雅黑" panose="020B0503020204020204" pitchFamily="34" charset="-122"/>
+                        <a:ea typeface="微软雅黑" panose="020B0503020204020204" pitchFamily="34" charset="-122"/>
+                        <a:cs typeface="微软雅黑" panose="020B0503020204020204" pitchFamily="34" charset="-122"/>
                       </a:endParaRPr>
                     </a:p>
                   </a:txBody>
-                  <a:tcPr marL="91440" marR="91440" marT="45720" marB="45720" anchor="ctr">
+                  <a:tcPr anchor="ctr">
                     <a:lnL w="9525" cap="flat" cmpd="sng" algn="ctr">
                       <a:solidFill>
                         <a:srgbClr val="D8DBE0"/>
@@ -9954,7 +9807,7 @@
                     <a:bodyPr/>
                     <a:lstStyle/>
                     <a:p>
-                      <a:pPr algn="l" indent="0" marL="0">
+                      <a:pPr marL="0" indent="0" algn="l">
                         <a:buNone/>
                       </a:pPr>
                       <a:r>
@@ -9962,20 +9815,20 @@
                           <a:solidFill>
                             <a:srgbClr val="1F2329"/>
                           </a:solidFill>
-                          <a:latin typeface="微软雅黑" pitchFamily="34" charset="0"/>
-                          <a:ea typeface="微软雅黑" pitchFamily="34" charset="-122"/>
-                          <a:cs typeface="微软雅黑" pitchFamily="34" charset="-120"/>
+                          <a:latin typeface="微软雅黑" panose="020B0503020204020204" pitchFamily="34" charset="-122"/>
+                          <a:ea typeface="微软雅黑" panose="020B0503020204020204" pitchFamily="34" charset="-122"/>
+                          <a:cs typeface="微软雅黑" panose="020B0503020204020204" pitchFamily="34" charset="-120"/>
                         </a:rPr>
-                        <a:t>选择题：排序性能比较（各排序最好最坏复杂度、…</a:t>
+                        <a:t>证明与推导题</a:t>
                       </a:r>
                       <a:endParaRPr lang="en-US" sz="1500" dirty="0">
-                        <a:latin typeface="微软雅黑" charset="0"/>
-                        <a:ea typeface="微软雅黑" charset="0"/>
-                        <a:cs typeface="微软雅黑" charset="0"/>
+                        <a:latin typeface="微软雅黑" panose="020B0503020204020204" pitchFamily="34" charset="-122"/>
+                        <a:ea typeface="微软雅黑" panose="020B0503020204020204" pitchFamily="34" charset="-122"/>
+                        <a:cs typeface="微软雅黑" panose="020B0503020204020204" pitchFamily="34" charset="-122"/>
                       </a:endParaRPr>
                     </a:p>
                   </a:txBody>
-                  <a:tcPr marL="91440" marR="91440" marT="45720" marB="45720" anchor="ctr">
+                  <a:tcPr anchor="ctr">
                     <a:lnL w="9525" cap="flat" cmpd="sng" algn="ctr">
                       <a:solidFill>
                         <a:srgbClr val="D8DBE0"/>
@@ -10022,7 +9875,7 @@
                     <a:bodyPr/>
                     <a:lstStyle/>
                     <a:p>
-                      <a:pPr algn="l" indent="0" marL="0">
+                      <a:pPr marL="0" indent="0" algn="l">
                         <a:buNone/>
                       </a:pPr>
                       <a:r>
@@ -10030,20 +9883,20 @@
                           <a:solidFill>
                             <a:srgbClr val="1F2329"/>
                           </a:solidFill>
-                          <a:latin typeface="微软雅黑" pitchFamily="34" charset="0"/>
-                          <a:ea typeface="微软雅黑" pitchFamily="34" charset="-122"/>
-                          <a:cs typeface="微软雅黑" pitchFamily="34" charset="-120"/>
+                          <a:latin typeface="微软雅黑" panose="020B0503020204020204" pitchFamily="34" charset="-122"/>
+                          <a:ea typeface="微软雅黑" panose="020B0503020204020204" pitchFamily="34" charset="-122"/>
+                          <a:cs typeface="微软雅黑" panose="020B0503020204020204" pitchFamily="34" charset="-120"/>
                         </a:rPr>
-                        <a:t>选1—14、16、17、19、20、26、28…</a:t>
+                        <a:t>答8</a:t>
                       </a:r>
                       <a:endParaRPr lang="en-US" sz="1500" dirty="0">
-                        <a:latin typeface="微软雅黑" charset="0"/>
-                        <a:ea typeface="微软雅黑" charset="0"/>
-                        <a:cs typeface="微软雅黑" charset="0"/>
+                        <a:latin typeface="微软雅黑" panose="020B0503020204020204" pitchFamily="34" charset="-122"/>
+                        <a:ea typeface="微软雅黑" panose="020B0503020204020204" pitchFamily="34" charset="-122"/>
+                        <a:cs typeface="微软雅黑" panose="020B0503020204020204" pitchFamily="34" charset="-122"/>
                       </a:endParaRPr>
                     </a:p>
                   </a:txBody>
-                  <a:tcPr marL="91440" marR="91440" marT="45720" marB="45720" anchor="ctr">
+                  <a:tcPr anchor="ctr">
                     <a:lnL w="9525" cap="flat" cmpd="sng" algn="ctr">
                       <a:solidFill>
                         <a:srgbClr val="D8DBE0"/>
@@ -10092,7 +9945,7 @@
                     <a:bodyPr/>
                     <a:lstStyle/>
                     <a:p>
-                      <a:pPr algn="l" indent="0" marL="0">
+                      <a:pPr marL="0" indent="0" algn="l">
                         <a:buNone/>
                       </a:pPr>
                       <a:r>
@@ -10100,20 +9953,20 @@
                           <a:solidFill>
                             <a:srgbClr val="1F2329"/>
                           </a:solidFill>
-                          <a:latin typeface="微软雅黑" pitchFamily="34" charset="0"/>
-                          <a:ea typeface="微软雅黑" pitchFamily="34" charset="-122"/>
-                          <a:cs typeface="微软雅黑" pitchFamily="34" charset="-120"/>
+                          <a:latin typeface="微软雅黑" panose="020B0503020204020204" pitchFamily="34" charset="-122"/>
+                          <a:ea typeface="微软雅黑" panose="020B0503020204020204" pitchFamily="34" charset="-122"/>
+                          <a:cs typeface="微软雅黑" panose="020B0503020204020204" pitchFamily="34" charset="-120"/>
                         </a:rPr>
-                        <a:t>（续）</a:t>
+                        <a:t>锦标赛排序</a:t>
                       </a:r>
                       <a:endParaRPr lang="en-US" sz="1500" dirty="0">
-                        <a:latin typeface="微软雅黑" charset="0"/>
-                        <a:ea typeface="微软雅黑" charset="0"/>
-                        <a:cs typeface="微软雅黑" charset="0"/>
+                        <a:latin typeface="微软雅黑" panose="020B0503020204020204" pitchFamily="34" charset="-122"/>
+                        <a:ea typeface="微软雅黑" panose="020B0503020204020204" pitchFamily="34" charset="-122"/>
+                        <a:cs typeface="微软雅黑" panose="020B0503020204020204" pitchFamily="34" charset="-122"/>
                       </a:endParaRPr>
                     </a:p>
                   </a:txBody>
-                  <a:tcPr marL="91440" marR="91440" marT="45720" marB="45720" anchor="ctr">
+                  <a:tcPr anchor="ctr">
                     <a:lnL w="9525" cap="flat" cmpd="sng" algn="ctr">
                       <a:solidFill>
                         <a:srgbClr val="D8DBE0"/>
@@ -10160,7 +10013,7 @@
                     <a:bodyPr/>
                     <a:lstStyle/>
                     <a:p>
-                      <a:pPr algn="l" indent="0" marL="0">
+                      <a:pPr marL="0" indent="0" algn="l">
                         <a:buNone/>
                       </a:pPr>
                       <a:r>
@@ -10168,20 +10021,20 @@
                           <a:solidFill>
                             <a:srgbClr val="1F2329"/>
                           </a:solidFill>
-                          <a:latin typeface="微软雅黑" pitchFamily="34" charset="0"/>
-                          <a:ea typeface="微软雅黑" pitchFamily="34" charset="-122"/>
-                          <a:cs typeface="微软雅黑" pitchFamily="34" charset="-120"/>
+                          <a:latin typeface="微软雅黑" panose="020B0503020204020204" pitchFamily="34" charset="-122"/>
+                          <a:ea typeface="微软雅黑" panose="020B0503020204020204" pitchFamily="34" charset="-122"/>
+                          <a:cs typeface="微软雅黑" panose="020B0503020204020204" pitchFamily="34" charset="-120"/>
                         </a:rPr>
-                        <a:t>34—38、40、41、43—45</a:t>
+                        <a:t>答11</a:t>
                       </a:r>
                       <a:endParaRPr lang="en-US" sz="1500" dirty="0">
-                        <a:latin typeface="微软雅黑" charset="0"/>
-                        <a:ea typeface="微软雅黑" charset="0"/>
-                        <a:cs typeface="微软雅黑" charset="0"/>
+                        <a:latin typeface="微软雅黑" panose="020B0503020204020204" pitchFamily="34" charset="-122"/>
+                        <a:ea typeface="微软雅黑" panose="020B0503020204020204" pitchFamily="34" charset="-122"/>
+                        <a:cs typeface="微软雅黑" panose="020B0503020204020204" pitchFamily="34" charset="-122"/>
                       </a:endParaRPr>
                     </a:p>
                   </a:txBody>
-                  <a:tcPr marL="91440" marR="91440" marT="45720" marB="45720" anchor="ctr">
+                  <a:tcPr anchor="ctr">
                     <a:lnL w="9525" cap="flat" cmpd="sng" algn="ctr">
                       <a:solidFill>
                         <a:srgbClr val="D8DBE0"/>
@@ -10230,7 +10083,7 @@
                     <a:bodyPr/>
                     <a:lstStyle/>
                     <a:p>
-                      <a:pPr algn="l" indent="0" marL="0">
+                      <a:pPr marL="0" indent="0" algn="l">
                         <a:buNone/>
                       </a:pPr>
                       <a:r>
@@ -10238,20 +10091,20 @@
                           <a:solidFill>
                             <a:srgbClr val="1F2329"/>
                           </a:solidFill>
-                          <a:latin typeface="微软雅黑" pitchFamily="34" charset="0"/>
-                          <a:ea typeface="微软雅黑" pitchFamily="34" charset="-122"/>
-                          <a:cs typeface="微软雅黑" pitchFamily="34" charset="-120"/>
+                          <a:latin typeface="微软雅黑" panose="020B0503020204020204" pitchFamily="34" charset="-122"/>
+                          <a:ea typeface="微软雅黑" panose="020B0503020204020204" pitchFamily="34" charset="-122"/>
+                          <a:cs typeface="微软雅黑" panose="020B0503020204020204" pitchFamily="34" charset="-120"/>
                         </a:rPr>
-                        <a:t>解答题：排序过程巩固（稳定性反例、插入比较次…</a:t>
+                        <a:t>最优比较排序</a:t>
                       </a:r>
                       <a:endParaRPr lang="en-US" sz="1500" dirty="0">
-                        <a:latin typeface="微软雅黑" charset="0"/>
-                        <a:ea typeface="微软雅黑" charset="0"/>
-                        <a:cs typeface="微软雅黑" charset="0"/>
+                        <a:latin typeface="微软雅黑" panose="020B0503020204020204" pitchFamily="34" charset="-122"/>
+                        <a:ea typeface="微软雅黑" panose="020B0503020204020204" pitchFamily="34" charset="-122"/>
+                        <a:cs typeface="微软雅黑" panose="020B0503020204020204" pitchFamily="34" charset="-122"/>
                       </a:endParaRPr>
                     </a:p>
                   </a:txBody>
-                  <a:tcPr marL="91440" marR="91440" marT="45720" marB="45720" anchor="ctr">
+                  <a:tcPr anchor="ctr">
                     <a:lnL w="9525" cap="flat" cmpd="sng" algn="ctr">
                       <a:solidFill>
                         <a:srgbClr val="D8DBE0"/>
@@ -10298,7 +10151,7 @@
                     <a:bodyPr/>
                     <a:lstStyle/>
                     <a:p>
-                      <a:pPr algn="l" indent="0" marL="0">
+                      <a:pPr marL="0" indent="0" algn="l">
                         <a:buNone/>
                       </a:pPr>
                       <a:r>
@@ -10306,20 +10159,20 @@
                           <a:solidFill>
                             <a:srgbClr val="1F2329"/>
                           </a:solidFill>
-                          <a:latin typeface="微软雅黑" pitchFamily="34" charset="0"/>
-                          <a:ea typeface="微软雅黑" pitchFamily="34" charset="-122"/>
-                          <a:cs typeface="微软雅黑" pitchFamily="34" charset="-120"/>
+                          <a:latin typeface="微软雅黑" panose="020B0503020204020204" pitchFamily="34" charset="-122"/>
+                          <a:ea typeface="微软雅黑" panose="020B0503020204020204" pitchFamily="34" charset="-122"/>
+                          <a:cs typeface="微软雅黑" panose="020B0503020204020204" pitchFamily="34" charset="-120"/>
                         </a:rPr>
-                        <a:t>答3—7、9、13、15—19、21、23、24</a:t>
+                        <a:t>答20</a:t>
                       </a:r>
                       <a:endParaRPr lang="en-US" sz="1500" dirty="0">
-                        <a:latin typeface="微软雅黑" charset="0"/>
-                        <a:ea typeface="微软雅黑" charset="0"/>
-                        <a:cs typeface="微软雅黑" charset="0"/>
+                        <a:latin typeface="微软雅黑" panose="020B0503020204020204" pitchFamily="34" charset="-122"/>
+                        <a:ea typeface="微软雅黑" panose="020B0503020204020204" pitchFamily="34" charset="-122"/>
+                        <a:cs typeface="微软雅黑" panose="020B0503020204020204" pitchFamily="34" charset="-122"/>
                       </a:endParaRPr>
                     </a:p>
                   </a:txBody>
-                  <a:tcPr marL="91440" marR="91440" marT="45720" marB="45720" anchor="ctr">
+                  <a:tcPr anchor="ctr">
                     <a:lnL w="9525" cap="flat" cmpd="sng" algn="ctr">
                       <a:solidFill>
                         <a:srgbClr val="D8DBE0"/>
@@ -10368,7 +10221,7 @@
                     <a:bodyPr/>
                     <a:lstStyle/>
                     <a:p>
-                      <a:pPr algn="l" indent="0" marL="0">
+                      <a:pPr marL="0" indent="0" algn="l">
                         <a:buNone/>
                       </a:pPr>
                       <a:r>
@@ -10376,20 +10229,20 @@
                           <a:solidFill>
                             <a:srgbClr val="1F2329"/>
                           </a:solidFill>
-                          <a:latin typeface="微软雅黑" pitchFamily="34" charset="0"/>
-                          <a:ea typeface="微软雅黑" pitchFamily="34" charset="-122"/>
-                          <a:cs typeface="微软雅黑" pitchFamily="34" charset="-120"/>
+                          <a:latin typeface="微软雅黑" panose="020B0503020204020204" pitchFamily="34" charset="-122"/>
+                          <a:ea typeface="微软雅黑" panose="020B0503020204020204" pitchFamily="34" charset="-122"/>
+                          <a:cs typeface="微软雅黑" panose="020B0503020204020204" pitchFamily="34" charset="-120"/>
                         </a:rPr>
-                        <a:t>算法设计题：排序域内代码巩固（插入/冒泡变体…</a:t>
+                        <a:t>归并插入排序</a:t>
                       </a:r>
                       <a:endParaRPr lang="en-US" sz="1500" dirty="0">
-                        <a:latin typeface="微软雅黑" charset="0"/>
-                        <a:ea typeface="微软雅黑" charset="0"/>
-                        <a:cs typeface="微软雅黑" charset="0"/>
+                        <a:latin typeface="微软雅黑" panose="020B0503020204020204" pitchFamily="34" charset="-122"/>
+                        <a:ea typeface="微软雅黑" panose="020B0503020204020204" pitchFamily="34" charset="-122"/>
+                        <a:cs typeface="微软雅黑" panose="020B0503020204020204" pitchFamily="34" charset="-122"/>
                       </a:endParaRPr>
                     </a:p>
                   </a:txBody>
-                  <a:tcPr marL="91440" marR="91440" marT="45720" marB="45720" anchor="ctr">
+                  <a:tcPr anchor="ctr">
                     <a:lnL w="9525" cap="flat" cmpd="sng" algn="ctr">
                       <a:solidFill>
                         <a:srgbClr val="D8DBE0"/>
@@ -10436,7 +10289,7 @@
                     <a:bodyPr/>
                     <a:lstStyle/>
                     <a:p>
-                      <a:pPr algn="l" indent="0" marL="0">
+                      <a:pPr marL="0" indent="0" algn="l">
                         <a:buNone/>
                       </a:pPr>
                       <a:r>
@@ -10444,20 +10297,20 @@
                           <a:solidFill>
                             <a:srgbClr val="1F2329"/>
                           </a:solidFill>
-                          <a:latin typeface="微软雅黑" pitchFamily="34" charset="0"/>
-                          <a:ea typeface="微软雅黑" pitchFamily="34" charset="-122"/>
-                          <a:cs typeface="微软雅黑" pitchFamily="34" charset="-120"/>
+                          <a:latin typeface="微软雅黑" panose="020B0503020204020204" pitchFamily="34" charset="-122"/>
+                          <a:ea typeface="微软雅黑" panose="020B0503020204020204" pitchFamily="34" charset="-122"/>
+                          <a:cs typeface="微软雅黑" panose="020B0503020204020204" pitchFamily="34" charset="-120"/>
                         </a:rPr>
-                        <a:t>算1—10、13、15—25</a:t>
+                        <a:t>答22</a:t>
                       </a:r>
                       <a:endParaRPr lang="en-US" sz="1500" dirty="0">
-                        <a:latin typeface="微软雅黑" charset="0"/>
-                        <a:ea typeface="微软雅黑" charset="0"/>
-                        <a:cs typeface="微软雅黑" charset="0"/>
+                        <a:latin typeface="微软雅黑" panose="020B0503020204020204" pitchFamily="34" charset="-122"/>
+                        <a:ea typeface="微软雅黑" panose="020B0503020204020204" pitchFamily="34" charset="-122"/>
+                        <a:cs typeface="微软雅黑" panose="020B0503020204020204" pitchFamily="34" charset="-122"/>
                       </a:endParaRPr>
                     </a:p>
                   </a:txBody>
-                  <a:tcPr marL="91440" marR="91440" marT="45720" marB="45720" anchor="ctr">
+                  <a:tcPr anchor="ctr">
                     <a:lnL w="9525" cap="flat" cmpd="sng" algn="ctr">
                       <a:solidFill>
                         <a:srgbClr val="D8DBE0"/>
@@ -10514,7 +10367,7 @@
 
 <file path=ppt/slides/slide8.xml><?xml version="1.0" encoding="utf-8"?>
 <p:sld xmlns:a="http://schemas.openxmlformats.org/drawingml/2006/main" xmlns:r="http://schemas.openxmlformats.org/officeDocument/2006/relationships" xmlns:p="http://schemas.openxmlformats.org/presentationml/2006/main">
-  <p:cSld name="Slide 8">
+  <p:cSld>
     <p:bg>
       <p:bgPr>
         <a:blipFill dpi="0" rotWithShape="1">
@@ -10558,13 +10411,12 @@
             <a:avLst/>
           </a:prstGeom>
           <a:noFill/>
-          <a:ln/>
         </p:spPr>
         <p:txBody>
           <a:bodyPr wrap="square" rtlCol="0" anchor="ctr"/>
           <a:lstStyle/>
           <a:p>
-            <a:pPr algn="r" indent="0" marL="0">
+            <a:pPr marL="0" indent="0" algn="r">
               <a:buNone/>
             </a:pPr>
             <a:r>
@@ -10572,11 +10424,11 @@
                 <a:solidFill>
                   <a:srgbClr val="8A9099"/>
                 </a:solidFill>
-                <a:latin typeface="微软雅黑" pitchFamily="34" charset="0"/>
-                <a:ea typeface="微软雅黑" pitchFamily="34" charset="-122"/>
-                <a:cs typeface="微软雅黑" pitchFamily="34" charset="-120"/>
+                <a:latin typeface="微软雅黑" panose="020B0503020204020204" pitchFamily="34" charset="-122"/>
+                <a:ea typeface="微软雅黑" panose="020B0503020204020204" pitchFamily="34" charset="-122"/>
+                <a:cs typeface="微软雅黑" panose="020B0503020204020204" pitchFamily="34" charset="-120"/>
               </a:rPr>
-              <a:t>8 / 9</a:t>
+              <a:t>7 / 9</a:t>
             </a:r>
             <a:endParaRPr lang="en-US" sz="1000" dirty="0"/>
           </a:p>
@@ -10597,13 +10449,12 @@
             <a:avLst/>
           </a:prstGeom>
           <a:noFill/>
-          <a:ln/>
         </p:spPr>
         <p:txBody>
           <a:bodyPr wrap="square" rtlCol="0" anchor="ctr"/>
           <a:lstStyle/>
           <a:p>
-            <a:pPr algn="l" indent="0" marL="0">
+            <a:pPr marL="0" indent="0" algn="l">
               <a:buNone/>
             </a:pPr>
             <a:r>
@@ -10611,11 +10462,11 @@
                 <a:solidFill>
                   <a:srgbClr val="1F4E9C"/>
                 </a:solidFill>
-                <a:latin typeface="微软雅黑" pitchFamily="34" charset="0"/>
-                <a:ea typeface="微软雅黑" pitchFamily="34" charset="-122"/>
-                <a:cs typeface="微软雅黑" pitchFamily="34" charset="-120"/>
+                <a:latin typeface="微软雅黑" panose="020B0503020204020204" pitchFamily="34" charset="-122"/>
+                <a:ea typeface="微软雅黑" panose="020B0503020204020204" pitchFamily="34" charset="-122"/>
+                <a:cs typeface="微软雅黑" panose="020B0503020204020204" pitchFamily="34" charset="-120"/>
               </a:rPr>
-              <a:t>完全不做</a:t>
+              <a:t>可做可不做</a:t>
             </a:r>
             <a:endParaRPr lang="en-US" sz="1400" dirty="0"/>
           </a:p>
@@ -10636,13 +10487,12 @@
             <a:avLst/>
           </a:prstGeom>
           <a:noFill/>
-          <a:ln/>
         </p:spPr>
         <p:txBody>
           <a:bodyPr wrap="square" rtlCol="0" anchor="ctr"/>
           <a:lstStyle/>
           <a:p>
-            <a:pPr algn="l" indent="0" marL="0">
+            <a:pPr marL="0" indent="0" algn="l">
               <a:buNone/>
             </a:pPr>
             <a:r>
@@ -10650,11 +10500,11 @@
                 <a:solidFill>
                   <a:srgbClr val="1F2329"/>
                 </a:solidFill>
-                <a:latin typeface="微软雅黑" pitchFamily="34" charset="0"/>
-                <a:ea typeface="微软雅黑" pitchFamily="34" charset="-122"/>
-                <a:cs typeface="微软雅黑" pitchFamily="34" charset="-120"/>
+                <a:latin typeface="微软雅黑" panose="020B0503020204020204" pitchFamily="34" charset="-122"/>
+                <a:ea typeface="微软雅黑" panose="020B0503020204020204" pitchFamily="34" charset="-122"/>
+                <a:cs typeface="微软雅黑" panose="020B0503020204020204" pitchFamily="34" charset="-120"/>
               </a:rPr>
-              <a:t>完全不做清单</a:t>
+              <a:t>可做可不做清单</a:t>
             </a:r>
             <a:endParaRPr lang="en-US" sz="2800" dirty="0"/>
           </a:p>
@@ -10662,21 +10512,15 @@
       </p:sp>
       <p:graphicFrame>
         <p:nvGraphicFramePr>
-          <p:cNvPr id="9" name="Table 0"/>
+          <p:cNvPr id="8" name="Table 0"/>
           <p:cNvGraphicFramePr>
             <a:graphicFrameLocks noGrp="1"/>
           </p:cNvGraphicFramePr>
-          <p:nvPr>
-            <p:extLst>
-              <p:ext uri="{D42A27DB-BD31-4B8C-83A1-F6EECF244321}">
-                <p14:modId xmlns:p14="http://schemas.microsoft.com/office/powerpoint/2010/main" val="1579011935"/>
-              </p:ext>
-            </p:extLst>
-          </p:nvPr>
+          <p:nvPr/>
         </p:nvGraphicFramePr>
         <p:xfrm>
           <a:off x="822960" y="2395728"/>
-          <a:ext cx="10545775" cy="914400"/>
+          <a:ext cx="10545775" cy="2103120"/>
         </p:xfrm>
         <a:graphic>
           <a:graphicData uri="http://schemas.openxmlformats.org/drawingml/2006/table">
@@ -10692,7 +10536,7 @@
                     <a:bodyPr/>
                     <a:lstStyle/>
                     <a:p>
-                      <a:pPr algn="l" indent="0" marL="0">
+                      <a:pPr marL="0" indent="0" algn="l">
                         <a:buNone/>
                       </a:pPr>
                       <a:r>
@@ -10700,20 +10544,20 @@
                           <a:solidFill>
                             <a:srgbClr val="1F4E9C"/>
                           </a:solidFill>
-                          <a:latin typeface="微软雅黑" pitchFamily="34" charset="0"/>
-                          <a:ea typeface="微软雅黑" pitchFamily="34" charset="-122"/>
-                          <a:cs typeface="微软雅黑" pitchFamily="34" charset="-120"/>
+                          <a:latin typeface="微软雅黑" panose="020B0503020204020204" pitchFamily="34" charset="-122"/>
+                          <a:ea typeface="微软雅黑" panose="020B0503020204020204" pitchFamily="34" charset="-122"/>
+                          <a:cs typeface="微软雅黑" panose="020B0503020204020204" pitchFamily="34" charset="-120"/>
                         </a:rPr>
-                        <a:t>内容</a:t>
+                        <a:t>分组</a:t>
                       </a:r>
                       <a:endParaRPr lang="en-US" sz="1500" dirty="0">
-                        <a:latin typeface="微软雅黑" charset="0"/>
-                        <a:ea typeface="微软雅黑" charset="0"/>
-                        <a:cs typeface="微软雅黑" charset="0"/>
+                        <a:latin typeface="微软雅黑" panose="020B0503020204020204" pitchFamily="34" charset="-122"/>
+                        <a:ea typeface="微软雅黑" panose="020B0503020204020204" pitchFamily="34" charset="-122"/>
+                        <a:cs typeface="微软雅黑" panose="020B0503020204020204" pitchFamily="34" charset="-122"/>
                       </a:endParaRPr>
                     </a:p>
                   </a:txBody>
-                  <a:tcPr marL="91440" marR="91440" marT="45720" marB="45720" anchor="ctr">
+                  <a:tcPr anchor="ctr">
                     <a:lnL w="9525" cap="flat" cmpd="sng" algn="ctr">
                       <a:solidFill>
                         <a:srgbClr val="D8DBE0"/>
@@ -10760,7 +10604,7 @@
                     <a:bodyPr/>
                     <a:lstStyle/>
                     <a:p>
-                      <a:pPr algn="l" indent="0" marL="0">
+                      <a:pPr marL="0" indent="0" algn="l">
                         <a:buNone/>
                       </a:pPr>
                       <a:r>
@@ -10768,20 +10612,20 @@
                           <a:solidFill>
                             <a:srgbClr val="1F4E9C"/>
                           </a:solidFill>
-                          <a:latin typeface="微软雅黑" pitchFamily="34" charset="0"/>
-                          <a:ea typeface="微软雅黑" pitchFamily="34" charset="-122"/>
-                          <a:cs typeface="微软雅黑" pitchFamily="34" charset="-120"/>
+                          <a:latin typeface="微软雅黑" panose="020B0503020204020204" pitchFamily="34" charset="-122"/>
+                          <a:ea typeface="微软雅黑" panose="020B0503020204020204" pitchFamily="34" charset="-122"/>
+                          <a:cs typeface="微软雅黑" panose="020B0503020204020204" pitchFamily="34" charset="-120"/>
                         </a:rPr>
                         <a:t>题号</a:t>
                       </a:r>
                       <a:endParaRPr lang="en-US" sz="1500" dirty="0">
-                        <a:latin typeface="微软雅黑" charset="0"/>
-                        <a:ea typeface="微软雅黑" charset="0"/>
-                        <a:cs typeface="微软雅黑" charset="0"/>
+                        <a:latin typeface="微软雅黑" panose="020B0503020204020204" pitchFamily="34" charset="-122"/>
+                        <a:ea typeface="微软雅黑" panose="020B0503020204020204" pitchFamily="34" charset="-122"/>
+                        <a:cs typeface="微软雅黑" panose="020B0503020204020204" pitchFamily="34" charset="-122"/>
                       </a:endParaRPr>
                     </a:p>
                   </a:txBody>
-                  <a:tcPr marL="91440" marR="91440" marT="45720" marB="45720" anchor="ctr">
+                  <a:tcPr anchor="ctr">
                     <a:lnL w="9525" cap="flat" cmpd="sng" algn="ctr">
                       <a:solidFill>
                         <a:srgbClr val="D8DBE0"/>
@@ -10830,7 +10674,7 @@
                     <a:bodyPr/>
                     <a:lstStyle/>
                     <a:p>
-                      <a:pPr algn="l" indent="0" marL="0">
+                      <a:pPr marL="0" indent="0" algn="l">
                         <a:buNone/>
                       </a:pPr>
                       <a:r>
@@ -10838,20 +10682,20 @@
                           <a:solidFill>
                             <a:srgbClr val="1F2329"/>
                           </a:solidFill>
-                          <a:latin typeface="微软雅黑" pitchFamily="34" charset="0"/>
-                          <a:ea typeface="微软雅黑" pitchFamily="34" charset="-122"/>
-                          <a:cs typeface="微软雅黑" pitchFamily="34" charset="-120"/>
+                          <a:latin typeface="微软雅黑" panose="020B0503020204020204" pitchFamily="34" charset="-122"/>
+                          <a:ea typeface="微软雅黑" panose="020B0503020204020204" pitchFamily="34" charset="-122"/>
+                          <a:cs typeface="微软雅黑" panose="020B0503020204020204" pitchFamily="34" charset="-120"/>
                         </a:rPr>
-                        <a:t>证明与推导题</a:t>
+                        <a:t>选择题：排序性能比较（各排序最好最坏复杂度、…</a:t>
                       </a:r>
                       <a:endParaRPr lang="en-US" sz="1500" dirty="0">
-                        <a:latin typeface="微软雅黑" charset="0"/>
-                        <a:ea typeface="微软雅黑" charset="0"/>
-                        <a:cs typeface="微软雅黑" charset="0"/>
+                        <a:latin typeface="微软雅黑" panose="020B0503020204020204" pitchFamily="34" charset="-122"/>
+                        <a:ea typeface="微软雅黑" panose="020B0503020204020204" pitchFamily="34" charset="-122"/>
+                        <a:cs typeface="微软雅黑" panose="020B0503020204020204" pitchFamily="34" charset="-122"/>
                       </a:endParaRPr>
                     </a:p>
                   </a:txBody>
-                  <a:tcPr marL="91440" marR="91440" marT="45720" marB="45720" anchor="ctr">
+                  <a:tcPr anchor="ctr">
                     <a:lnL w="9525" cap="flat" cmpd="sng" algn="ctr">
                       <a:solidFill>
                         <a:srgbClr val="D8DBE0"/>
@@ -10898,7 +10742,7 @@
                     <a:bodyPr/>
                     <a:lstStyle/>
                     <a:p>
-                      <a:pPr algn="l" indent="0" marL="0">
+                      <a:pPr marL="0" indent="0" algn="l">
                         <a:buNone/>
                       </a:pPr>
                       <a:r>
@@ -10906,20 +10750,20 @@
                           <a:solidFill>
                             <a:srgbClr val="1F2329"/>
                           </a:solidFill>
-                          <a:latin typeface="微软雅黑" pitchFamily="34" charset="0"/>
-                          <a:ea typeface="微软雅黑" pitchFamily="34" charset="-122"/>
-                          <a:cs typeface="微软雅黑" pitchFamily="34" charset="-120"/>
+                          <a:latin typeface="微软雅黑" panose="020B0503020204020204" pitchFamily="34" charset="-122"/>
+                          <a:ea typeface="微软雅黑" panose="020B0503020204020204" pitchFamily="34" charset="-122"/>
+                          <a:cs typeface="微软雅黑" panose="020B0503020204020204" pitchFamily="34" charset="-120"/>
                         </a:rPr>
-                        <a:t>答8</a:t>
+                        <a:t>选1—14、16、17、19、20、26、28…</a:t>
                       </a:r>
                       <a:endParaRPr lang="en-US" sz="1500" dirty="0">
-                        <a:latin typeface="微软雅黑" charset="0"/>
-                        <a:ea typeface="微软雅黑" charset="0"/>
-                        <a:cs typeface="微软雅黑" charset="0"/>
+                        <a:latin typeface="微软雅黑" panose="020B0503020204020204" pitchFamily="34" charset="-122"/>
+                        <a:ea typeface="微软雅黑" panose="020B0503020204020204" pitchFamily="34" charset="-122"/>
+                        <a:cs typeface="微软雅黑" panose="020B0503020204020204" pitchFamily="34" charset="-122"/>
                       </a:endParaRPr>
                     </a:p>
                   </a:txBody>
-                  <a:tcPr marL="91440" marR="91440" marT="45720" marB="45720" anchor="ctr">
+                  <a:tcPr anchor="ctr">
                     <a:lnL w="9525" cap="flat" cmpd="sng" algn="ctr">
                       <a:solidFill>
                         <a:srgbClr val="D8DBE0"/>
@@ -10968,7 +10812,7 @@
                     <a:bodyPr/>
                     <a:lstStyle/>
                     <a:p>
-                      <a:pPr algn="l" indent="0" marL="0">
+                      <a:pPr marL="0" indent="0" algn="l">
                         <a:buNone/>
                       </a:pPr>
                       <a:r>
@@ -10976,20 +10820,20 @@
                           <a:solidFill>
                             <a:srgbClr val="1F2329"/>
                           </a:solidFill>
-                          <a:latin typeface="微软雅黑" pitchFamily="34" charset="0"/>
-                          <a:ea typeface="微软雅黑" pitchFamily="34" charset="-122"/>
-                          <a:cs typeface="微软雅黑" pitchFamily="34" charset="-120"/>
+                          <a:latin typeface="微软雅黑" panose="020B0503020204020204" pitchFamily="34" charset="-122"/>
+                          <a:ea typeface="微软雅黑" panose="020B0503020204020204" pitchFamily="34" charset="-122"/>
+                          <a:cs typeface="微软雅黑" panose="020B0503020204020204" pitchFamily="34" charset="-120"/>
                         </a:rPr>
-                        <a:t>锦标赛排序</a:t>
+                        <a:t>（续）</a:t>
                       </a:r>
                       <a:endParaRPr lang="en-US" sz="1500" dirty="0">
-                        <a:latin typeface="微软雅黑" charset="0"/>
-                        <a:ea typeface="微软雅黑" charset="0"/>
-                        <a:cs typeface="微软雅黑" charset="0"/>
+                        <a:latin typeface="微软雅黑" panose="020B0503020204020204" pitchFamily="34" charset="-122"/>
+                        <a:ea typeface="微软雅黑" panose="020B0503020204020204" pitchFamily="34" charset="-122"/>
+                        <a:cs typeface="微软雅黑" panose="020B0503020204020204" pitchFamily="34" charset="-122"/>
                       </a:endParaRPr>
                     </a:p>
                   </a:txBody>
-                  <a:tcPr marL="91440" marR="91440" marT="45720" marB="45720" anchor="ctr">
+                  <a:tcPr anchor="ctr">
                     <a:lnL w="9525" cap="flat" cmpd="sng" algn="ctr">
                       <a:solidFill>
                         <a:srgbClr val="D8DBE0"/>
@@ -11036,7 +10880,7 @@
                     <a:bodyPr/>
                     <a:lstStyle/>
                     <a:p>
-                      <a:pPr algn="l" indent="0" marL="0">
+                      <a:pPr marL="0" indent="0" algn="l">
                         <a:buNone/>
                       </a:pPr>
                       <a:r>
@@ -11044,20 +10888,20 @@
                           <a:solidFill>
                             <a:srgbClr val="1F2329"/>
                           </a:solidFill>
-                          <a:latin typeface="微软雅黑" pitchFamily="34" charset="0"/>
-                          <a:ea typeface="微软雅黑" pitchFamily="34" charset="-122"/>
-                          <a:cs typeface="微软雅黑" pitchFamily="34" charset="-120"/>
+                          <a:latin typeface="微软雅黑" panose="020B0503020204020204" pitchFamily="34" charset="-122"/>
+                          <a:ea typeface="微软雅黑" panose="020B0503020204020204" pitchFamily="34" charset="-122"/>
+                          <a:cs typeface="微软雅黑" panose="020B0503020204020204" pitchFamily="34" charset="-120"/>
                         </a:rPr>
-                        <a:t>答11</a:t>
+                        <a:t>34—38、40、41、43—45</a:t>
                       </a:r>
                       <a:endParaRPr lang="en-US" sz="1500" dirty="0">
-                        <a:latin typeface="微软雅黑" charset="0"/>
-                        <a:ea typeface="微软雅黑" charset="0"/>
-                        <a:cs typeface="微软雅黑" charset="0"/>
+                        <a:latin typeface="微软雅黑" panose="020B0503020204020204" pitchFamily="34" charset="-122"/>
+                        <a:ea typeface="微软雅黑" panose="020B0503020204020204" pitchFamily="34" charset="-122"/>
+                        <a:cs typeface="微软雅黑" panose="020B0503020204020204" pitchFamily="34" charset="-122"/>
                       </a:endParaRPr>
                     </a:p>
                   </a:txBody>
-                  <a:tcPr marL="91440" marR="91440" marT="45720" marB="45720" anchor="ctr">
+                  <a:tcPr anchor="ctr">
                     <a:lnL w="9525" cap="flat" cmpd="sng" algn="ctr">
                       <a:solidFill>
                         <a:srgbClr val="D8DBE0"/>
@@ -11106,7 +10950,7 @@
                     <a:bodyPr/>
                     <a:lstStyle/>
                     <a:p>
-                      <a:pPr algn="l" indent="0" marL="0">
+                      <a:pPr marL="0" indent="0" algn="l">
                         <a:buNone/>
                       </a:pPr>
                       <a:r>
@@ -11114,20 +10958,20 @@
                           <a:solidFill>
                             <a:srgbClr val="1F2329"/>
                           </a:solidFill>
-                          <a:latin typeface="微软雅黑" pitchFamily="34" charset="0"/>
-                          <a:ea typeface="微软雅黑" pitchFamily="34" charset="-122"/>
-                          <a:cs typeface="微软雅黑" pitchFamily="34" charset="-120"/>
+                          <a:latin typeface="微软雅黑" panose="020B0503020204020204" pitchFamily="34" charset="-122"/>
+                          <a:ea typeface="微软雅黑" panose="020B0503020204020204" pitchFamily="34" charset="-122"/>
+                          <a:cs typeface="微软雅黑" panose="020B0503020204020204" pitchFamily="34" charset="-120"/>
                         </a:rPr>
-                        <a:t>最优比较排序</a:t>
+                        <a:t>解答题：排序过程巩固（稳定性反例、插入比较次…</a:t>
                       </a:r>
                       <a:endParaRPr lang="en-US" sz="1500" dirty="0">
-                        <a:latin typeface="微软雅黑" charset="0"/>
-                        <a:ea typeface="微软雅黑" charset="0"/>
-                        <a:cs typeface="微软雅黑" charset="0"/>
+                        <a:latin typeface="微软雅黑" panose="020B0503020204020204" pitchFamily="34" charset="-122"/>
+                        <a:ea typeface="微软雅黑" panose="020B0503020204020204" pitchFamily="34" charset="-122"/>
+                        <a:cs typeface="微软雅黑" panose="020B0503020204020204" pitchFamily="34" charset="-122"/>
                       </a:endParaRPr>
                     </a:p>
                   </a:txBody>
-                  <a:tcPr marL="91440" marR="91440" marT="45720" marB="45720" anchor="ctr">
+                  <a:tcPr anchor="ctr">
                     <a:lnL w="9525" cap="flat" cmpd="sng" algn="ctr">
                       <a:solidFill>
                         <a:srgbClr val="D8DBE0"/>
@@ -11174,7 +11018,7 @@
                     <a:bodyPr/>
                     <a:lstStyle/>
                     <a:p>
-                      <a:pPr algn="l" indent="0" marL="0">
+                      <a:pPr marL="0" indent="0" algn="l">
                         <a:buNone/>
                       </a:pPr>
                       <a:r>
@@ -11182,20 +11026,20 @@
                           <a:solidFill>
                             <a:srgbClr val="1F2329"/>
                           </a:solidFill>
-                          <a:latin typeface="微软雅黑" pitchFamily="34" charset="0"/>
-                          <a:ea typeface="微软雅黑" pitchFamily="34" charset="-122"/>
-                          <a:cs typeface="微软雅黑" pitchFamily="34" charset="-120"/>
+                          <a:latin typeface="微软雅黑" panose="020B0503020204020204" pitchFamily="34" charset="-122"/>
+                          <a:ea typeface="微软雅黑" panose="020B0503020204020204" pitchFamily="34" charset="-122"/>
+                          <a:cs typeface="微软雅黑" panose="020B0503020204020204" pitchFamily="34" charset="-120"/>
                         </a:rPr>
-                        <a:t>答20</a:t>
+                        <a:t>答3—7、9、13、15—19、21、23、24</a:t>
                       </a:r>
                       <a:endParaRPr lang="en-US" sz="1500" dirty="0">
-                        <a:latin typeface="微软雅黑" charset="0"/>
-                        <a:ea typeface="微软雅黑" charset="0"/>
-                        <a:cs typeface="微软雅黑" charset="0"/>
+                        <a:latin typeface="微软雅黑" panose="020B0503020204020204" pitchFamily="34" charset="-122"/>
+                        <a:ea typeface="微软雅黑" panose="020B0503020204020204" pitchFamily="34" charset="-122"/>
+                        <a:cs typeface="微软雅黑" panose="020B0503020204020204" pitchFamily="34" charset="-122"/>
                       </a:endParaRPr>
                     </a:p>
                   </a:txBody>
-                  <a:tcPr marL="91440" marR="91440" marT="45720" marB="45720" anchor="ctr">
+                  <a:tcPr anchor="ctr">
                     <a:lnL w="9525" cap="flat" cmpd="sng" algn="ctr">
                       <a:solidFill>
                         <a:srgbClr val="D8DBE0"/>
@@ -11244,7 +11088,7 @@
                     <a:bodyPr/>
                     <a:lstStyle/>
                     <a:p>
-                      <a:pPr algn="l" indent="0" marL="0">
+                      <a:pPr marL="0" indent="0" algn="l">
                         <a:buNone/>
                       </a:pPr>
                       <a:r>
@@ -11252,20 +11096,20 @@
                           <a:solidFill>
                             <a:srgbClr val="1F2329"/>
                           </a:solidFill>
-                          <a:latin typeface="微软雅黑" pitchFamily="34" charset="0"/>
-                          <a:ea typeface="微软雅黑" pitchFamily="34" charset="-122"/>
-                          <a:cs typeface="微软雅黑" pitchFamily="34" charset="-120"/>
+                          <a:latin typeface="微软雅黑" panose="020B0503020204020204" pitchFamily="34" charset="-122"/>
+                          <a:ea typeface="微软雅黑" panose="020B0503020204020204" pitchFamily="34" charset="-122"/>
+                          <a:cs typeface="微软雅黑" panose="020B0503020204020204" pitchFamily="34" charset="-120"/>
                         </a:rPr>
-                        <a:t>归并插入排序</a:t>
+                        <a:t>算法设计题：排序域内代码巩固（插入/冒泡变体…</a:t>
                       </a:r>
                       <a:endParaRPr lang="en-US" sz="1500" dirty="0">
-                        <a:latin typeface="微软雅黑" charset="0"/>
-                        <a:ea typeface="微软雅黑" charset="0"/>
-                        <a:cs typeface="微软雅黑" charset="0"/>
+                        <a:latin typeface="微软雅黑" panose="020B0503020204020204" pitchFamily="34" charset="-122"/>
+                        <a:ea typeface="微软雅黑" panose="020B0503020204020204" pitchFamily="34" charset="-122"/>
+                        <a:cs typeface="微软雅黑" panose="020B0503020204020204" pitchFamily="34" charset="-122"/>
                       </a:endParaRPr>
                     </a:p>
                   </a:txBody>
-                  <a:tcPr marL="91440" marR="91440" marT="45720" marB="45720" anchor="ctr">
+                  <a:tcPr anchor="ctr">
                     <a:lnL w="9525" cap="flat" cmpd="sng" algn="ctr">
                       <a:solidFill>
                         <a:srgbClr val="D8DBE0"/>
@@ -11312,7 +11156,7 @@
                     <a:bodyPr/>
                     <a:lstStyle/>
                     <a:p>
-                      <a:pPr algn="l" indent="0" marL="0">
+                      <a:pPr marL="0" indent="0" algn="l">
                         <a:buNone/>
                       </a:pPr>
                       <a:r>
@@ -11320,20 +11164,20 @@
                           <a:solidFill>
                             <a:srgbClr val="1F2329"/>
                           </a:solidFill>
-                          <a:latin typeface="微软雅黑" pitchFamily="34" charset="0"/>
-                          <a:ea typeface="微软雅黑" pitchFamily="34" charset="-122"/>
-                          <a:cs typeface="微软雅黑" pitchFamily="34" charset="-120"/>
+                          <a:latin typeface="微软雅黑" panose="020B0503020204020204" pitchFamily="34" charset="-122"/>
+                          <a:ea typeface="微软雅黑" panose="020B0503020204020204" pitchFamily="34" charset="-122"/>
+                          <a:cs typeface="微软雅黑" panose="020B0503020204020204" pitchFamily="34" charset="-120"/>
                         </a:rPr>
-                        <a:t>答22</a:t>
+                        <a:t>算1—10、13、15—25</a:t>
                       </a:r>
                       <a:endParaRPr lang="en-US" sz="1500" dirty="0">
-                        <a:latin typeface="微软雅黑" charset="0"/>
-                        <a:ea typeface="微软雅黑" charset="0"/>
-                        <a:cs typeface="微软雅黑" charset="0"/>
+                        <a:latin typeface="微软雅黑" panose="020B0503020204020204" pitchFamily="34" charset="-122"/>
+                        <a:ea typeface="微软雅黑" panose="020B0503020204020204" pitchFamily="34" charset="-122"/>
+                        <a:cs typeface="微软雅黑" panose="020B0503020204020204" pitchFamily="34" charset="-122"/>
                       </a:endParaRPr>
                     </a:p>
                   </a:txBody>
-                  <a:tcPr marL="91440" marR="91440" marT="45720" marB="45720" anchor="ctr">
+                  <a:tcPr anchor="ctr">
                     <a:lnL w="9525" cap="flat" cmpd="sng" algn="ctr">
                       <a:solidFill>
                         <a:srgbClr val="D8DBE0"/>
@@ -11390,7 +11234,7 @@
 
 <file path=ppt/slides/slide9.xml><?xml version="1.0" encoding="utf-8"?>
 <p:sld xmlns:a="http://schemas.openxmlformats.org/drawingml/2006/main" xmlns:r="http://schemas.openxmlformats.org/officeDocument/2006/relationships" xmlns:p="http://schemas.openxmlformats.org/presentationml/2006/main">
-  <p:cSld name="Slide 9">
+  <p:cSld>
     <p:bg>
       <p:bgPr>
         <a:blipFill dpi="0" rotWithShape="1">
@@ -11434,13 +11278,12 @@
             <a:avLst/>
           </a:prstGeom>
           <a:noFill/>
-          <a:ln/>
         </p:spPr>
         <p:txBody>
           <a:bodyPr wrap="square" rtlCol="0" anchor="ctr"/>
           <a:lstStyle/>
           <a:p>
-            <a:pPr algn="r" indent="0" marL="0">
+            <a:pPr marL="0" indent="0" algn="r">
               <a:buNone/>
             </a:pPr>
             <a:r>
@@ -11448,9 +11291,9 @@
                 <a:solidFill>
                   <a:srgbClr val="8A9099"/>
                 </a:solidFill>
-                <a:latin typeface="微软雅黑" pitchFamily="34" charset="0"/>
-                <a:ea typeface="微软雅黑" pitchFamily="34" charset="-122"/>
-                <a:cs typeface="微软雅黑" pitchFamily="34" charset="-120"/>
+                <a:latin typeface="微软雅黑" panose="020B0503020204020204" pitchFamily="34" charset="-122"/>
+                <a:ea typeface="微软雅黑" panose="020B0503020204020204" pitchFamily="34" charset="-122"/>
+                <a:cs typeface="微软雅黑" panose="020B0503020204020204" pitchFamily="34" charset="-120"/>
               </a:rPr>
               <a:t>9 / 9</a:t>
             </a:r>
@@ -11473,13 +11316,12 @@
             <a:avLst/>
           </a:prstGeom>
           <a:noFill/>
-          <a:ln/>
         </p:spPr>
         <p:txBody>
           <a:bodyPr wrap="square" rtlCol="0" anchor="ctr"/>
           <a:lstStyle/>
           <a:p>
-            <a:pPr algn="l" indent="0" marL="0">
+            <a:pPr marL="0" indent="0" algn="l">
               <a:buNone/>
             </a:pPr>
             <a:r>
@@ -11487,9 +11329,9 @@
                 <a:solidFill>
                   <a:srgbClr val="1F4E9C"/>
                 </a:solidFill>
-                <a:latin typeface="微软雅黑" pitchFamily="34" charset="0"/>
-                <a:ea typeface="微软雅黑" pitchFamily="34" charset="-122"/>
-                <a:cs typeface="微软雅黑" pitchFamily="34" charset="-120"/>
+                <a:latin typeface="微软雅黑" panose="020B0503020204020204" pitchFamily="34" charset="-122"/>
+                <a:ea typeface="微软雅黑" panose="020B0503020204020204" pitchFamily="34" charset="-122"/>
+                <a:cs typeface="微软雅黑" panose="020B0503020204020204" pitchFamily="34" charset="-120"/>
               </a:rPr>
               <a:t>使用建议</a:t>
             </a:r>
@@ -11512,13 +11354,12 @@
             <a:avLst/>
           </a:prstGeom>
           <a:noFill/>
-          <a:ln/>
         </p:spPr>
         <p:txBody>
           <a:bodyPr wrap="square" rtlCol="0" anchor="ctr"/>
           <a:lstStyle/>
           <a:p>
-            <a:pPr algn="l" indent="0" marL="0">
+            <a:pPr marL="0" indent="0" algn="l">
               <a:buNone/>
             </a:pPr>
             <a:r>
@@ -11526,9 +11367,9 @@
                 <a:solidFill>
                   <a:srgbClr val="1F2329"/>
                 </a:solidFill>
-                <a:latin typeface="微软雅黑" pitchFamily="34" charset="0"/>
-                <a:ea typeface="微软雅黑" pitchFamily="34" charset="-122"/>
-                <a:cs typeface="微软雅黑" pitchFamily="34" charset="-120"/>
+                <a:latin typeface="微软雅黑" panose="020B0503020204020204" pitchFamily="34" charset="-122"/>
+                <a:ea typeface="微软雅黑" panose="020B0503020204020204" pitchFamily="34" charset="-122"/>
+                <a:cs typeface="微软雅黑" panose="020B0503020204020204" pitchFamily="34" charset="-120"/>
               </a:rPr>
               <a:t>第10章刷题路线</a:t>
             </a:r>
@@ -11551,13 +11392,12 @@
             <a:avLst/>
           </a:prstGeom>
           <a:noFill/>
-          <a:ln/>
         </p:spPr>
         <p:txBody>
           <a:bodyPr wrap="square" rtlCol="0" anchor="t"/>
           <a:lstStyle/>
           <a:p>
-            <a:pPr algn="l" indent="0" marL="0">
+            <a:pPr marL="0" indent="0" algn="l">
               <a:lnSpc>
                 <a:spcPct val="115000"/>
               </a:lnSpc>
@@ -11568,18 +11408,12 @@
                 <a:solidFill>
                   <a:srgbClr val="1F4E9C"/>
                 </a:solidFill>
-                <a:latin typeface="微软雅黑" pitchFamily="34" charset="0"/>
-                <a:ea typeface="微软雅黑" pitchFamily="34" charset="-122"/>
-                <a:cs typeface="微软雅黑" pitchFamily="34" charset="-120"/>
+                <a:latin typeface="微软雅黑" panose="020B0503020204020204" pitchFamily="34" charset="-122"/>
+                <a:ea typeface="微软雅黑" panose="020B0503020204020204" pitchFamily="34" charset="-122"/>
+                <a:cs typeface="微软雅黑" panose="020B0503020204020204" pitchFamily="34" charset="-120"/>
               </a:rPr>
               <a:t>•  </a:t>
             </a:r>
-            <a:pPr algn="l" indent="0" marL="0">
-              <a:lnSpc>
-                <a:spcPct val="115000"/>
-              </a:lnSpc>
-              <a:buNone/>
-            </a:pPr>
             <a:r>
               <a:rPr lang="en-US" sz="1800" dirty="0">
                 <a:solidFill>
@@ -11607,13 +11441,12 @@
             <a:avLst/>
           </a:prstGeom>
           <a:noFill/>
-          <a:ln/>
         </p:spPr>
         <p:txBody>
           <a:bodyPr wrap="square" rtlCol="0" anchor="t"/>
           <a:lstStyle/>
           <a:p>
-            <a:pPr algn="l" indent="0" marL="0">
+            <a:pPr marL="0" indent="0" algn="l">
               <a:lnSpc>
                 <a:spcPct val="115000"/>
               </a:lnSpc>
@@ -11624,18 +11457,12 @@
                 <a:solidFill>
                   <a:srgbClr val="1F4E9C"/>
                 </a:solidFill>
-                <a:latin typeface="微软雅黑" pitchFamily="34" charset="0"/>
-                <a:ea typeface="微软雅黑" pitchFamily="34" charset="-122"/>
-                <a:cs typeface="微软雅黑" pitchFamily="34" charset="-120"/>
+                <a:latin typeface="微软雅黑" panose="020B0503020204020204" pitchFamily="34" charset="-122"/>
+                <a:ea typeface="微软雅黑" panose="020B0503020204020204" pitchFamily="34" charset="-122"/>
+                <a:cs typeface="微软雅黑" panose="020B0503020204020204" pitchFamily="34" charset="-120"/>
               </a:rPr>
               <a:t>•  </a:t>
             </a:r>
-            <a:pPr algn="l" indent="0" marL="0">
-              <a:lnSpc>
-                <a:spcPct val="115000"/>
-              </a:lnSpc>
-              <a:buNone/>
-            </a:pPr>
             <a:r>
               <a:rPr lang="en-US" sz="1800" dirty="0">
                 <a:solidFill>
@@ -11663,13 +11490,12 @@
             <a:avLst/>
           </a:prstGeom>
           <a:noFill/>
-          <a:ln/>
         </p:spPr>
         <p:txBody>
           <a:bodyPr wrap="square" rtlCol="0" anchor="t"/>
           <a:lstStyle/>
           <a:p>
-            <a:pPr algn="l" indent="0" marL="0">
+            <a:pPr marL="0" indent="0" algn="l">
               <a:lnSpc>
                 <a:spcPct val="115000"/>
               </a:lnSpc>
@@ -11680,18 +11506,12 @@
                 <a:solidFill>
                   <a:srgbClr val="1F4E9C"/>
                 </a:solidFill>
-                <a:latin typeface="微软雅黑" pitchFamily="34" charset="0"/>
-                <a:ea typeface="微软雅黑" pitchFamily="34" charset="-122"/>
-                <a:cs typeface="微软雅黑" pitchFamily="34" charset="-120"/>
+                <a:latin typeface="微软雅黑" panose="020B0503020204020204" pitchFamily="34" charset="-122"/>
+                <a:ea typeface="微软雅黑" panose="020B0503020204020204" pitchFamily="34" charset="-122"/>
+                <a:cs typeface="微软雅黑" panose="020B0503020204020204" pitchFamily="34" charset="-120"/>
               </a:rPr>
               <a:t>•  </a:t>
             </a:r>
-            <a:pPr algn="l" indent="0" marL="0">
-              <a:lnSpc>
-                <a:spcPct val="115000"/>
-              </a:lnSpc>
-              <a:buNone/>
-            </a:pPr>
             <a:r>
               <a:rPr lang="en-US" sz="1800" dirty="0">
                 <a:solidFill>
@@ -11719,13 +11539,12 @@
             <a:avLst/>
           </a:prstGeom>
           <a:noFill/>
-          <a:ln/>
         </p:spPr>
         <p:txBody>
           <a:bodyPr wrap="square" rtlCol="0" anchor="t"/>
           <a:lstStyle/>
           <a:p>
-            <a:pPr algn="l" indent="0" marL="0">
+            <a:pPr marL="0" indent="0" algn="l">
               <a:buNone/>
             </a:pPr>
             <a:r>
@@ -11733,9 +11552,9 @@
                 <a:solidFill>
                   <a:srgbClr val="8A9099"/>
                 </a:solidFill>
-                <a:latin typeface="微软雅黑" pitchFamily="34" charset="0"/>
-                <a:ea typeface="微软雅黑" pitchFamily="34" charset="-122"/>
-                <a:cs typeface="微软雅黑" pitchFamily="34" charset="-120"/>
+                <a:latin typeface="微软雅黑" panose="020B0503020204020204" pitchFamily="34" charset="-122"/>
+                <a:ea typeface="微软雅黑" panose="020B0503020204020204" pitchFamily="34" charset="-122"/>
+                <a:cs typeface="微软雅黑" panose="020B0503020204020204" pitchFamily="34" charset="-120"/>
               </a:rPr>
               <a:t>知识点回看：重邮数据结构笔记「排序」对应小节；答疑进页面底部群。</a:t>
             </a:r>
@@ -11794,7 +11613,7 @@
     </a:clrScheme>
     <a:fontScheme name="Office">
       <a:majorFont>
-        <a:latin typeface="Calibri Light" panose="020F0302020204030204"/>
+        <a:latin typeface="Calibri Light"/>
         <a:ea typeface=""/>
         <a:cs typeface=""/>
         <a:font script="Jpan" typeface="游ゴシック Light"/>
@@ -11827,26 +11646,9 @@
         <a:font script="Viet" typeface="Times New Roman"/>
         <a:font script="Uigh" typeface="Microsoft Uighur"/>
         <a:font script="Geor" typeface="Sylfaen"/>
-        <a:font script="Armn" typeface="Arial"/>
-        <a:font script="Bugi" typeface="Leelawadee UI"/>
-        <a:font script="Bopo" typeface="Microsoft JhengHei"/>
-        <a:font script="Java" typeface="Javanese Text"/>
-        <a:font script="Lisu" typeface="Segoe UI"/>
-        <a:font script="Mymr" typeface="Myanmar Text"/>
-        <a:font script="Nkoo" typeface="Ebrima"/>
-        <a:font script="Olck" typeface="Nirmala UI"/>
-        <a:font script="Osma" typeface="Ebrima"/>
-        <a:font script="Phag" typeface="Phagspa"/>
-        <a:font script="Syrn" typeface="Estrangelo Edessa"/>
-        <a:font script="Syrj" typeface="Estrangelo Edessa"/>
-        <a:font script="Syre" typeface="Estrangelo Edessa"/>
-        <a:font script="Sora" typeface="Nirmala UI"/>
-        <a:font script="Tale" typeface="Microsoft Tai Le"/>
-        <a:font script="Talu" typeface="Microsoft New Tai Lue"/>
-        <a:font script="Tfng" typeface="Ebrima"/>
       </a:majorFont>
       <a:minorFont>
-        <a:latin typeface="Calibri" panose="020F0502020204030204"/>
+        <a:latin typeface="Calibri"/>
         <a:ea typeface=""/>
         <a:cs typeface=""/>
         <a:font script="Jpan" typeface="游ゴシック"/>
@@ -11879,23 +11681,6 @@
         <a:font script="Viet" typeface="Arial"/>
         <a:font script="Uigh" typeface="Microsoft Uighur"/>
         <a:font script="Geor" typeface="Sylfaen"/>
-        <a:font script="Armn" typeface="Arial"/>
-        <a:font script="Bugi" typeface="Leelawadee UI"/>
-        <a:font script="Bopo" typeface="Microsoft JhengHei"/>
-        <a:font script="Java" typeface="Javanese Text"/>
-        <a:font script="Lisu" typeface="Segoe UI"/>
-        <a:font script="Mymr" typeface="Myanmar Text"/>
-        <a:font script="Nkoo" typeface="Ebrima"/>
-        <a:font script="Olck" typeface="Nirmala UI"/>
-        <a:font script="Osma" typeface="Ebrima"/>
-        <a:font script="Phag" typeface="Phagspa"/>
-        <a:font script="Syrn" typeface="Estrangelo Edessa"/>
-        <a:font script="Syrj" typeface="Estrangelo Edessa"/>
-        <a:font script="Syre" typeface="Estrangelo Edessa"/>
-        <a:font script="Sora" typeface="Nirmala UI"/>
-        <a:font script="Tale" typeface="Microsoft Tai Le"/>
-        <a:font script="Talu" typeface="Microsoft New Tai Lue"/>
-        <a:font script="Tfng" typeface="Ebrima"/>
       </a:minorFont>
     </a:fontScheme>
     <a:fmtScheme name="Office">
@@ -12036,8 +11821,265 @@
       </a:bgFillStyleLst>
     </a:fmtScheme>
   </a:themeElements>
-  <a:objectDefaults/>
-  <a:extraClrSchemeLst/>
+  <a:extLst>
+    <a:ext uri="{05A4C25C-085E-4340-85A3-A5531E510DB2}">
+      <thm15:themeFamily xmlns:thm15="http://schemas.microsoft.com/office/thememl/2012/main" name="Office Theme" id="{62F939B6-93AF-4DB8-9C6B-D6C7DFDC589F}" vid="{4A3C46E8-61CC-4603-A589-7422A47A8E4A}"/>
+    </a:ext>
+  </a:extLst>
+</a:theme>
+</file>
+
+<file path=ppt/theme/theme2.xml><?xml version="1.0" encoding="utf-8"?>
+<a:theme xmlns:a="http://schemas.openxmlformats.org/drawingml/2006/main" name="Office Theme">
+  <a:themeElements>
+    <a:clrScheme name="Office">
+      <a:dk1>
+        <a:sysClr val="windowText" lastClr="000000"/>
+      </a:dk1>
+      <a:lt1>
+        <a:sysClr val="window" lastClr="FFFFFF"/>
+      </a:lt1>
+      <a:dk2>
+        <a:srgbClr val="44546A"/>
+      </a:dk2>
+      <a:lt2>
+        <a:srgbClr val="E7E6E6"/>
+      </a:lt2>
+      <a:accent1>
+        <a:srgbClr val="4472C4"/>
+      </a:accent1>
+      <a:accent2>
+        <a:srgbClr val="ED7D31"/>
+      </a:accent2>
+      <a:accent3>
+        <a:srgbClr val="A5A5A5"/>
+      </a:accent3>
+      <a:accent4>
+        <a:srgbClr val="FFC000"/>
+      </a:accent4>
+      <a:accent5>
+        <a:srgbClr val="5B9BD5"/>
+      </a:accent5>
+      <a:accent6>
+        <a:srgbClr val="70AD47"/>
+      </a:accent6>
+      <a:hlink>
+        <a:srgbClr val="0563C1"/>
+      </a:hlink>
+      <a:folHlink>
+        <a:srgbClr val="954F72"/>
+      </a:folHlink>
+    </a:clrScheme>
+    <a:fontScheme name="Office">
+      <a:majorFont>
+        <a:latin typeface="Calibri Light"/>
+        <a:ea typeface=""/>
+        <a:cs typeface=""/>
+        <a:font script="Jpan" typeface="游ゴシック Light"/>
+        <a:font script="Hang" typeface="맑은 고딕"/>
+        <a:font script="Hans" typeface="等线 Light"/>
+        <a:font script="Hant" typeface="新細明體"/>
+        <a:font script="Arab" typeface="Times New Roman"/>
+        <a:font script="Hebr" typeface="Times New Roman"/>
+        <a:font script="Thai" typeface="Angsana New"/>
+        <a:font script="Ethi" typeface="Nyala"/>
+        <a:font script="Beng" typeface="Vrinda"/>
+        <a:font script="Gujr" typeface="Shruti"/>
+        <a:font script="Khmr" typeface="MoolBoran"/>
+        <a:font script="Knda" typeface="Tunga"/>
+        <a:font script="Guru" typeface="Raavi"/>
+        <a:font script="Cans" typeface="Euphemia"/>
+        <a:font script="Cher" typeface="Plantagenet Cherokee"/>
+        <a:font script="Yiii" typeface="Microsoft Yi Baiti"/>
+        <a:font script="Tibt" typeface="Microsoft Himalaya"/>
+        <a:font script="Thaa" typeface="MV Boli"/>
+        <a:font script="Deva" typeface="Mangal"/>
+        <a:font script="Telu" typeface="Gautami"/>
+        <a:font script="Taml" typeface="Latha"/>
+        <a:font script="Syrc" typeface="Estrangelo Edessa"/>
+        <a:font script="Orya" typeface="Kalinga"/>
+        <a:font script="Mlym" typeface="Kartika"/>
+        <a:font script="Laoo" typeface="DokChampa"/>
+        <a:font script="Sinh" typeface="Iskoola Pota"/>
+        <a:font script="Mong" typeface="Mongolian Baiti"/>
+        <a:font script="Viet" typeface="Times New Roman"/>
+        <a:font script="Uigh" typeface="Microsoft Uighur"/>
+        <a:font script="Geor" typeface="Sylfaen"/>
+      </a:majorFont>
+      <a:minorFont>
+        <a:latin typeface="Calibri"/>
+        <a:ea typeface=""/>
+        <a:cs typeface=""/>
+        <a:font script="Jpan" typeface="游ゴシック"/>
+        <a:font script="Hang" typeface="맑은 고딕"/>
+        <a:font script="Hans" typeface="等线"/>
+        <a:font script="Hant" typeface="新細明體"/>
+        <a:font script="Arab" typeface="Arial"/>
+        <a:font script="Hebr" typeface="Arial"/>
+        <a:font script="Thai" typeface="Cordia New"/>
+        <a:font script="Ethi" typeface="Nyala"/>
+        <a:font script="Beng" typeface="Vrinda"/>
+        <a:font script="Gujr" typeface="Shruti"/>
+        <a:font script="Khmr" typeface="DaunPenh"/>
+        <a:font script="Knda" typeface="Tunga"/>
+        <a:font script="Guru" typeface="Raavi"/>
+        <a:font script="Cans" typeface="Euphemia"/>
+        <a:font script="Cher" typeface="Plantagenet Cherokee"/>
+        <a:font script="Yiii" typeface="Microsoft Yi Baiti"/>
+        <a:font script="Tibt" typeface="Microsoft Himalaya"/>
+        <a:font script="Thaa" typeface="MV Boli"/>
+        <a:font script="Deva" typeface="Mangal"/>
+        <a:font script="Telu" typeface="Gautami"/>
+        <a:font script="Taml" typeface="Latha"/>
+        <a:font script="Syrc" typeface="Estrangelo Edessa"/>
+        <a:font script="Orya" typeface="Kalinga"/>
+        <a:font script="Mlym" typeface="Kartika"/>
+        <a:font script="Laoo" typeface="DokChampa"/>
+        <a:font script="Sinh" typeface="Iskoola Pota"/>
+        <a:font script="Mong" typeface="Mongolian Baiti"/>
+        <a:font script="Viet" typeface="Arial"/>
+        <a:font script="Uigh" typeface="Microsoft Uighur"/>
+        <a:font script="Geor" typeface="Sylfaen"/>
+      </a:minorFont>
+    </a:fontScheme>
+    <a:fmtScheme name="Office">
+      <a:fillStyleLst>
+        <a:solidFill>
+          <a:schemeClr val="phClr"/>
+        </a:solidFill>
+        <a:gradFill rotWithShape="1">
+          <a:gsLst>
+            <a:gs pos="0">
+              <a:schemeClr val="phClr">
+                <a:lumMod val="110000"/>
+                <a:satMod val="105000"/>
+                <a:tint val="67000"/>
+              </a:schemeClr>
+            </a:gs>
+            <a:gs pos="50000">
+              <a:schemeClr val="phClr">
+                <a:lumMod val="105000"/>
+                <a:satMod val="103000"/>
+                <a:tint val="73000"/>
+              </a:schemeClr>
+            </a:gs>
+            <a:gs pos="100000">
+              <a:schemeClr val="phClr">
+                <a:lumMod val="105000"/>
+                <a:satMod val="109000"/>
+                <a:tint val="81000"/>
+              </a:schemeClr>
+            </a:gs>
+          </a:gsLst>
+          <a:lin ang="5400000" scaled="0"/>
+        </a:gradFill>
+        <a:gradFill rotWithShape="1">
+          <a:gsLst>
+            <a:gs pos="0">
+              <a:schemeClr val="phClr">
+                <a:satMod val="103000"/>
+                <a:lumMod val="102000"/>
+                <a:tint val="94000"/>
+              </a:schemeClr>
+            </a:gs>
+            <a:gs pos="50000">
+              <a:schemeClr val="phClr">
+                <a:satMod val="110000"/>
+                <a:lumMod val="100000"/>
+                <a:shade val="100000"/>
+              </a:schemeClr>
+            </a:gs>
+            <a:gs pos="100000">
+              <a:schemeClr val="phClr">
+                <a:lumMod val="99000"/>
+                <a:satMod val="120000"/>
+                <a:shade val="78000"/>
+              </a:schemeClr>
+            </a:gs>
+          </a:gsLst>
+          <a:lin ang="5400000" scaled="0"/>
+        </a:gradFill>
+      </a:fillStyleLst>
+      <a:lnStyleLst>
+        <a:ln w="6350" cap="flat" cmpd="sng" algn="ctr">
+          <a:solidFill>
+            <a:schemeClr val="phClr"/>
+          </a:solidFill>
+          <a:prstDash val="solid"/>
+          <a:miter lim="800000"/>
+        </a:ln>
+        <a:ln w="12700" cap="flat" cmpd="sng" algn="ctr">
+          <a:solidFill>
+            <a:schemeClr val="phClr"/>
+          </a:solidFill>
+          <a:prstDash val="solid"/>
+          <a:miter lim="800000"/>
+        </a:ln>
+        <a:ln w="19050" cap="flat" cmpd="sng" algn="ctr">
+          <a:solidFill>
+            <a:schemeClr val="phClr"/>
+          </a:solidFill>
+          <a:prstDash val="solid"/>
+          <a:miter lim="800000"/>
+        </a:ln>
+      </a:lnStyleLst>
+      <a:effectStyleLst>
+        <a:effectStyle>
+          <a:effectLst/>
+        </a:effectStyle>
+        <a:effectStyle>
+          <a:effectLst/>
+        </a:effectStyle>
+        <a:effectStyle>
+          <a:effectLst>
+            <a:outerShdw blurRad="57150" dist="19050" dir="5400000" algn="ctr" rotWithShape="0">
+              <a:srgbClr val="000000">
+                <a:alpha val="63000"/>
+              </a:srgbClr>
+            </a:outerShdw>
+          </a:effectLst>
+        </a:effectStyle>
+      </a:effectStyleLst>
+      <a:bgFillStyleLst>
+        <a:solidFill>
+          <a:schemeClr val="phClr"/>
+        </a:solidFill>
+        <a:solidFill>
+          <a:schemeClr val="phClr">
+            <a:tint val="95000"/>
+            <a:satMod val="170000"/>
+          </a:schemeClr>
+        </a:solidFill>
+        <a:gradFill rotWithShape="1">
+          <a:gsLst>
+            <a:gs pos="0">
+              <a:schemeClr val="phClr">
+                <a:tint val="93000"/>
+                <a:satMod val="150000"/>
+                <a:shade val="98000"/>
+                <a:lumMod val="102000"/>
+              </a:schemeClr>
+            </a:gs>
+            <a:gs pos="50000">
+              <a:schemeClr val="phClr">
+                <a:tint val="98000"/>
+                <a:satMod val="130000"/>
+                <a:shade val="90000"/>
+                <a:lumMod val="103000"/>
+              </a:schemeClr>
+            </a:gs>
+            <a:gs pos="100000">
+              <a:schemeClr val="phClr">
+                <a:shade val="63000"/>
+                <a:satMod val="120000"/>
+              </a:schemeClr>
+            </a:gs>
+          </a:gsLst>
+          <a:lin ang="5400000" scaled="0"/>
+        </a:gradFill>
+      </a:bgFillStyleLst>
+    </a:fmtScheme>
+  </a:themeElements>
   <a:extLst>
     <a:ext uri="{05A4C25C-085E-4340-85A3-A5531E510DB2}">
       <thm15:themeFamily xmlns:thm15="http://schemas.microsoft.com/office/thememl/2012/main" name="Office Theme" id="{62F939B6-93AF-4DB8-9C6B-D6C7DFDC589F}" vid="{4A3C46E8-61CC-4603-A589-7422A47A8E4A}"/>
